--- a/slides/export/Archive_of_Extinction_Final_BDC2026.pptx
+++ b/slides/export/Archive_of_Extinction_Final_BDC2026.pptx
@@ -22,6 +22,10 @@
     <p:sldId id="270" r:id="rId21"/>
     <p:sldId id="271" r:id="rId22"/>
     <p:sldId id="272" r:id="rId23"/>
+    <p:sldId id="273" r:id="rId24"/>
+    <p:sldId id="274" r:id="rId25"/>
+    <p:sldId id="275" r:id="rId26"/>
+    <p:sldId id="276" r:id="rId27"/>
   </p:sldIdLst>
   <p:sldSz cx="12191695" cy="6858000" type="screen4x3"/>
   <p:notesSz cx="6858000" cy="9144000"/>
@@ -3120,7 +3124,7 @@
           <a:lstStyle/>
           <a:p>
             <a:r>
-              <a:t>Archive of Extinction</a:t>
+              <a:t>Archive of Extinction: AI Memorial for Lost Species</a:t>
             </a:r>
           </a:p>
         </p:txBody>
@@ -3141,12 +3145,7 @@
           <a:lstStyle/>
           <a:p>
             <a:r>
-              <a:t>Environmental Hypothesis Dossiers</a:t>
-            </a:r>
-          </a:p>
-          <a:p>
-            <a:r>
-              <a:t>An AI Memorial for Lost Species - Sensory Time Capsule</a:t>
+              <a:t>Umwelt Hypothesis Dossiers / Sensory Time Capsule</a:t>
             </a:r>
           </a:p>
           <a:p>
@@ -3195,7 +3194,7 @@
           <a:lstStyle/>
           <a:p>
             <a:r>
-              <a:t>Two species - two dossiers</a:t>
+              <a:t>User journey &amp; scene flow</a:t>
             </a:r>
           </a:p>
         </p:txBody>
@@ -3207,91 +3206,43 @@
             <a:spLocks noGrp="1"/>
           </p:cNvSpPr>
           <p:nvPr>
-            <p:ph idx="1" sz="half"/>
-          </p:nvPr>
-        </p:nvSpPr>
-        <p:spPr/>
-        <p:txBody>
-          <a:bodyPr/>
-          <a:lstStyle/>
-          <a:p>
-            <a:pPr>
-              <a:defRPr b="1" sz="1400"/>
-            </a:pPr>
-            <a:r>
-              <a:t>Woolly mammoth</a:t>
-            </a:r>
-          </a:p>
-          <a:p>
-            <a:pPr>
-              <a:defRPr sz="1300"/>
-            </a:pPr>
-            <a:r>
-              <a:t>Arctic rhythm + mammoth steppe; scenes Scene_Bio_01 - Scene_Sensory_01.</a:t>
-            </a:r>
-          </a:p>
-          <a:p>
-            <a:pPr>
-              <a:defRPr sz="1300"/>
-            </a:pPr>
-            <a:r>
-              <a:t>Lynch 2015 circadian-related genes; Lu 2010 reindeer [Interpolated]; Zimov 2012 habitat.</a:t>
-            </a:r>
-          </a:p>
-          <a:p>
-            <a:pPr>
-              <a:defRPr sz="1300"/>
-            </a:pPr>
-            <a:r>
-              <a:t>TRPV3: Lynch 2015 primary; Kim 2017 bioRxiv optional + labeled.</a:t>
-            </a:r>
-          </a:p>
-        </p:txBody>
-      </p:sp>
-      <p:sp>
-        <p:nvSpPr>
-          <p:cNvPr id="4" name="Content Placeholder 3"/>
-          <p:cNvSpPr>
-            <a:spLocks noGrp="1"/>
-          </p:cNvSpPr>
-          <p:nvPr>
-            <p:ph idx="2" sz="half"/>
-          </p:nvPr>
-        </p:nvSpPr>
-        <p:spPr/>
-        <p:txBody>
-          <a:bodyPr/>
-          <a:lstStyle/>
-          <a:p>
-            <a:pPr>
-              <a:defRPr b="1" sz="1400"/>
-            </a:pPr>
-            <a:r>
-              <a:t>Thylacine</a:t>
-            </a:r>
-          </a:p>
-          <a:p>
-            <a:pPr>
-              <a:defRPr sz="1300"/>
-            </a:pPr>
-            <a:r>
-              <a:t>Crepuscular / night vision metaphor; colonial context mandatory.</a:t>
-            </a:r>
-          </a:p>
-          <a:p>
-            <a:pPr>
-              <a:defRPr sz="1300"/>
-            </a:pPr>
-            <a:r>
-              <a:t>Pozniak 2018 orbit; Mass &amp; Supin 2020 RGC [Interpolated]; Paddle; Sleightholme &amp; Campbell.</a:t>
-            </a:r>
-          </a:p>
-          <a:p>
-            <a:pPr>
-              <a:defRPr sz="1300"/>
-            </a:pPr>
-            <a:r>
-              <a:t>T5: Clements + Palawa: Rimmer, Lehman; Schlunke 2025.</a:t>
+            <p:ph idx="1"/>
+          </p:nvPr>
+        </p:nvSpPr>
+        <p:spPr/>
+        <p:txBody>
+          <a:bodyPr/>
+          <a:lstStyle/>
+          <a:p>
+            <a:pPr>
+              <a:defRPr sz="1600"/>
+            </a:pPr>
+            <a:r>
+              <a:t>Mammoth path: Scene_Bio_01 -&gt; Scene_Environment_02 -&gt; Scene_Landscape_01 -&gt; Scene_Sensory_01.</a:t>
+            </a:r>
+          </a:p>
+          <a:p>
+            <a:pPr>
+              <a:defRPr sz="1600"/>
+            </a:pPr>
+            <a:r>
+              <a:t>Thylacine path: Scene_Bio_02 -&gt; Scene_POV_01 -&gt; Scene_Context_01.</a:t>
+            </a:r>
+          </a:p>
+          <a:p>
+            <a:pPr>
+              <a:defRPr sz="1600"/>
+            </a:pPr>
+            <a:r>
+              <a:t>Shared modules: UI_Indigenous_Context -&gt; UI_Ethics_Fork -&gt; UI_Reflection_Log.</a:t>
+            </a:r>
+          </a:p>
+          <a:p>
+            <a:pPr>
+              <a:defRPr sz="1600"/>
+            </a:pPr>
+            <a:r>
+              <a:t>All three load-bearing modules ship in the MVP: Dossier -&gt; Mixer -&gt; Ethics.</a:t>
             </a:r>
           </a:p>
         </p:txBody>
@@ -3330,7 +3281,7 @@
           <a:lstStyle/>
           <a:p>
             <a:r>
-              <a:t>Experience architecture (scene IDs)</a:t>
+              <a:t>Methods &amp; evidence protocol</a:t>
             </a:r>
           </a:p>
         </p:txBody>
@@ -3354,23 +3305,31 @@
               <a:defRPr sz="1600"/>
             </a:pPr>
             <a:r>
-              <a:t>Mammoth: Scene_Bio_01 -&gt; Scene_Environment_02 -&gt; Scene_Landscape_01 -&gt; Scene_Sensory_01.</a:t>
-            </a:r>
-          </a:p>
-          <a:p>
-            <a:pPr>
-              <a:defRPr sz="1600"/>
-            </a:pPr>
-            <a:r>
-              <a:t>Thylacine: Scene_Bio_02 -&gt; Scene_POV_01 -&gt; Scene_Context_01.</a:t>
-            </a:r>
-          </a:p>
-          <a:p>
-            <a:pPr>
-              <a:defRPr sz="1600"/>
-            </a:pPr>
-            <a:r>
-              <a:t>Shared: UI_Indigenous_Context -&gt; UI_Ethics_Fork -&gt; UI_Reflection_Log.</a:t>
+              <a:t>Claims are imported to structured cards / JSON; each block is labeled Cited / Modeled / Speculative.</a:t>
+            </a:r>
+          </a:p>
+          <a:p>
+            <a:pPr>
+              <a:defRPr sz="1600"/>
+            </a:pPr>
+            <a:r>
+              <a:t>Science visuals can include ggplot2 stills for tusk isotope summaries and time-series evidence panels.</a:t>
+            </a:r>
+          </a:p>
+          <a:p>
+            <a:pPr>
+              <a:defRPr sz="1600"/>
+            </a:pPr>
+            <a:r>
+              <a:t>Generative runs log model, date, and seed where relevant; DSP rules are documented rather than hidden.</a:t>
+            </a:r>
+          </a:p>
+          <a:p>
+            <a:pPr>
+              <a:defRPr sz="1600"/>
+            </a:pPr>
+            <a:r>
+              <a:t>Process includes at least two evidence audits during production to remove unlabeled claims.</a:t>
             </a:r>
           </a:p>
         </p:txBody>
@@ -3409,7 +3368,7 @@
           <a:lstStyle/>
           <a:p>
             <a:r>
-              <a:t>Literature - Mammoth slots M1-M5</a:t>
+              <a:t>Ethics, colonial violence &amp; ecological memory</a:t>
             </a:r>
           </a:p>
         </p:txBody>
@@ -3433,39 +3392,31 @@
               <a:defRPr sz="1600"/>
             </a:pPr>
             <a:r>
-              <a:t>M1 Lynch et al. 2015 Cell Rep 10.1016/j.celrep.2015.06.027</a:t>
-            </a:r>
-          </a:p>
-          <a:p>
-            <a:pPr>
-              <a:defRPr sz="1600"/>
-            </a:pPr>
-            <a:r>
-              <a:t>M2 Lu et al. 2010 Curr Biol 10.1016/j.cub.2010.01.042</a:t>
-            </a:r>
-          </a:p>
-          <a:p>
-            <a:pPr>
-              <a:defRPr sz="1600"/>
-            </a:pPr>
-            <a:r>
-              <a:t>M3 Zimov et al. 2012 QSR 10.1016/j.quascirev.2012.08.004</a:t>
-            </a:r>
-          </a:p>
-          <a:p>
-            <a:pPr>
-              <a:defRPr sz="1600"/>
-            </a:pPr>
-            <a:r>
-              <a:t>M4 Kim et al. 2017 bioRxiv 10.1101/151746 (preprint)</a:t>
-            </a:r>
-          </a:p>
-          <a:p>
-            <a:pPr>
-              <a:defRPr sz="1600"/>
-            </a:pPr>
-            <a:r>
-              <a:t>M5 Sherkow &amp; Greely 2013 Science 10.1126/science.1236946</a:t>
+              <a:t>Sherkow &amp; Greely (2013): trade-offs between laboratory de-extinction, in situ conservation, legal novelty, and ecological liability.</a:t>
+            </a:r>
+          </a:p>
+          <a:p>
+            <a:pPr>
+              <a:defRPr sz="1600"/>
+            </a:pPr>
+            <a:r>
+              <a:t>Thylacine loss is entangled with violence against Palawa peoples and Country in lutruwita / Tasmania.</a:t>
+            </a:r>
+          </a:p>
+          <a:p>
+            <a:pPr>
+              <a:defRPr sz="1600"/>
+            </a:pPr>
+            <a:r>
+              <a:t>Interface protocol: Palawa-first voices where possible; author positionality is explicit; no tourism copy as TEK.</a:t>
+            </a:r>
+          </a:p>
+          <a:p>
+            <a:pPr>
+              <a:defRPr sz="1600"/>
+            </a:pPr>
+            <a:r>
+              <a:t>The archive is remembrance and accountability, not resurrection spectacle.</a:t>
             </a:r>
           </a:p>
         </p:txBody>
@@ -3504,7 +3455,7 @@
           <a:lstStyle/>
           <a:p>
             <a:r>
-              <a:t>Literature - Thylacine T1-T5 + sovereignty</a:t>
+              <a:t>Ideation &amp; design process</a:t>
             </a:r>
           </a:p>
         </p:txBody>
@@ -3528,31 +3479,23 @@
               <a:defRPr sz="1600"/>
             </a:pPr>
             <a:r>
-              <a:t>T1 Pozniak 2018 10.1002/ar.23910 | T2 Mass &amp; Supin 2020 10.31857/S0002332920060107</a:t>
-            </a:r>
-          </a:p>
-          <a:p>
-            <a:pPr>
-              <a:defRPr sz="1600"/>
-            </a:pPr>
-            <a:r>
-              <a:t>T3 Paddle 2000 ISBN 9780521782196 | T4 Sleightholme &amp; Campbell 2016 10.1080/00222933.2016.1217037</a:t>
-            </a:r>
-          </a:p>
-          <a:p>
-            <a:pPr>
-              <a:defRPr sz="1600"/>
-            </a:pPr>
-            <a:r>
-              <a:t>T5 Clements 2025 10.1177/13534858251272203</a:t>
-            </a:r>
-          </a:p>
-          <a:p>
-            <a:pPr>
-              <a:defRPr sz="1600"/>
-            </a:pPr>
-            <a:r>
-              <a:t>Palawa: Rimmer 2020 Artlink | Lehman 2013 Griffith Review | Schlunke 2025 10.1017/ext.2025.10008</a:t>
+              <a:t>1 Map skills -&gt; 2 Intersection statements -&gt; 3 Rubric stress-test -&gt; 4 Biology sprint.</a:t>
+            </a:r>
+          </a:p>
+          <a:p>
+            <a:pPr>
+              <a:defRPr sz="1600"/>
+            </a:pPr>
+            <a:r>
+              <a:t>5 Bio / digital split -&gt; 6 Narrative draft -&gt; 7 Prototype + deliverables -&gt; 8 Build / polish / Q&amp;A.</a:t>
+            </a:r>
+          </a:p>
+          <a:p>
+            <a:pPr>
+              <a:defRPr sz="1600"/>
+            </a:pPr>
+            <a:r>
+              <a:t>This process is aligned with the course workbook, biodesign_cursor_agent.md, and BDC judging logic.</a:t>
             </a:r>
           </a:p>
         </p:txBody>
@@ -3591,7 +3534,7 @@
           <a:lstStyle/>
           <a:p>
             <a:r>
-              <a:t>BDC rubric self-assessment</a:t>
+              <a:t>Production plan (4-week spine)</a:t>
             </a:r>
           </a:p>
         </p:txBody>
@@ -3615,31 +3558,31 @@
               <a:defRPr sz="1600"/>
             </a:pPr>
             <a:r>
-              <a:t>Narrative: discover rhythm -&gt; loss -&gt; ethical fork (target strong).</a:t>
-            </a:r>
-          </a:p>
-          <a:p>
-            <a:pPr>
-              <a:defRPr sz="1600"/>
-            </a:pPr>
-            <a:r>
-              <a:t>Concept: time as spine; one biological proxy per scene.</a:t>
-            </a:r>
-          </a:p>
-          <a:p>
-            <a:pPr>
-              <a:defRPr sz="1600"/>
-            </a:pPr>
-            <a:r>
-              <a:t>Context: de-extinction trade-offs + Indigenous sovereignty (expand citations).</a:t>
-            </a:r>
-          </a:p>
-          <a:p>
-            <a:pPr>
-              <a:defRPr sz="1600"/>
-            </a:pPr>
-            <a:r>
-              <a:t>Reflection: interactive epistemic UI + user reflection + AI limits disclosed.</a:t>
+              <a:t>Week 1: literature grid, storyboard, WebXR shell, evidence audit #1.</a:t>
+            </a:r>
+          </a:p>
+          <a:p>
+            <a:pPr>
+              <a:defRPr sz="1600"/>
+            </a:pPr>
+            <a:r>
+              <a:t>Week 2: dossier UI, time scrubber, environment logic, ethics drafts, methods / limitations slide.</a:t>
+            </a:r>
+          </a:p>
+          <a:p>
+            <a:pPr>
+              <a:defRPr sz="1600"/>
+            </a:pPr>
+            <a:r>
+              <a:t>Week 3: integrate thylacine context, reflection panel, sonification, evidence audit #2.</a:t>
+            </a:r>
+          </a:p>
+          <a:p>
+            <a:pPr>
+              <a:defRPr sz="1600"/>
+            </a:pPr>
+            <a:r>
+              <a:t>Week 4: polish, accessibility, P0 bugs only, 10-min talk, 5-min Q&amp;A, trailer export.</a:t>
             </a:r>
           </a:p>
         </p:txBody>
@@ -3678,7 +3621,7 @@
           <a:lstStyle/>
           <a:p>
             <a:r>
-              <a:t>Deliverables &amp; physical strategy</a:t>
+              <a:t>Biodesign Challenge fit</a:t>
             </a:r>
           </a:p>
         </p:txBody>
@@ -3702,23 +3645,31 @@
               <a:defRPr sz="1600"/>
             </a:pPr>
             <a:r>
-              <a:t>10 min talk + 5 min Q&amp;A; 1-5 min creative video; slides to Drive.</a:t>
-            </a:r>
-          </a:p>
-          <a:p>
-            <a:pPr>
-              <a:defRPr sz="1600"/>
-            </a:pPr>
-            <a:r>
-              <a:t>Visuals + WebXR; minimal tactile anchor + QR (no wet-lab for v1).</a:t>
-            </a:r>
-          </a:p>
-          <a:p>
-            <a:pPr>
-              <a:defRPr sz="1600"/>
-            </a:pPr>
-            <a:r>
-              <a:t>Planning source of truth: BDC_2026_Extinction_Archive_Planning_Document.md + PROJECT_PLAN.md.</a:t>
+              <a:t>Narrative: clear emotional and spatial journey supported by live digital demo.</a:t>
+            </a:r>
+          </a:p>
+          <a:p>
+            <a:pPr>
+              <a:defRPr sz="1600"/>
+            </a:pPr>
+            <a:r>
+              <a:t>Concept: temporal niche + Umwelt + evidence literacy creates a distinct biodigital proposition.</a:t>
+            </a:r>
+          </a:p>
+          <a:p>
+            <a:pPr>
+              <a:defRPr sz="1600"/>
+            </a:pPr>
+            <a:r>
+              <a:t>Context: biodiversity loss, de-extinction ethics, misinformation risk, and Indigenous sovereignty.</a:t>
+            </a:r>
+          </a:p>
+          <a:p>
+            <a:pPr>
+              <a:defRPr sz="1600"/>
+            </a:pPr>
+            <a:r>
+              <a:t>Reflection: documented limitations, epistemic layers, prompt / model logging, user reflection.</a:t>
             </a:r>
           </a:p>
         </p:txBody>
@@ -3757,7 +3708,7 @@
           <a:lstStyle/>
           <a:p>
             <a:r>
-              <a:t>Risks we mitigate</a:t>
+              <a:t>Deliverables &amp; summit package</a:t>
             </a:r>
           </a:p>
         </p:txBody>
@@ -3781,23 +3732,31 @@
               <a:defRPr sz="1600"/>
             </a:pPr>
             <a:r>
-              <a:t>"Just VR art" - always show citation strip.</a:t>
-            </a:r>
-          </a:p>
-          <a:p>
-            <a:pPr>
-              <a:defRPr sz="1600"/>
-            </a:pPr>
-            <a:r>
-              <a:t>Overclaiming PER2 - UI uses circadian-related genes until PDF verified.</a:t>
-            </a:r>
-          </a:p>
-          <a:p>
-            <a:pPr>
-              <a:defRPr sz="1600"/>
-            </a:pPr>
-            <a:r>
-              <a:t>Token TEK - Palawa-led sources + positionality statement.</a:t>
+              <a:t>10-minute oral presentation + 5-minute Q&amp;A.</a:t>
+            </a:r>
+          </a:p>
+          <a:p>
+            <a:pPr>
+              <a:defRPr sz="1600"/>
+            </a:pPr>
+            <a:r>
+              <a:t>Visual renderings, WebXR experience, and citation-aware UI captures.</a:t>
+            </a:r>
+          </a:p>
+          <a:p>
+            <a:pPr>
+              <a:defRPr sz="1600"/>
+            </a:pPr>
+            <a:r>
+              <a:t>Minimal physical anchor + QR for reliable access in gallery or talk format.</a:t>
+            </a:r>
+          </a:p>
+          <a:p>
+            <a:pPr>
+              <a:defRPr sz="1600"/>
+            </a:pPr>
+            <a:r>
+              <a:t>1-5 minute creative trailer, PPT deck, methods appendix, and citations / limits in parallel.</a:t>
             </a:r>
           </a:p>
         </p:txBody>
@@ -3827,42 +3786,254 @@
             <a:spLocks noGrp="1"/>
           </p:cNvSpPr>
           <p:nvPr>
-            <p:ph type="ctrTitle"/>
-          </p:nvPr>
-        </p:nvSpPr>
-        <p:spPr/>
-        <p:txBody>
-          <a:bodyPr/>
-          <a:lstStyle/>
-          <a:p>
-            <a:r>
-              <a:t>Thank you</a:t>
-            </a:r>
-          </a:p>
-        </p:txBody>
-      </p:sp>
-      <p:sp>
-        <p:nvSpPr>
-          <p:cNvPr id="3" name="Subtitle 2"/>
-          <p:cNvSpPr>
-            <a:spLocks noGrp="1"/>
-          </p:cNvSpPr>
-          <p:nvPr>
-            <p:ph type="subTitle" idx="1"/>
-          </p:nvPr>
-        </p:nvSpPr>
-        <p:spPr/>
-        <p:txBody>
-          <a:bodyPr/>
-          <a:lstStyle/>
-          <a:p>
-            <a:r>
-              <a:t>Archive of Extinction</a:t>
-            </a:r>
-          </a:p>
-          <a:p>
-            <a:r>
-              <a:t>Questions - biodesignchallenge.org</a:t>
+            <p:ph type="title"/>
+          </p:nvPr>
+        </p:nvSpPr>
+        <p:spPr/>
+        <p:txBody>
+          <a:bodyPr/>
+          <a:lstStyle/>
+          <a:p>
+            <a:r>
+              <a:t>Key literature - mammoth dossier</a:t>
+            </a:r>
+          </a:p>
+        </p:txBody>
+      </p:sp>
+      <p:sp>
+        <p:nvSpPr>
+          <p:cNvPr id="3" name="Content Placeholder 2"/>
+          <p:cNvSpPr>
+            <a:spLocks noGrp="1"/>
+          </p:cNvSpPr>
+          <p:nvPr>
+            <p:ph idx="1"/>
+          </p:nvPr>
+        </p:nvSpPr>
+        <p:spPr/>
+        <p:txBody>
+          <a:bodyPr/>
+          <a:lstStyle/>
+          <a:p>
+            <a:pPr>
+              <a:defRPr sz="1600"/>
+            </a:pPr>
+            <a:r>
+              <a:t>Lynch et al. 2015. Cell Reports. Elephantid genomes and Arctic adaptation. DOI 10.1016/j.celrep.2015.06.027</a:t>
+            </a:r>
+          </a:p>
+          <a:p>
+            <a:pPr>
+              <a:defRPr sz="1600"/>
+            </a:pPr>
+            <a:r>
+              <a:t>Lu et al. 2010. Current Biology. Reindeer circadian attenuation. DOI 10.1016/j.cub.2010.01.042</a:t>
+            </a:r>
+          </a:p>
+          <a:p>
+            <a:pPr>
+              <a:defRPr sz="1600"/>
+            </a:pPr>
+            <a:r>
+              <a:t>Zimov et al. 2012. Quaternary Science Reviews. Mammoth steppe productivity. DOI 10.1016/j.quascirev.2012.08.004</a:t>
+            </a:r>
+          </a:p>
+          <a:p>
+            <a:pPr>
+              <a:defRPr sz="1600"/>
+            </a:pPr>
+            <a:r>
+              <a:t>Wooller et al. 2021. Science. Lifetime mobility of an Arctic woolly mammoth. DOI 10.1126/science.abg1134</a:t>
+            </a:r>
+          </a:p>
+          <a:p>
+            <a:pPr>
+              <a:defRPr sz="1600"/>
+            </a:pPr>
+            <a:r>
+              <a:t>Nogues-Bravo et al. 2008. PLoS Biology. Climate, humans, and mammoth extinction. DOI 10.1371/journal.pbio.0060079</a:t>
+            </a:r>
+          </a:p>
+        </p:txBody>
+      </p:sp>
+    </p:spTree>
+  </p:cSld>
+  <p:clrMapOvr>
+    <a:masterClrMapping/>
+  </p:clrMapOvr>
+</p:sld>
+</file>
+
+<file path=ppt/slides/slide18.xml><?xml version="1.0" encoding="utf-8"?>
+<p:sld xmlns:a="http://schemas.openxmlformats.org/drawingml/2006/main" xmlns:p="http://schemas.openxmlformats.org/presentationml/2006/main" xmlns:r="http://schemas.openxmlformats.org/officeDocument/2006/relationships">
+  <p:cSld>
+    <p:spTree>
+      <p:nvGrpSpPr>
+        <p:cNvPr id="1" name=""/>
+        <p:cNvGrpSpPr/>
+        <p:nvPr/>
+      </p:nvGrpSpPr>
+      <p:grpSpPr/>
+      <p:sp>
+        <p:nvSpPr>
+          <p:cNvPr id="2" name="Title 1"/>
+          <p:cNvSpPr>
+            <a:spLocks noGrp="1"/>
+          </p:cNvSpPr>
+          <p:nvPr>
+            <p:ph type="title"/>
+          </p:nvPr>
+        </p:nvSpPr>
+        <p:spPr/>
+        <p:txBody>
+          <a:bodyPr/>
+          <a:lstStyle/>
+          <a:p>
+            <a:r>
+              <a:t>Key literature - thylacine dossier &amp; sovereignty</a:t>
+            </a:r>
+          </a:p>
+        </p:txBody>
+      </p:sp>
+      <p:sp>
+        <p:nvSpPr>
+          <p:cNvPr id="3" name="Content Placeholder 2"/>
+          <p:cNvSpPr>
+            <a:spLocks noGrp="1"/>
+          </p:cNvSpPr>
+          <p:nvPr>
+            <p:ph idx="1"/>
+          </p:nvPr>
+        </p:nvSpPr>
+        <p:spPr/>
+        <p:txBody>
+          <a:bodyPr/>
+          <a:lstStyle/>
+          <a:p>
+            <a:pPr>
+              <a:defRPr sz="1600"/>
+            </a:pPr>
+            <a:r>
+              <a:t>Pozniak et al. 2018. Orbit / skull morphology and diel activity. DOI 10.1002/ar.23910</a:t>
+            </a:r>
+          </a:p>
+          <a:p>
+            <a:pPr>
+              <a:defRPr sz="1600"/>
+            </a:pPr>
+            <a:r>
+              <a:t>Mass &amp; Supin 2020. RGC topography methods. DOI 10.31857/S0002332920060107 [Interpolated in thylacine POV]</a:t>
+            </a:r>
+          </a:p>
+          <a:p>
+            <a:pPr>
+              <a:defRPr sz="1600"/>
+            </a:pPr>
+            <a:r>
+              <a:t>Paddle 2000. The Last Tasmanian Tiger. ISBN 9780521782196</a:t>
+            </a:r>
+          </a:p>
+          <a:p>
+            <a:pPr>
+              <a:defRPr sz="1600"/>
+            </a:pPr>
+            <a:r>
+              <a:t>Sleightholme &amp; Campbell 2016. Human pressures and extinction framing. DOI 10.1080/00222933.2016.1217037</a:t>
+            </a:r>
+          </a:p>
+          <a:p>
+            <a:pPr>
+              <a:defRPr sz="1600"/>
+            </a:pPr>
+            <a:r>
+              <a:t>Clements 2025. DOI 10.1177/13534858251272203 | Rimmer 2020 Artlink | Lehman 2013 Griffith Review | Schlunke 2025 DOI 10.1017/ext.2025.10008</a:t>
+            </a:r>
+          </a:p>
+        </p:txBody>
+      </p:sp>
+    </p:spTree>
+  </p:cSld>
+  <p:clrMapOvr>
+    <a:masterClrMapping/>
+  </p:clrMapOvr>
+</p:sld>
+</file>
+
+<file path=ppt/slides/slide19.xml><?xml version="1.0" encoding="utf-8"?>
+<p:sld xmlns:a="http://schemas.openxmlformats.org/drawingml/2006/main" xmlns:p="http://schemas.openxmlformats.org/presentationml/2006/main" xmlns:r="http://schemas.openxmlformats.org/officeDocument/2006/relationships">
+  <p:cSld>
+    <p:spTree>
+      <p:nvGrpSpPr>
+        <p:cNvPr id="1" name=""/>
+        <p:cNvGrpSpPr/>
+        <p:nvPr/>
+      </p:nvGrpSpPr>
+      <p:grpSpPr/>
+      <p:sp>
+        <p:nvSpPr>
+          <p:cNvPr id="2" name="Title 1"/>
+          <p:cNvSpPr>
+            <a:spLocks noGrp="1"/>
+          </p:cNvSpPr>
+          <p:nvPr>
+            <p:ph type="title"/>
+          </p:nvPr>
+        </p:nvSpPr>
+        <p:spPr/>
+        <p:txBody>
+          <a:bodyPr/>
+          <a:lstStyle/>
+          <a:p>
+            <a:r>
+              <a:t>Limitations &amp; honest reflection</a:t>
+            </a:r>
+          </a:p>
+        </p:txBody>
+      </p:sp>
+      <p:sp>
+        <p:nvSpPr>
+          <p:cNvPr id="3" name="Content Placeholder 2"/>
+          <p:cNvSpPr>
+            <a:spLocks noGrp="1"/>
+          </p:cNvSpPr>
+          <p:nvPr>
+            <p:ph idx="1"/>
+          </p:nvPr>
+        </p:nvSpPr>
+        <p:spPr/>
+        <p:txBody>
+          <a:bodyPr/>
+          <a:lstStyle/>
+          <a:p>
+            <a:pPr>
+              <a:defRPr sz="1600"/>
+            </a:pPr>
+            <a:r>
+              <a:t>No living mammoth or thylacine: all sensory reconstruction is partial, bounded, and explicitly tiered.</a:t>
+            </a:r>
+          </a:p>
+          <a:p>
+            <a:pPr>
+              <a:defRPr sz="1600"/>
+            </a:pPr>
+            <a:r>
+              <a:t>Generative media can feel real, so the deck and UI design against deceptive realism.</a:t>
+            </a:r>
+          </a:p>
+          <a:p>
+            <a:pPr>
+              <a:defRPr sz="1600"/>
+            </a:pPr>
+            <a:r>
+              <a:t>Two people / short sprint means narrow but deep: one strong integrated experience beats many weak scenes.</a:t>
+            </a:r>
+          </a:p>
+          <a:p>
+            <a:pPr>
+              <a:defRPr sz="1600"/>
+            </a:pPr>
+            <a:r>
+              <a:t>Desktop WebXR path is canonical; any AR or mobile path is supportive rather than mission-critical.</a:t>
             </a:r>
           </a:p>
         </p:txBody>
@@ -3941,23 +4112,175 @@
               <a:defRPr sz="1600"/>
             </a:pPr>
             <a:r>
-              <a:t>Team: GUO XIAO YUE - ID MC569254</a:t>
-            </a:r>
-          </a:p>
-          <a:p>
-            <a:pPr>
-              <a:defRPr sz="1600"/>
-            </a:pPr>
-            <a:r>
-              <a:t>Team: LIU JIA QUN - ID MC569293</a:t>
-            </a:r>
-          </a:p>
-          <a:p>
-            <a:pPr>
-              <a:defRPr sz="1600"/>
-            </a:pPr>
-            <a:r>
-              <a:t>Program: MDes - Digital Art &amp; AI Technology</a:t>
+              <a:t>GUO XIAO YUE - MC569254</a:t>
+            </a:r>
+          </a:p>
+          <a:p>
+            <a:pPr>
+              <a:defRPr sz="1600"/>
+            </a:pPr>
+            <a:r>
+              <a:t>LIU JIA QUN - MC569293</a:t>
+            </a:r>
+          </a:p>
+          <a:p>
+            <a:pPr>
+              <a:defRPr sz="1600"/>
+            </a:pPr>
+            <a:r>
+              <a:t>Program: Digital Art &amp; AI Technology (MDes) | 2-person team</a:t>
+            </a:r>
+          </a:p>
+        </p:txBody>
+      </p:sp>
+    </p:spTree>
+  </p:cSld>
+  <p:clrMapOvr>
+    <a:masterClrMapping/>
+  </p:clrMapOvr>
+</p:sld>
+</file>
+
+<file path=ppt/slides/slide20.xml><?xml version="1.0" encoding="utf-8"?>
+<p:sld xmlns:a="http://schemas.openxmlformats.org/drawingml/2006/main" xmlns:p="http://schemas.openxmlformats.org/presentationml/2006/main" xmlns:r="http://schemas.openxmlformats.org/officeDocument/2006/relationships">
+  <p:cSld>
+    <p:spTree>
+      <p:nvGrpSpPr>
+        <p:cNvPr id="1" name=""/>
+        <p:cNvGrpSpPr/>
+        <p:nvPr/>
+      </p:nvGrpSpPr>
+      <p:grpSpPr/>
+      <p:sp>
+        <p:nvSpPr>
+          <p:cNvPr id="2" name="Title 1"/>
+          <p:cNvSpPr>
+            <a:spLocks noGrp="1"/>
+          </p:cNvSpPr>
+          <p:nvPr>
+            <p:ph type="title"/>
+          </p:nvPr>
+        </p:nvSpPr>
+        <p:spPr/>
+        <p:txBody>
+          <a:bodyPr/>
+          <a:lstStyle/>
+          <a:p>
+            <a:r>
+              <a:t>Q&amp;A prompts we practice</a:t>
+            </a:r>
+          </a:p>
+        </p:txBody>
+      </p:sp>
+      <p:sp>
+        <p:nvSpPr>
+          <p:cNvPr id="3" name="Content Placeholder 2"/>
+          <p:cNvSpPr>
+            <a:spLocks noGrp="1"/>
+          </p:cNvSpPr>
+          <p:nvPr>
+            <p:ph idx="1"/>
+          </p:nvPr>
+        </p:nvSpPr>
+        <p:spPr/>
+        <p:txBody>
+          <a:bodyPr/>
+          <a:lstStyle/>
+          <a:p>
+            <a:pPr>
+              <a:defRPr sz="1600"/>
+            </a:pPr>
+            <a:r>
+              <a:t>Why these species and not easier icons?</a:t>
+            </a:r>
+          </a:p>
+          <a:p>
+            <a:pPr>
+              <a:defRPr sz="1600"/>
+            </a:pPr>
+            <a:r>
+              <a:t>Where is the living biology if there is no wet-lab organism on stage?</a:t>
+            </a:r>
+          </a:p>
+          <a:p>
+            <a:pPr>
+              <a:defRPr sz="1600"/>
+            </a:pPr>
+            <a:r>
+              <a:t>How do you prevent AI misinformation and overclaiming?</a:t>
+            </a:r>
+          </a:p>
+          <a:p>
+            <a:pPr>
+              <a:defRPr sz="1600"/>
+            </a:pPr>
+            <a:r>
+              <a:t>What would the next four months add: more dossiers, deeper methods, richer physical anchor, or consultant validation?</a:t>
+            </a:r>
+          </a:p>
+        </p:txBody>
+      </p:sp>
+    </p:spTree>
+  </p:cSld>
+  <p:clrMapOvr>
+    <a:masterClrMapping/>
+  </p:clrMapOvr>
+</p:sld>
+</file>
+
+<file path=ppt/slides/slide21.xml><?xml version="1.0" encoding="utf-8"?>
+<p:sld xmlns:a="http://schemas.openxmlformats.org/drawingml/2006/main" xmlns:p="http://schemas.openxmlformats.org/presentationml/2006/main" xmlns:r="http://schemas.openxmlformats.org/officeDocument/2006/relationships">
+  <p:cSld>
+    <p:spTree>
+      <p:nvGrpSpPr>
+        <p:cNvPr id="1" name=""/>
+        <p:cNvGrpSpPr/>
+        <p:nvPr/>
+      </p:nvGrpSpPr>
+      <p:grpSpPr/>
+      <p:sp>
+        <p:nvSpPr>
+          <p:cNvPr id="2" name="Title 1"/>
+          <p:cNvSpPr>
+            <a:spLocks noGrp="1"/>
+          </p:cNvSpPr>
+          <p:nvPr>
+            <p:ph type="ctrTitle"/>
+          </p:nvPr>
+        </p:nvSpPr>
+        <p:spPr/>
+        <p:txBody>
+          <a:bodyPr/>
+          <a:lstStyle/>
+          <a:p>
+            <a:r>
+              <a:t>Thank you</a:t>
+            </a:r>
+          </a:p>
+        </p:txBody>
+      </p:sp>
+      <p:sp>
+        <p:nvSpPr>
+          <p:cNvPr id="3" name="Subtitle 2"/>
+          <p:cNvSpPr>
+            <a:spLocks noGrp="1"/>
+          </p:cNvSpPr>
+          <p:nvPr>
+            <p:ph type="subTitle" idx="1"/>
+          </p:nvPr>
+        </p:nvSpPr>
+        <p:spPr/>
+        <p:txBody>
+          <a:bodyPr/>
+          <a:lstStyle/>
+          <a:p>
+            <a:r>
+              <a:t>Archive of Extinction</a:t>
+            </a:r>
+          </a:p>
+          <a:p>
+            <a:r>
+              <a:t>Questions?</a:t>
             </a:r>
           </a:p>
         </p:txBody>
@@ -3996,7 +4319,7 @@
           <a:lstStyle/>
           <a:p>
             <a:r>
-              <a:t>Title rationale (for judges)</a:t>
+              <a:t>Why this project now</a:t>
             </a:r>
           </a:p>
         </p:txBody>
@@ -4020,23 +4343,23 @@
               <a:defRPr sz="1600"/>
             </a:pPr>
             <a:r>
-              <a:t>Archive of Extinction: names the loss of species and of their temporal niches.</a:t>
-            </a:r>
-          </a:p>
-          <a:p>
-            <a:pPr>
-              <a:defRPr sz="1600"/>
-            </a:pPr>
-            <a:r>
-              <a:t>Environmental Hypothesis Dossiers: each scene is a testable claim about Umwelt + habitat, tied to papers.</a:t>
-            </a:r>
-          </a:p>
-          <a:p>
-            <a:pPr>
-              <a:defRPr sz="1600"/>
-            </a:pPr>
-            <a:r>
-              <a:t>AI memorial + sensory time capsule: generative WebXR makes rhythm and sensation discussable, not only images.</a:t>
+              <a:t>Extinction removes more than bodies: it erases routes, light-dark entrainment, social synchrony, and sensory fit to landscape.</a:t>
+            </a:r>
+          </a:p>
+          <a:p>
+            <a:pPr>
+              <a:defRPr sz="1600"/>
+            </a:pPr>
+            <a:r>
+              <a:t>Public memory normalizes ecological absence into icons; science stays in papers while loss becomes abstract.</a:t>
+            </a:r>
+          </a:p>
+          <a:p>
+            <a:pPr>
+              <a:defRPr sz="1600"/>
+            </a:pPr>
+            <a:r>
+              <a:t>Design question: how do we make rigorous biology feelable without pretending we fully know another species' Umwelt?</a:t>
             </a:r>
           </a:p>
         </p:txBody>
@@ -4075,7 +4398,7 @@
           <a:lstStyle/>
           <a:p>
             <a:r>
-              <a:t>Biodesign Challenge 2026</a:t>
+              <a:t>Project thesis</a:t>
             </a:r>
           </a:p>
         </p:txBody>
@@ -4099,31 +4422,23 @@
               <a:defRPr sz="1600"/>
             </a:pPr>
             <a:r>
-              <a:t>Intersection of biotechnology, art, and design; Summit + MoMA judging for finalists.</a:t>
-            </a:r>
-          </a:p>
-          <a:p>
-            <a:pPr>
-              <a:defRPr sz="1600"/>
-            </a:pPr>
-            <a:r>
-              <a:t>Gallery theme: "Convergent Life." We target Biodigital Excellence + Narrative, Context, Reflection.</a:t>
-            </a:r>
-          </a:p>
-          <a:p>
-            <a:pPr>
-              <a:defRPr sz="1600"/>
-            </a:pPr>
-            <a:r>
-              <a:t>Judging: Narrative, Concept, Context, Reflection (each /4; strong tier ~2.75+).</a:t>
-            </a:r>
-          </a:p>
-          <a:p>
-            <a:pPr>
-              <a:defRPr sz="1600"/>
-            </a:pPr>
-            <a:r>
-              <a:t>biodesignchallenge.org/judging | /prizes</a:t>
+              <a:t>Archive of Extinction is a browser-first biodesign memorial that reconstructs a bounded sensory-temporal hypothesis space for extinct species.</a:t>
+            </a:r>
+          </a:p>
+          <a:p>
+            <a:pPr>
+              <a:defRPr sz="1600"/>
+            </a:pPr>
+            <a:r>
+              <a:t>It is grounded in citable research, expressed through WebXR, controlled generative passes, and optional Web Audio.</a:t>
+            </a:r>
+          </a:p>
+          <a:p>
+            <a:pPr>
+              <a:defRPr sz="1600"/>
+            </a:pPr>
+            <a:r>
+              <a:t>The experience closes with evidence literacy and branching ethics so digital recall never erases conservation urgency.</a:t>
             </a:r>
           </a:p>
         </p:txBody>
@@ -4162,7 +4477,7 @@
           <a:lstStyle/>
           <a:p>
             <a:r>
-              <a:t>Core research proposition</a:t>
+              <a:t>Scope &amp; title logic</a:t>
             </a:r>
           </a:p>
         </p:txBody>
@@ -4186,23 +4501,31 @@
               <a:defRPr sz="1600"/>
             </a:pPr>
             <a:r>
-              <a:t>If we use generative AI + WebXR to reconstruct and visualize temporal phenotypes of extinct species,</a:t>
-            </a:r>
-          </a:p>
-          <a:p>
-            <a:pPr>
-              <a:defRPr sz="1600"/>
-            </a:pPr>
-            <a:r>
-              <a:t>can we repair the human gap in sensing extinction - the loss of another species' time, not only its image?</a:t>
-            </a:r>
-          </a:p>
-          <a:p>
-            <a:pPr>
-              <a:defRPr sz="1600"/>
-            </a:pPr>
-            <a:r>
-              <a:t>Intersection statement from ideation workbook, stress-tested against the BDC rubric.</a:t>
+              <a:t>Main title foregrounds extinction and remembrance: this is not de-extinction marketing.</a:t>
+            </a:r>
+          </a:p>
+          <a:p>
+            <a:pPr>
+              <a:defRPr sz="1600"/>
+            </a:pPr>
+            <a:r>
+              <a:t>“Umwelt Hypothesis Dossiers” signals that each species is a folder of testable claims, not a fantasy safari.</a:t>
+            </a:r>
+          </a:p>
+          <a:p>
+            <a:pPr>
+              <a:defRPr sz="1600"/>
+            </a:pPr>
+            <a:r>
+              <a:t>“Sensory Time Capsule” emphasizes temporal niche - how a species lived in day, season, synchrony, and atmosphere.</a:t>
+            </a:r>
+          </a:p>
+          <a:p>
+            <a:pPr>
+              <a:defRPr sz="1600"/>
+            </a:pPr>
+            <a:r>
+              <a:t>Locked scope: two deep dossiers only - woolly mammoth + thylacine.</a:t>
             </a:r>
           </a:p>
         </p:txBody>
@@ -4241,7 +4564,7 @@
           <a:lstStyle/>
           <a:p>
             <a:r>
-              <a:t>Conceptual methods</a:t>
+              <a:t>Core architecture</a:t>
             </a:r>
           </a:p>
         </p:txBody>
@@ -4265,31 +4588,23 @@
               <a:defRPr sz="1600"/>
             </a:pPr>
             <a:r>
-              <a:t>Palaeo-chronobiology: infer day/year phase from genomics, photoperiod proxies, morphology (orbit, channels).</a:t>
-            </a:r>
-          </a:p>
-          <a:p>
-            <a:pPr>
-              <a:defRPr sz="1600"/>
-            </a:pPr>
-            <a:r>
-              <a:t>Temporal niche: extinction as erasure of shared ecological time, not only DNA.</a:t>
-            </a:r>
-          </a:p>
-          <a:p>
-            <a:pPr>
-              <a:defRPr sz="1600"/>
-            </a:pPr>
-            <a:r>
-              <a:t>Umwelt (von Uexkull): model sensory worlds as hypotheses - never silent speculation.</a:t>
-            </a:r>
-          </a:p>
-          <a:p>
-            <a:pPr>
-              <a:defRPr sz="1600"/>
-            </a:pPr>
-            <a:r>
-              <a:t>Red-flag test: if biology OR code is removed and the project still works, we failed biodesign or our digital edge.</a:t>
+              <a:t>Dossier: evidence cards, temporal niche, sensory proxies, extinction mechanism, constrained 360 scene.</a:t>
+            </a:r>
+          </a:p>
+          <a:p>
+            <a:pPr>
+              <a:defRPr sz="1600"/>
+            </a:pPr>
+            <a:r>
+              <a:t>Mixer: seasonal layers, diel rhythm, coexistence density, harmony -&gt; conflict as sonic / temporal retuning.</a:t>
+            </a:r>
+          </a:p>
+          <a:p>
+            <a:pPr>
+              <a:defRPr sz="1600"/>
+            </a:pPr>
+            <a:r>
+              <a:t>Ethics console: evidence gate + branching trade-offs around conservation, law, ecosystem risk, and sovereignty.</a:t>
             </a:r>
           </a:p>
         </p:txBody>
@@ -4328,7 +4643,7 @@
           <a:lstStyle/>
           <a:p>
             <a:r>
-              <a:t>Design techniques &amp; stack</a:t>
+              <a:t>Biological layer</a:t>
             </a:r>
           </a:p>
         </p:txBody>
@@ -4352,47 +4667,23 @@
               <a:defRPr sz="1600"/>
             </a:pPr>
             <a:r>
-              <a:t>WebXR: A-Frame / Three.js; immersive dossier navigation.</a:t>
-            </a:r>
-          </a:p>
-          <a:p>
-            <a:pPr>
-              <a:defRPr sz="1600"/>
-            </a:pPr>
-            <a:r>
-              <a:t>Generative environments: constrained by paleo proxies (Zimov steppe, seasonal light) - not fantasy biomes.</a:t>
-            </a:r>
-          </a:p>
-          <a:p>
-            <a:pPr>
-              <a:defRPr sz="1600"/>
-            </a:pPr>
-            <a:r>
-              <a:t>Time scrubber: polar day/night, season; sonification of phase (optional).</a:t>
-            </a:r>
-          </a:p>
-          <a:p>
-            <a:pPr>
-              <a:defRPr sz="1600"/>
-            </a:pPr>
-            <a:r>
-              <a:t>Epistemic UI: Cited / Interpolated / Speculative toggles + on-screen (Author, year) tags per scene ID.</a:t>
-            </a:r>
-          </a:p>
-          <a:p>
-            <a:pPr>
-              <a:defRPr sz="1600"/>
-            </a:pPr>
-            <a:r>
-              <a:t>Ethics fork: resource sliders after Sherkow &amp; Greely (2013); Indigenous context UI with Palawa-first citations.</a:t>
-            </a:r>
-          </a:p>
-          <a:p>
-            <a:pPr>
-              <a:defRPr sz="1600"/>
-            </a:pPr>
-            <a:r>
-              <a:t>Reflection: templates/reflection-log-webxr.html - keyword match to ethics themes (heuristic, auditable).</a:t>
+              <a:t>Only traceable evidence enters the archive: tusk isotopes, comparative genomics, morphology as sensory proxy, historical ecology, and acoustic relatives.</a:t>
+            </a:r>
+          </a:p>
+          <a:p>
+            <a:pPr>
+              <a:defRPr sz="1600"/>
+            </a:pPr>
+            <a:r>
+              <a:t>Every strong claim is tagged Cited, Interpolated / Modeled, or Speculative.</a:t>
+            </a:r>
+          </a:p>
+          <a:p>
+            <a:pPr>
+              <a:defRPr sz="1600"/>
+            </a:pPr>
+            <a:r>
+              <a:t>Mammoth copy is locked to “circadian-related genes” until full-text PER2 confirmation exists.</a:t>
             </a:r>
           </a:p>
         </p:txBody>
@@ -4431,7 +4722,7 @@
           <a:lstStyle/>
           <a:p>
             <a:r>
-              <a:t>Ideation process (8 steps)</a:t>
+              <a:t>Digital layer &amp; design techniques</a:t>
             </a:r>
           </a:p>
         </p:txBody>
@@ -4455,23 +4746,31 @@
               <a:defRPr sz="1600"/>
             </a:pPr>
             <a:r>
-              <a:t>1 Map skills - 2 Intersection statements - 3 Rubric stress-test - 4 Biology literature sprints</a:t>
-            </a:r>
-          </a:p>
-          <a:p>
-            <a:pPr>
-              <a:defRPr sz="1600"/>
-            </a:pPr>
-            <a:r>
-              <a:t>5 Bio/digital split - 6 Narrative draft - 7 Prototype + BDC deliverables - 8 Build + polish + Q&amp;A</a:t>
-            </a:r>
-          </a:p>
-          <a:p>
-            <a:pPr>
-              <a:defRPr sz="1600"/>
-            </a:pPr>
-            <a:r>
-              <a:t>Aligned with biodesign_cursor_agent.md + course workbook.</a:t>
+              <a:t>WebXR stack: A-Frame / Three.js with desktop fallback; minimal QR-linked physical anchor for summit reliability.</a:t>
+            </a:r>
+          </a:p>
+          <a:p>
+            <a:pPr>
+              <a:defRPr sz="1600"/>
+            </a:pPr>
+            <a:r>
+              <a:t>Generative image strategy: control-first passes, procedural atmosphere, and palette / sun rules bounded by paleo proxies.</a:t>
+            </a:r>
+          </a:p>
+          <a:p>
+            <a:pPr>
+              <a:defRPr sz="1600"/>
+            </a:pPr>
+            <a:r>
+              <a:t>Time scrubber, sonification / Web Audio, and on-screen citation tags turn atmosphere into argument rather than decoration.</a:t>
+            </a:r>
+          </a:p>
+          <a:p>
+            <a:pPr>
+              <a:defRPr sz="1600"/>
+            </a:pPr>
+            <a:r>
+              <a:t>Reflection UI uses auditable heuristics, not opaque LLM outputs, to compare viewer input with ethics themes.</a:t>
             </a:r>
           </a:p>
         </p:txBody>
@@ -4510,7 +4809,7 @@
           <a:lstStyle/>
           <a:p>
             <a:r>
-              <a:t>Design sprint (4 weeks)</a:t>
+              <a:t>Two species - two dossiers</a:t>
             </a:r>
           </a:p>
         </p:txBody>
@@ -4522,43 +4821,91 @@
             <a:spLocks noGrp="1"/>
           </p:cNvSpPr>
           <p:nvPr>
-            <p:ph idx="1"/>
-          </p:nvPr>
-        </p:nvSpPr>
-        <p:spPr/>
-        <p:txBody>
-          <a:bodyPr/>
-          <a:lstStyle/>
-          <a:p>
-            <a:pPr>
-              <a:defRPr sz="1600"/>
-            </a:pPr>
-            <a:r>
-              <a:t>W1 Discovery: citation grid, storyboard Scene_* IDs, WebXR shell.</a:t>
-            </a:r>
-          </a:p>
-          <a:p>
-            <a:pPr>
-              <a:defRPr sz="1600"/>
-            </a:pPr>
-            <a:r>
-              <a:t>W2 Prototype: time axis, generative pipeline doc, epistemic wireframes.</a:t>
-            </a:r>
-          </a:p>
-          <a:p>
-            <a:pPr>
-              <a:defRPr sz="1600"/>
-            </a:pPr>
-            <a:r>
-              <a:t>W3 Integration: sonification, UI_Ethics_Fork, UI_Indigenous_Context, reflection panel.</a:t>
-            </a:r>
-          </a:p>
-          <a:p>
-            <a:pPr>
-              <a:defRPr sz="1600"/>
-            </a:pPr>
-            <a:r>
-              <a:t>W4 Polish: 10+5 min rehearsal, creative video, deploy, judge one-sheet.</a:t>
+            <p:ph idx="1" sz="half"/>
+          </p:nvPr>
+        </p:nvSpPr>
+        <p:spPr/>
+        <p:txBody>
+          <a:bodyPr/>
+          <a:lstStyle/>
+          <a:p>
+            <a:pPr>
+              <a:defRPr b="1" sz="1400"/>
+            </a:pPr>
+            <a:r>
+              <a:t>Woolly mammoth</a:t>
+            </a:r>
+          </a:p>
+          <a:p>
+            <a:pPr>
+              <a:defRPr sz="1300"/>
+            </a:pPr>
+            <a:r>
+              <a:t>Hero species for Arctic rhythm, mammoth-steppe atmosphere, and de-extinction pressure.</a:t>
+            </a:r>
+          </a:p>
+          <a:p>
+            <a:pPr>
+              <a:defRPr sz="1300"/>
+            </a:pPr>
+            <a:r>
+              <a:t>Lynch 2015 circadian-related genes; Lu 2010 reindeer analogy [Interpolated]; Zimov 2012 habitat pulse.</a:t>
+            </a:r>
+          </a:p>
+          <a:p>
+            <a:pPr>
+              <a:defRPr sz="1300"/>
+            </a:pPr>
+            <a:r>
+              <a:t>Additional anchors: Wooller 2021 tusk isotope mobility; Nogues-Bravo 2008 climate x human extinction context.</a:t>
+            </a:r>
+          </a:p>
+        </p:txBody>
+      </p:sp>
+      <p:sp>
+        <p:nvSpPr>
+          <p:cNvPr id="4" name="Content Placeholder 3"/>
+          <p:cNvSpPr>
+            <a:spLocks noGrp="1"/>
+          </p:cNvSpPr>
+          <p:nvPr>
+            <p:ph idx="2" sz="half"/>
+          </p:nvPr>
+        </p:nvSpPr>
+        <p:spPr/>
+        <p:txBody>
+          <a:bodyPr/>
+          <a:lstStyle/>
+          <a:p>
+            <a:pPr>
+              <a:defRPr b="1" sz="1400"/>
+            </a:pPr>
+            <a:r>
+              <a:t>Thylacine</a:t>
+            </a:r>
+          </a:p>
+          <a:p>
+            <a:pPr>
+              <a:defRPr sz="1300"/>
+            </a:pPr>
+            <a:r>
+              <a:t>Structural echo for crepuscular vision, colonial memory, and cultural sovereignty.</a:t>
+            </a:r>
+          </a:p>
+          <a:p>
+            <a:pPr>
+              <a:defRPr sz="1300"/>
+            </a:pPr>
+            <a:r>
+              <a:t>Pozniak 2018 orbit / diel activity; Mass &amp; Supin 2020 RGC methods [Interpolated]; Paddle 2000; Sleightholme &amp; Campbell 2016.</a:t>
+            </a:r>
+          </a:p>
+          <a:p>
+            <a:pPr>
+              <a:defRPr sz="1300"/>
+            </a:pPr>
+            <a:r>
+              <a:t>T5 context: Clements 2025 plus Palawa-led / centered Rimmer 2020, Lehman 2013, and Schlunke 2025.</a:t>
             </a:r>
           </a:p>
         </p:txBody>

--- a/slides/export/Archive_of_Extinction_Final_BDC2026.pptx
+++ b/slides/export/Archive_of_Extinction_Final_BDC2026.pptx
@@ -26,6 +26,37 @@
     <p:sldId id="274" r:id="rId25"/>
     <p:sldId id="275" r:id="rId26"/>
     <p:sldId id="276" r:id="rId27"/>
+    <p:sldId id="277" r:id="rId28"/>
+    <p:sldId id="278" r:id="rId29"/>
+    <p:sldId id="279" r:id="rId30"/>
+    <p:sldId id="280" r:id="rId31"/>
+    <p:sldId id="281" r:id="rId32"/>
+    <p:sldId id="282" r:id="rId33"/>
+    <p:sldId id="283" r:id="rId34"/>
+    <p:sldId id="284" r:id="rId35"/>
+    <p:sldId id="285" r:id="rId36"/>
+    <p:sldId id="286" r:id="rId37"/>
+    <p:sldId id="287" r:id="rId38"/>
+    <p:sldId id="288" r:id="rId39"/>
+    <p:sldId id="289" r:id="rId40"/>
+    <p:sldId id="290" r:id="rId41"/>
+    <p:sldId id="291" r:id="rId42"/>
+    <p:sldId id="292" r:id="rId43"/>
+    <p:sldId id="293" r:id="rId44"/>
+    <p:sldId id="294" r:id="rId45"/>
+    <p:sldId id="295" r:id="rId46"/>
+    <p:sldId id="296" r:id="rId47"/>
+    <p:sldId id="297" r:id="rId48"/>
+    <p:sldId id="298" r:id="rId49"/>
+    <p:sldId id="299" r:id="rId50"/>
+    <p:sldId id="300" r:id="rId51"/>
+    <p:sldId id="301" r:id="rId52"/>
+    <p:sldId id="302" r:id="rId53"/>
+    <p:sldId id="303" r:id="rId54"/>
+    <p:sldId id="304" r:id="rId55"/>
+    <p:sldId id="305" r:id="rId56"/>
+    <p:sldId id="306" r:id="rId57"/>
+    <p:sldId id="307" r:id="rId58"/>
   </p:sldIdLst>
   <p:sldSz cx="12191695" cy="6858000" type="screen4x3"/>
   <p:notesSz cx="6858000" cy="9144000"/>
@@ -3101,6 +3132,14 @@
 <file path=ppt/slides/slide1.xml><?xml version="1.0" encoding="utf-8"?>
 <p:sld xmlns:a="http://schemas.openxmlformats.org/drawingml/2006/main" xmlns:p="http://schemas.openxmlformats.org/presentationml/2006/main" xmlns:r="http://schemas.openxmlformats.org/officeDocument/2006/relationships">
   <p:cSld>
+    <p:bg>
+      <p:bgPr>
+        <a:solidFill>
+          <a:srgbClr val="141210"/>
+        </a:solidFill>
+        <a:effectLst/>
+      </p:bgPr>
+    </p:bg>
     <p:spTree>
       <p:nvGrpSpPr>
         <p:cNvPr id="1" name=""/>
@@ -3110,52 +3149,374 @@
       <p:grpSpPr/>
       <p:sp>
         <p:nvSpPr>
-          <p:cNvPr id="2" name="Title 1"/>
-          <p:cNvSpPr>
-            <a:spLocks noGrp="1"/>
-          </p:cNvSpPr>
-          <p:nvPr>
-            <p:ph type="ctrTitle"/>
-          </p:nvPr>
-        </p:nvSpPr>
-        <p:spPr/>
-        <p:txBody>
-          <a:bodyPr/>
-          <a:lstStyle/>
-          <a:p>
-            <a:r>
-              <a:t>Archive of Extinction: AI Memorial for Lost Species</a:t>
-            </a:r>
-          </a:p>
-        </p:txBody>
-      </p:sp>
-      <p:sp>
-        <p:nvSpPr>
-          <p:cNvPr id="3" name="Subtitle 2"/>
-          <p:cNvSpPr>
-            <a:spLocks noGrp="1"/>
-          </p:cNvSpPr>
-          <p:nvPr>
-            <p:ph type="subTitle" idx="1"/>
-          </p:nvPr>
-        </p:nvSpPr>
-        <p:spPr/>
-        <p:txBody>
-          <a:bodyPr/>
-          <a:lstStyle/>
-          <a:p>
-            <a:r>
-              <a:t>Umwelt Hypothesis Dossiers / Sensory Time Capsule</a:t>
-            </a:r>
-          </a:p>
-          <a:p>
-            <a:r>
-              <a:t>Biodesign Challenge 2026 | Convergent Life | Biodigital Excellence</a:t>
-            </a:r>
-          </a:p>
-          <a:p>
-            <a:r>
-              <a:t>Macau University</a:t>
+          <p:cNvPr id="2" name="Rectangle 1"/>
+          <p:cNvSpPr/>
+          <p:nvPr/>
+        </p:nvSpPr>
+        <p:spPr>
+          <a:xfrm>
+            <a:off x="0" y="0"/>
+            <a:ext cx="12191695" cy="164592"/>
+          </a:xfrm>
+          <a:prstGeom prst="rect">
+            <a:avLst/>
+          </a:prstGeom>
+          <a:solidFill>
+            <a:srgbClr val="C45C2A"/>
+          </a:solidFill>
+          <a:ln>
+            <a:noFill/>
+          </a:ln>
+        </p:spPr>
+        <p:style>
+          <a:lnRef idx="1">
+            <a:schemeClr val="accent1"/>
+          </a:lnRef>
+          <a:fillRef idx="3">
+            <a:schemeClr val="accent1"/>
+          </a:fillRef>
+          <a:effectRef idx="2">
+            <a:schemeClr val="accent1"/>
+          </a:effectRef>
+          <a:fontRef idx="minor">
+            <a:schemeClr val="lt1"/>
+          </a:fontRef>
+        </p:style>
+        <p:txBody>
+          <a:bodyPr rtlCol="0" anchor="ctr"/>
+          <a:lstStyle/>
+          <a:p>
+            <a:pPr algn="ctr"/>
+          </a:p>
+        </p:txBody>
+      </p:sp>
+      <p:sp>
+        <p:nvSpPr>
+          <p:cNvPr id="3" name="Rectangle 2"/>
+          <p:cNvSpPr/>
+          <p:nvPr/>
+        </p:nvSpPr>
+        <p:spPr>
+          <a:xfrm>
+            <a:off x="9052560" y="164592"/>
+            <a:ext cx="3136392" cy="6693408"/>
+          </a:xfrm>
+          <a:prstGeom prst="rect">
+            <a:avLst/>
+          </a:prstGeom>
+          <a:solidFill>
+            <a:srgbClr val="1E1A17"/>
+          </a:solidFill>
+          <a:ln>
+            <a:noFill/>
+          </a:ln>
+        </p:spPr>
+        <p:style>
+          <a:lnRef idx="1">
+            <a:schemeClr val="accent1"/>
+          </a:lnRef>
+          <a:fillRef idx="3">
+            <a:schemeClr val="accent1"/>
+          </a:fillRef>
+          <a:effectRef idx="2">
+            <a:schemeClr val="accent1"/>
+          </a:effectRef>
+          <a:fontRef idx="minor">
+            <a:schemeClr val="lt1"/>
+          </a:fontRef>
+        </p:style>
+        <p:txBody>
+          <a:bodyPr rtlCol="0" anchor="ctr"/>
+          <a:lstStyle/>
+          <a:p>
+            <a:pPr algn="ctr"/>
+          </a:p>
+        </p:txBody>
+      </p:sp>
+      <p:sp>
+        <p:nvSpPr>
+          <p:cNvPr id="4" name="TextBox 3"/>
+          <p:cNvSpPr txBox="1"/>
+          <p:nvPr/>
+        </p:nvSpPr>
+        <p:spPr>
+          <a:xfrm>
+            <a:off x="731520" y="960120"/>
+            <a:ext cx="7498079" cy="822960"/>
+          </a:xfrm>
+          <a:prstGeom prst="rect">
+            <a:avLst/>
+          </a:prstGeom>
+          <a:noFill/>
+        </p:spPr>
+        <p:txBody>
+          <a:bodyPr wrap="none">
+            <a:spAutoFit/>
+          </a:bodyPr>
+          <a:lstStyle/>
+          <a:p>
+            <a:r>
+              <a:rPr sz="3400" b="1">
+                <a:solidFill>
+                  <a:srgbClr val="E6DFD6"/>
+                </a:solidFill>
+                <a:latin typeface="Helvetica Neue"/>
+              </a:rPr>
+              <a:t>Extinction Archive</a:t>
+            </a:r>
+          </a:p>
+        </p:txBody>
+      </p:sp>
+      <p:sp>
+        <p:nvSpPr>
+          <p:cNvPr id="5" name="TextBox 4"/>
+          <p:cNvSpPr txBox="1"/>
+          <p:nvPr/>
+        </p:nvSpPr>
+        <p:spPr>
+          <a:xfrm>
+            <a:off x="731520" y="1783080"/>
+            <a:ext cx="7863840" cy="640080"/>
+          </a:xfrm>
+          <a:prstGeom prst="rect">
+            <a:avLst/>
+          </a:prstGeom>
+          <a:noFill/>
+        </p:spPr>
+        <p:txBody>
+          <a:bodyPr wrap="none">
+            <a:spAutoFit/>
+          </a:bodyPr>
+          <a:lstStyle/>
+          <a:p>
+            <a:r>
+              <a:rPr sz="2400">
+                <a:solidFill>
+                  <a:srgbClr val="E6DFD6"/>
+                </a:solidFill>
+                <a:latin typeface="Helvetica Neue"/>
+              </a:rPr>
+              <a:t>Umwelt hypothesis dossiers</a:t>
+            </a:r>
+          </a:p>
+        </p:txBody>
+      </p:sp>
+      <p:sp>
+        <p:nvSpPr>
+          <p:cNvPr id="6" name="TextBox 5"/>
+          <p:cNvSpPr txBox="1"/>
+          <p:nvPr/>
+        </p:nvSpPr>
+        <p:spPr>
+          <a:xfrm>
+            <a:off x="749808" y="2743200"/>
+            <a:ext cx="4572000" cy="365760"/>
+          </a:xfrm>
+          <a:prstGeom prst="rect">
+            <a:avLst/>
+          </a:prstGeom>
+          <a:noFill/>
+        </p:spPr>
+        <p:txBody>
+          <a:bodyPr wrap="none">
+            <a:spAutoFit/>
+          </a:bodyPr>
+          <a:lstStyle/>
+          <a:p>
+            <a:r>
+              <a:rPr sz="1300" b="1">
+                <a:solidFill>
+                  <a:srgbClr val="C45C2A"/>
+                </a:solidFill>
+                <a:latin typeface="Helvetica Neue"/>
+              </a:rPr>
+              <a:t>circadian · migration · synchrony</a:t>
+            </a:r>
+          </a:p>
+        </p:txBody>
+      </p:sp>
+      <p:sp>
+        <p:nvSpPr>
+          <p:cNvPr id="7" name="TextBox 6"/>
+          <p:cNvSpPr txBox="1"/>
+          <p:nvPr/>
+        </p:nvSpPr>
+        <p:spPr>
+          <a:xfrm>
+            <a:off x="749808" y="3383280"/>
+            <a:ext cx="6035040" cy="1463040"/>
+          </a:xfrm>
+          <a:prstGeom prst="rect">
+            <a:avLst/>
+          </a:prstGeom>
+          <a:noFill/>
+        </p:spPr>
+        <p:txBody>
+          <a:bodyPr wrap="none">
+            <a:spAutoFit/>
+          </a:bodyPr>
+          <a:lstStyle/>
+          <a:p>
+            <a:pPr>
+              <a:spcAft>
+                <a:spcPts val="800"/>
+              </a:spcAft>
+              <a:defRPr sz="1800">
+                <a:solidFill>
+                  <a:srgbClr val="E6DFD6"/>
+                </a:solidFill>
+                <a:latin typeface="Helvetica Neue"/>
+              </a:defRPr>
+            </a:pPr>
+            <a:r>
+              <a:t>Biodesign Challenge 2026 · Convergent Life</a:t>
+            </a:r>
+          </a:p>
+          <a:p>
+            <a:pPr>
+              <a:spcAft>
+                <a:spcPts val="800"/>
+              </a:spcAft>
+              <a:defRPr sz="1800">
+                <a:solidFill>
+                  <a:srgbClr val="E6DFD6"/>
+                </a:solidFill>
+                <a:latin typeface="Helvetica Neue"/>
+              </a:defRPr>
+            </a:pPr>
+            <a:r>
+              <a:t>Digital Art &amp; AI Technology — MDes</a:t>
+            </a:r>
+          </a:p>
+          <a:p>
+            <a:pPr>
+              <a:spcAft>
+                <a:spcPts val="800"/>
+              </a:spcAft>
+              <a:defRPr sz="1800">
+                <a:solidFill>
+                  <a:srgbClr val="E6DFD6"/>
+                </a:solidFill>
+                <a:latin typeface="Helvetica Neue"/>
+              </a:defRPr>
+            </a:pPr>
+            <a:r>
+              <a:t>Literature-grounded memorial · biodigital experience
+Macau University · Mentor: Atticus SIMS · GUO XIAO YUE (MC569254) · LIU JIA QUN (MC569293)</a:t>
+            </a:r>
+          </a:p>
+        </p:txBody>
+      </p:sp>
+      <p:sp>
+        <p:nvSpPr>
+          <p:cNvPr id="8" name="Rounded Rectangle 7"/>
+          <p:cNvSpPr/>
+          <p:nvPr/>
+        </p:nvSpPr>
+        <p:spPr>
+          <a:xfrm>
+            <a:off x="7635240" y="1097280"/>
+            <a:ext cx="2926080" cy="4114800"/>
+          </a:xfrm>
+          <a:prstGeom prst="roundRect">
+            <a:avLst/>
+          </a:prstGeom>
+          <a:solidFill>
+            <a:srgbClr val="1E1A17"/>
+          </a:solidFill>
+          <a:ln>
+            <a:solidFill>
+              <a:srgbClr val="6B7A8F"/>
+            </a:solidFill>
+          </a:ln>
+        </p:spPr>
+        <p:style>
+          <a:lnRef idx="1">
+            <a:schemeClr val="accent1"/>
+          </a:lnRef>
+          <a:fillRef idx="3">
+            <a:schemeClr val="accent1"/>
+          </a:fillRef>
+          <a:effectRef idx="2">
+            <a:schemeClr val="accent1"/>
+          </a:effectRef>
+          <a:fontRef idx="minor">
+            <a:schemeClr val="lt1"/>
+          </a:fontRef>
+        </p:style>
+        <p:txBody>
+          <a:bodyPr rtlCol="0" anchor="ctr"/>
+          <a:lstStyle/>
+          <a:p>
+            <a:pPr algn="ctr"/>
+          </a:p>
+        </p:txBody>
+      </p:sp>
+      <p:sp>
+        <p:nvSpPr>
+          <p:cNvPr id="9" name="TextBox 8"/>
+          <p:cNvSpPr txBox="1"/>
+          <p:nvPr/>
+        </p:nvSpPr>
+        <p:spPr>
+          <a:xfrm>
+            <a:off x="7955279" y="1554480"/>
+            <a:ext cx="2286000" cy="3200400"/>
+          </a:xfrm>
+          <a:prstGeom prst="rect">
+            <a:avLst/>
+          </a:prstGeom>
+          <a:noFill/>
+        </p:spPr>
+        <p:txBody>
+          <a:bodyPr wrap="none">
+            <a:spAutoFit/>
+          </a:bodyPr>
+          <a:lstStyle/>
+          <a:p>
+            <a:r>
+              <a:rPr sz="2200">
+                <a:solidFill>
+                  <a:srgbClr val="E6DFD6"/>
+                </a:solidFill>
+                <a:latin typeface="Helvetica Neue"/>
+              </a:rPr>
+              <a:t>A biodigital memorial where extinction is experienced as rhythm, silence, and consequence.</a:t>
+            </a:r>
+          </a:p>
+        </p:txBody>
+      </p:sp>
+      <p:sp>
+        <p:nvSpPr>
+          <p:cNvPr id="10" name="TextBox 9"/>
+          <p:cNvSpPr txBox="1"/>
+          <p:nvPr/>
+        </p:nvSpPr>
+        <p:spPr>
+          <a:xfrm>
+            <a:off x="548640" y="6263640"/>
+            <a:ext cx="10881360" cy="320040"/>
+          </a:xfrm>
+          <a:prstGeom prst="rect">
+            <a:avLst/>
+          </a:prstGeom>
+          <a:noFill/>
+        </p:spPr>
+        <p:txBody>
+          <a:bodyPr wrap="none">
+            <a:spAutoFit/>
+          </a:bodyPr>
+          <a:lstStyle/>
+          <a:p>
+            <a:pPr algn="l"/>
+            <a:r>
+              <a:rPr sz="900">
+                <a:solidFill>
+                  <a:srgbClr val="9A8F84"/>
+                </a:solidFill>
+                <a:latin typeface="Helvetica Neue"/>
+              </a:rPr>
+              <a:t>Extinction Archive · Biodigital chronobiology · BDC 2026  1 / 12</a:t>
             </a:r>
           </a:p>
         </p:txBody>
@@ -3171,6 +3532,14 @@
 <file path=ppt/slides/slide10.xml><?xml version="1.0" encoding="utf-8"?>
 <p:sld xmlns:a="http://schemas.openxmlformats.org/drawingml/2006/main" xmlns:p="http://schemas.openxmlformats.org/presentationml/2006/main" xmlns:r="http://schemas.openxmlformats.org/officeDocument/2006/relationships">
   <p:cSld>
+    <p:bg>
+      <p:bgPr>
+        <a:solidFill>
+          <a:srgbClr val="141210"/>
+        </a:solidFill>
+        <a:effectLst/>
+      </p:bgPr>
+    </p:bg>
     <p:spTree>
       <p:nvGrpSpPr>
         <p:cNvPr id="1" name=""/>
@@ -3180,69 +3549,389 @@
       <p:grpSpPr/>
       <p:sp>
         <p:nvSpPr>
-          <p:cNvPr id="2" name="Title 1"/>
-          <p:cNvSpPr>
-            <a:spLocks noGrp="1"/>
-          </p:cNvSpPr>
-          <p:nvPr>
-            <p:ph type="title"/>
-          </p:nvPr>
-        </p:nvSpPr>
-        <p:spPr/>
-        <p:txBody>
-          <a:bodyPr/>
-          <a:lstStyle/>
-          <a:p>
-            <a:r>
-              <a:t>User journey &amp; scene flow</a:t>
-            </a:r>
-          </a:p>
-        </p:txBody>
-      </p:sp>
-      <p:sp>
-        <p:nvSpPr>
-          <p:cNvPr id="3" name="Content Placeholder 2"/>
-          <p:cNvSpPr>
-            <a:spLocks noGrp="1"/>
-          </p:cNvSpPr>
-          <p:nvPr>
-            <p:ph idx="1"/>
-          </p:nvPr>
-        </p:nvSpPr>
-        <p:spPr/>
-        <p:txBody>
-          <a:bodyPr/>
-          <a:lstStyle/>
-          <a:p>
-            <a:pPr>
-              <a:defRPr sz="1600"/>
-            </a:pPr>
-            <a:r>
-              <a:t>Mammoth path: Scene_Bio_01 -&gt; Scene_Environment_02 -&gt; Scene_Landscape_01 -&gt; Scene_Sensory_01.</a:t>
-            </a:r>
-          </a:p>
-          <a:p>
-            <a:pPr>
-              <a:defRPr sz="1600"/>
-            </a:pPr>
-            <a:r>
-              <a:t>Thylacine path: Scene_Bio_02 -&gt; Scene_POV_01 -&gt; Scene_Context_01.</a:t>
-            </a:r>
-          </a:p>
-          <a:p>
-            <a:pPr>
-              <a:defRPr sz="1600"/>
-            </a:pPr>
-            <a:r>
-              <a:t>Shared modules: UI_Indigenous_Context -&gt; UI_Ethics_Fork -&gt; UI_Reflection_Log.</a:t>
-            </a:r>
-          </a:p>
-          <a:p>
-            <a:pPr>
-              <a:defRPr sz="1600"/>
-            </a:pPr>
-            <a:r>
-              <a:t>All three load-bearing modules ship in the MVP: Dossier -&gt; Mixer -&gt; Ethics.</a:t>
+          <p:cNvPr id="2" name="Rectangle 1"/>
+          <p:cNvSpPr/>
+          <p:nvPr/>
+        </p:nvSpPr>
+        <p:spPr>
+          <a:xfrm>
+            <a:off x="0" y="0"/>
+            <a:ext cx="12191695" cy="164592"/>
+          </a:xfrm>
+          <a:prstGeom prst="rect">
+            <a:avLst/>
+          </a:prstGeom>
+          <a:solidFill>
+            <a:srgbClr val="C45C2A"/>
+          </a:solidFill>
+          <a:ln>
+            <a:noFill/>
+          </a:ln>
+        </p:spPr>
+        <p:style>
+          <a:lnRef idx="1">
+            <a:schemeClr val="accent1"/>
+          </a:lnRef>
+          <a:fillRef idx="3">
+            <a:schemeClr val="accent1"/>
+          </a:fillRef>
+          <a:effectRef idx="2">
+            <a:schemeClr val="accent1"/>
+          </a:effectRef>
+          <a:fontRef idx="minor">
+            <a:schemeClr val="lt1"/>
+          </a:fontRef>
+        </p:style>
+        <p:txBody>
+          <a:bodyPr rtlCol="0" anchor="ctr"/>
+          <a:lstStyle/>
+          <a:p>
+            <a:pPr algn="ctr"/>
+          </a:p>
+        </p:txBody>
+      </p:sp>
+      <p:sp>
+        <p:nvSpPr>
+          <p:cNvPr id="3" name="Rectangle 2"/>
+          <p:cNvSpPr/>
+          <p:nvPr/>
+        </p:nvSpPr>
+        <p:spPr>
+          <a:xfrm>
+            <a:off x="9052560" y="164592"/>
+            <a:ext cx="3136392" cy="6693408"/>
+          </a:xfrm>
+          <a:prstGeom prst="rect">
+            <a:avLst/>
+          </a:prstGeom>
+          <a:solidFill>
+            <a:srgbClr val="1E1A17"/>
+          </a:solidFill>
+          <a:ln>
+            <a:noFill/>
+          </a:ln>
+        </p:spPr>
+        <p:style>
+          <a:lnRef idx="1">
+            <a:schemeClr val="accent1"/>
+          </a:lnRef>
+          <a:fillRef idx="3">
+            <a:schemeClr val="accent1"/>
+          </a:fillRef>
+          <a:effectRef idx="2">
+            <a:schemeClr val="accent1"/>
+          </a:effectRef>
+          <a:fontRef idx="minor">
+            <a:schemeClr val="lt1"/>
+          </a:fontRef>
+        </p:style>
+        <p:txBody>
+          <a:bodyPr rtlCol="0" anchor="ctr"/>
+          <a:lstStyle/>
+          <a:p>
+            <a:pPr algn="ctr"/>
+          </a:p>
+        </p:txBody>
+      </p:sp>
+      <p:sp>
+        <p:nvSpPr>
+          <p:cNvPr id="4" name="TextBox 3"/>
+          <p:cNvSpPr txBox="1"/>
+          <p:nvPr/>
+        </p:nvSpPr>
+        <p:spPr>
+          <a:xfrm>
+            <a:off x="640080" y="411480"/>
+            <a:ext cx="4389120" cy="292608"/>
+          </a:xfrm>
+          <a:prstGeom prst="rect">
+            <a:avLst/>
+          </a:prstGeom>
+          <a:noFill/>
+        </p:spPr>
+        <p:txBody>
+          <a:bodyPr wrap="none">
+            <a:spAutoFit/>
+          </a:bodyPr>
+          <a:lstStyle/>
+          <a:p>
+            <a:r>
+              <a:rPr sz="1300" b="1">
+                <a:solidFill>
+                  <a:srgbClr val="C45C2A"/>
+                </a:solidFill>
+                <a:latin typeface="Helvetica Neue"/>
+              </a:rPr>
+              <a:t>BDC ALIGNMENT</a:t>
+            </a:r>
+          </a:p>
+        </p:txBody>
+      </p:sp>
+      <p:sp>
+        <p:nvSpPr>
+          <p:cNvPr id="5" name="TextBox 4"/>
+          <p:cNvSpPr txBox="1"/>
+          <p:nvPr/>
+        </p:nvSpPr>
+        <p:spPr>
+          <a:xfrm>
+            <a:off x="640080" y="777240"/>
+            <a:ext cx="7040880" cy="914400"/>
+          </a:xfrm>
+          <a:prstGeom prst="rect">
+            <a:avLst/>
+          </a:prstGeom>
+          <a:noFill/>
+        </p:spPr>
+        <p:txBody>
+          <a:bodyPr wrap="square">
+            <a:spAutoFit/>
+          </a:bodyPr>
+          <a:lstStyle/>
+          <a:p>
+            <a:r>
+              <a:rPr sz="2800" b="1">
+                <a:solidFill>
+                  <a:srgbClr val="E6DFD6"/>
+                </a:solidFill>
+                <a:latin typeface="Helvetica Neue"/>
+              </a:rPr>
+              <a:t>Why this fits Biodesign Challenge 2026</a:t>
+            </a:r>
+          </a:p>
+        </p:txBody>
+      </p:sp>
+      <p:sp>
+        <p:nvSpPr>
+          <p:cNvPr id="6" name="TextBox 5"/>
+          <p:cNvSpPr txBox="1"/>
+          <p:nvPr/>
+        </p:nvSpPr>
+        <p:spPr>
+          <a:xfrm>
+            <a:off x="731520" y="1828800"/>
+            <a:ext cx="6400800" cy="3474720"/>
+          </a:xfrm>
+          <a:prstGeom prst="rect">
+            <a:avLst/>
+          </a:prstGeom>
+          <a:noFill/>
+        </p:spPr>
+        <p:txBody>
+          <a:bodyPr wrap="square" lIns="0" rIns="0" tIns="0">
+            <a:spAutoFit/>
+          </a:bodyPr>
+          <a:lstStyle/>
+          <a:p>
+            <a:pPr>
+              <a:spcAft>
+                <a:spcPts val="1000"/>
+              </a:spcAft>
+              <a:defRPr sz="2000">
+                <a:solidFill>
+                  <a:srgbClr val="E6DFD6"/>
+                </a:solidFill>
+                <a:latin typeface="Helvetica Neue"/>
+              </a:defRPr>
+            </a:pPr>
+            <a:r>
+              <a:t>Narrative: a clear emotional and spatial journey supported by physical and digital prototypes.</a:t>
+            </a:r>
+          </a:p>
+          <a:p>
+            <a:pPr>
+              <a:spcAft>
+                <a:spcPts val="1000"/>
+              </a:spcAft>
+              <a:defRPr sz="2000">
+                <a:solidFill>
+                  <a:srgbClr val="E6DFD6"/>
+                </a:solidFill>
+                <a:latin typeface="Helvetica Neue"/>
+              </a:defRPr>
+            </a:pPr>
+            <a:r>
+              <a:t>Concept: Umwelt plus temporal niche plus collective memory creates a distinct biodigital proposition.</a:t>
+            </a:r>
+          </a:p>
+          <a:p>
+            <a:pPr>
+              <a:spcAft>
+                <a:spcPts val="1000"/>
+              </a:spcAft>
+              <a:defRPr sz="2000">
+                <a:solidFill>
+                  <a:srgbClr val="E6DFD6"/>
+                </a:solidFill>
+                <a:latin typeface="Helvetica Neue"/>
+              </a:defRPr>
+            </a:pPr>
+            <a:r>
+              <a:t>Context: biodiversity loss, de-extinction ethics, misinformation risk, and sustainable installation logic.</a:t>
+            </a:r>
+          </a:p>
+          <a:p>
+            <a:pPr>
+              <a:spcAft>
+                <a:spcPts val="1000"/>
+              </a:spcAft>
+              <a:defRPr sz="2000">
+                <a:solidFill>
+                  <a:srgbClr val="E6DFD6"/>
+                </a:solidFill>
+                <a:latin typeface="Helvetica Neue"/>
+              </a:defRPr>
+            </a:pPr>
+            <a:r>
+              <a:t>Reflection: transparent iteration, limits, evidence tiers, and expert-reviewable claims.</a:t>
+            </a:r>
+          </a:p>
+        </p:txBody>
+      </p:sp>
+      <p:sp>
+        <p:nvSpPr>
+          <p:cNvPr id="7" name="Rounded Rectangle 6"/>
+          <p:cNvSpPr/>
+          <p:nvPr/>
+        </p:nvSpPr>
+        <p:spPr>
+          <a:xfrm>
+            <a:off x="7726679" y="1554480"/>
+            <a:ext cx="3200400" cy="3291840"/>
+          </a:xfrm>
+          <a:prstGeom prst="roundRect">
+            <a:avLst/>
+          </a:prstGeom>
+          <a:solidFill>
+            <a:srgbClr val="1E1A17"/>
+          </a:solidFill>
+          <a:ln>
+            <a:solidFill>
+              <a:srgbClr val="6B7A8F"/>
+            </a:solidFill>
+          </a:ln>
+        </p:spPr>
+        <p:style>
+          <a:lnRef idx="1">
+            <a:schemeClr val="accent1"/>
+          </a:lnRef>
+          <a:fillRef idx="3">
+            <a:schemeClr val="accent1"/>
+          </a:fillRef>
+          <a:effectRef idx="2">
+            <a:schemeClr val="accent1"/>
+          </a:effectRef>
+          <a:fontRef idx="minor">
+            <a:schemeClr val="lt1"/>
+          </a:fontRef>
+        </p:style>
+        <p:txBody>
+          <a:bodyPr rtlCol="0" anchor="ctr"/>
+          <a:lstStyle/>
+          <a:p>
+            <a:pPr algn="ctr"/>
+          </a:p>
+        </p:txBody>
+      </p:sp>
+      <p:sp>
+        <p:nvSpPr>
+          <p:cNvPr id="8" name="TextBox 7"/>
+          <p:cNvSpPr txBox="1"/>
+          <p:nvPr/>
+        </p:nvSpPr>
+        <p:spPr>
+          <a:xfrm>
+            <a:off x="8001000" y="1828800"/>
+            <a:ext cx="2560320" cy="365760"/>
+          </a:xfrm>
+          <a:prstGeom prst="rect">
+            <a:avLst/>
+          </a:prstGeom>
+          <a:noFill/>
+        </p:spPr>
+        <p:txBody>
+          <a:bodyPr wrap="none">
+            <a:spAutoFit/>
+          </a:bodyPr>
+          <a:lstStyle/>
+          <a:p>
+            <a:r>
+              <a:rPr sz="1200" b="1">
+                <a:solidFill>
+                  <a:srgbClr val="5CB89A"/>
+                </a:solidFill>
+                <a:latin typeface="Helvetica Neue"/>
+              </a:rPr>
+              <a:t>PRIZE TARGET</a:t>
+            </a:r>
+          </a:p>
+        </p:txBody>
+      </p:sp>
+      <p:sp>
+        <p:nvSpPr>
+          <p:cNvPr id="9" name="TextBox 8"/>
+          <p:cNvSpPr txBox="1"/>
+          <p:nvPr/>
+        </p:nvSpPr>
+        <p:spPr>
+          <a:xfrm>
+            <a:off x="8001000" y="2240280"/>
+            <a:ext cx="2560320" cy="2194560"/>
+          </a:xfrm>
+          <a:prstGeom prst="rect">
+            <a:avLst/>
+          </a:prstGeom>
+          <a:noFill/>
+        </p:spPr>
+        <p:txBody>
+          <a:bodyPr wrap="none">
+            <a:spAutoFit/>
+          </a:bodyPr>
+          <a:lstStyle/>
+          <a:p>
+            <a:r>
+              <a:rPr sz="1600">
+                <a:solidFill>
+                  <a:srgbClr val="E6DFD6"/>
+                </a:solidFill>
+                <a:latin typeface="Helvetica Neue"/>
+              </a:rPr>
+              <a:t>Primary target: BDC Prize for Biodigital Excellence.</a:t>
+            </a:r>
+          </a:p>
+        </p:txBody>
+      </p:sp>
+      <p:sp>
+        <p:nvSpPr>
+          <p:cNvPr id="10" name="TextBox 9"/>
+          <p:cNvSpPr txBox="1"/>
+          <p:nvPr/>
+        </p:nvSpPr>
+        <p:spPr>
+          <a:xfrm>
+            <a:off x="548640" y="6263640"/>
+            <a:ext cx="10881360" cy="320040"/>
+          </a:xfrm>
+          <a:prstGeom prst="rect">
+            <a:avLst/>
+          </a:prstGeom>
+          <a:noFill/>
+        </p:spPr>
+        <p:txBody>
+          <a:bodyPr wrap="none">
+            <a:spAutoFit/>
+          </a:bodyPr>
+          <a:lstStyle/>
+          <a:p>
+            <a:pPr algn="l"/>
+            <a:r>
+              <a:rPr sz="900">
+                <a:solidFill>
+                  <a:srgbClr val="9A8F84"/>
+                </a:solidFill>
+                <a:latin typeface="Helvetica Neue"/>
+              </a:rPr>
+              <a:t>Extinction Archive · Biodigital chronobiology · BDC 2026  10 / 12</a:t>
             </a:r>
           </a:p>
         </p:txBody>
@@ -3258,6 +3947,14 @@
 <file path=ppt/slides/slide11.xml><?xml version="1.0" encoding="utf-8"?>
 <p:sld xmlns:a="http://schemas.openxmlformats.org/drawingml/2006/main" xmlns:p="http://schemas.openxmlformats.org/presentationml/2006/main" xmlns:r="http://schemas.openxmlformats.org/officeDocument/2006/relationships">
   <p:cSld>
+    <p:bg>
+      <p:bgPr>
+        <a:solidFill>
+          <a:srgbClr val="141210"/>
+        </a:solidFill>
+        <a:effectLst/>
+      </p:bgPr>
+    </p:bg>
     <p:spTree>
       <p:nvGrpSpPr>
         <p:cNvPr id="1" name=""/>
@@ -3267,69 +3964,754 @@
       <p:grpSpPr/>
       <p:sp>
         <p:nvSpPr>
-          <p:cNvPr id="2" name="Title 1"/>
-          <p:cNvSpPr>
-            <a:spLocks noGrp="1"/>
-          </p:cNvSpPr>
-          <p:nvPr>
-            <p:ph type="title"/>
-          </p:nvPr>
-        </p:nvSpPr>
-        <p:spPr/>
-        <p:txBody>
-          <a:bodyPr/>
-          <a:lstStyle/>
-          <a:p>
-            <a:r>
-              <a:t>Methods &amp; evidence protocol</a:t>
-            </a:r>
-          </a:p>
-        </p:txBody>
-      </p:sp>
-      <p:sp>
-        <p:nvSpPr>
-          <p:cNvPr id="3" name="Content Placeholder 2"/>
-          <p:cNvSpPr>
-            <a:spLocks noGrp="1"/>
-          </p:cNvSpPr>
-          <p:nvPr>
-            <p:ph idx="1"/>
-          </p:nvPr>
-        </p:nvSpPr>
-        <p:spPr/>
-        <p:txBody>
-          <a:bodyPr/>
-          <a:lstStyle/>
-          <a:p>
-            <a:pPr>
-              <a:defRPr sz="1600"/>
-            </a:pPr>
-            <a:r>
-              <a:t>Claims are imported to structured cards / JSON; each block is labeled Cited / Modeled / Speculative.</a:t>
-            </a:r>
-          </a:p>
-          <a:p>
-            <a:pPr>
-              <a:defRPr sz="1600"/>
-            </a:pPr>
-            <a:r>
-              <a:t>Science visuals can include ggplot2 stills for tusk isotope summaries and time-series evidence panels.</a:t>
-            </a:r>
-          </a:p>
-          <a:p>
-            <a:pPr>
-              <a:defRPr sz="1600"/>
-            </a:pPr>
-            <a:r>
-              <a:t>Generative runs log model, date, and seed where relevant; DSP rules are documented rather than hidden.</a:t>
-            </a:r>
-          </a:p>
-          <a:p>
-            <a:pPr>
-              <a:defRPr sz="1600"/>
-            </a:pPr>
-            <a:r>
-              <a:t>Process includes at least two evidence audits during production to remove unlabeled claims.</a:t>
+          <p:cNvPr id="2" name="Rectangle 1"/>
+          <p:cNvSpPr/>
+          <p:nvPr/>
+        </p:nvSpPr>
+        <p:spPr>
+          <a:xfrm>
+            <a:off x="0" y="0"/>
+            <a:ext cx="12191695" cy="164592"/>
+          </a:xfrm>
+          <a:prstGeom prst="rect">
+            <a:avLst/>
+          </a:prstGeom>
+          <a:solidFill>
+            <a:srgbClr val="C45C2A"/>
+          </a:solidFill>
+          <a:ln>
+            <a:noFill/>
+          </a:ln>
+        </p:spPr>
+        <p:style>
+          <a:lnRef idx="1">
+            <a:schemeClr val="accent1"/>
+          </a:lnRef>
+          <a:fillRef idx="3">
+            <a:schemeClr val="accent1"/>
+          </a:fillRef>
+          <a:effectRef idx="2">
+            <a:schemeClr val="accent1"/>
+          </a:effectRef>
+          <a:fontRef idx="minor">
+            <a:schemeClr val="lt1"/>
+          </a:fontRef>
+        </p:style>
+        <p:txBody>
+          <a:bodyPr rtlCol="0" anchor="ctr"/>
+          <a:lstStyle/>
+          <a:p>
+            <a:pPr algn="ctr"/>
+          </a:p>
+        </p:txBody>
+      </p:sp>
+      <p:sp>
+        <p:nvSpPr>
+          <p:cNvPr id="3" name="Rectangle 2"/>
+          <p:cNvSpPr/>
+          <p:nvPr/>
+        </p:nvSpPr>
+        <p:spPr>
+          <a:xfrm>
+            <a:off x="9052560" y="164592"/>
+            <a:ext cx="3136392" cy="6693408"/>
+          </a:xfrm>
+          <a:prstGeom prst="rect">
+            <a:avLst/>
+          </a:prstGeom>
+          <a:solidFill>
+            <a:srgbClr val="1E1A17"/>
+          </a:solidFill>
+          <a:ln>
+            <a:noFill/>
+          </a:ln>
+        </p:spPr>
+        <p:style>
+          <a:lnRef idx="1">
+            <a:schemeClr val="accent1"/>
+          </a:lnRef>
+          <a:fillRef idx="3">
+            <a:schemeClr val="accent1"/>
+          </a:fillRef>
+          <a:effectRef idx="2">
+            <a:schemeClr val="accent1"/>
+          </a:effectRef>
+          <a:fontRef idx="minor">
+            <a:schemeClr val="lt1"/>
+          </a:fontRef>
+        </p:style>
+        <p:txBody>
+          <a:bodyPr rtlCol="0" anchor="ctr"/>
+          <a:lstStyle/>
+          <a:p>
+            <a:pPr algn="ctr"/>
+          </a:p>
+        </p:txBody>
+      </p:sp>
+      <p:sp>
+        <p:nvSpPr>
+          <p:cNvPr id="4" name="TextBox 3"/>
+          <p:cNvSpPr txBox="1"/>
+          <p:nvPr/>
+        </p:nvSpPr>
+        <p:spPr>
+          <a:xfrm>
+            <a:off x="640080" y="411480"/>
+            <a:ext cx="4389120" cy="292608"/>
+          </a:xfrm>
+          <a:prstGeom prst="rect">
+            <a:avLst/>
+          </a:prstGeom>
+          <a:noFill/>
+        </p:spPr>
+        <p:txBody>
+          <a:bodyPr wrap="none">
+            <a:spAutoFit/>
+          </a:bodyPr>
+          <a:lstStyle/>
+          <a:p>
+            <a:r>
+              <a:rPr sz="1300" b="1">
+                <a:solidFill>
+                  <a:srgbClr val="C45C2A"/>
+                </a:solidFill>
+                <a:latin typeface="Helvetica Neue"/>
+              </a:rPr>
+              <a:t>1-MONTH VERTICAL SLICE</a:t>
+            </a:r>
+          </a:p>
+        </p:txBody>
+      </p:sp>
+      <p:sp>
+        <p:nvSpPr>
+          <p:cNvPr id="5" name="TextBox 4"/>
+          <p:cNvSpPr txBox="1"/>
+          <p:nvPr/>
+        </p:nvSpPr>
+        <p:spPr>
+          <a:xfrm>
+            <a:off x="640080" y="777240"/>
+            <a:ext cx="7040880" cy="914400"/>
+          </a:xfrm>
+          <a:prstGeom prst="rect">
+            <a:avLst/>
+          </a:prstGeom>
+          <a:noFill/>
+        </p:spPr>
+        <p:txBody>
+          <a:bodyPr wrap="square">
+            <a:spAutoFit/>
+          </a:bodyPr>
+          <a:lstStyle/>
+          <a:p>
+            <a:r>
+              <a:rPr sz="2800" b="1">
+                <a:solidFill>
+                  <a:srgbClr val="E6DFD6"/>
+                </a:solidFill>
+                <a:latin typeface="Helvetica Neue"/>
+              </a:rPr>
+              <a:t>Build the hero demo first</a:t>
+            </a:r>
+          </a:p>
+        </p:txBody>
+      </p:sp>
+      <p:sp>
+        <p:nvSpPr>
+          <p:cNvPr id="6" name="Rounded Rectangle 5"/>
+          <p:cNvSpPr/>
+          <p:nvPr/>
+        </p:nvSpPr>
+        <p:spPr>
+          <a:xfrm>
+            <a:off x="822960" y="1828800"/>
+            <a:ext cx="6492240" cy="777240"/>
+          </a:xfrm>
+          <a:prstGeom prst="roundRect">
+            <a:avLst/>
+          </a:prstGeom>
+          <a:solidFill>
+            <a:srgbClr val="1E1A17"/>
+          </a:solidFill>
+          <a:ln>
+            <a:solidFill>
+              <a:srgbClr val="6B7A8F"/>
+            </a:solidFill>
+          </a:ln>
+        </p:spPr>
+        <p:style>
+          <a:lnRef idx="1">
+            <a:schemeClr val="accent1"/>
+          </a:lnRef>
+          <a:fillRef idx="3">
+            <a:schemeClr val="accent1"/>
+          </a:fillRef>
+          <a:effectRef idx="2">
+            <a:schemeClr val="accent1"/>
+          </a:effectRef>
+          <a:fontRef idx="minor">
+            <a:schemeClr val="lt1"/>
+          </a:fontRef>
+        </p:style>
+        <p:txBody>
+          <a:bodyPr rtlCol="0" anchor="ctr"/>
+          <a:lstStyle/>
+          <a:p>
+            <a:pPr algn="ctr"/>
+          </a:p>
+        </p:txBody>
+      </p:sp>
+      <p:sp>
+        <p:nvSpPr>
+          <p:cNvPr id="7" name="TextBox 6"/>
+          <p:cNvSpPr txBox="1"/>
+          <p:nvPr/>
+        </p:nvSpPr>
+        <p:spPr>
+          <a:xfrm>
+            <a:off x="1005840" y="1984248"/>
+            <a:ext cx="914400" cy="274320"/>
+          </a:xfrm>
+          <a:prstGeom prst="rect">
+            <a:avLst/>
+          </a:prstGeom>
+          <a:noFill/>
+        </p:spPr>
+        <p:txBody>
+          <a:bodyPr wrap="none">
+            <a:spAutoFit/>
+          </a:bodyPr>
+          <a:lstStyle/>
+          <a:p>
+            <a:r>
+              <a:rPr sz="1500" b="1">
+                <a:solidFill>
+                  <a:srgbClr val="C45C2A"/>
+                </a:solidFill>
+                <a:latin typeface="Helvetica Neue"/>
+              </a:rPr>
+              <a:t>Week 1</a:t>
+            </a:r>
+          </a:p>
+        </p:txBody>
+      </p:sp>
+      <p:sp>
+        <p:nvSpPr>
+          <p:cNvPr id="8" name="TextBox 7"/>
+          <p:cNvSpPr txBox="1"/>
+          <p:nvPr/>
+        </p:nvSpPr>
+        <p:spPr>
+          <a:xfrm>
+            <a:off x="1874519" y="1938528"/>
+            <a:ext cx="5120640" cy="438912"/>
+          </a:xfrm>
+          <a:prstGeom prst="rect">
+            <a:avLst/>
+          </a:prstGeom>
+          <a:noFill/>
+        </p:spPr>
+        <p:txBody>
+          <a:bodyPr wrap="none">
+            <a:spAutoFit/>
+          </a:bodyPr>
+          <a:lstStyle/>
+          <a:p>
+            <a:r>
+              <a:rPr sz="1400">
+                <a:solidFill>
+                  <a:srgbClr val="E6DFD6"/>
+                </a:solidFill>
+                <a:latin typeface="Helvetica Neue"/>
+              </a:rPr>
+              <a:t>Lock evidence cards, dossier fields, memory sites, ethics branches, and consultant outreach.</a:t>
+            </a:r>
+          </a:p>
+        </p:txBody>
+      </p:sp>
+      <p:sp>
+        <p:nvSpPr>
+          <p:cNvPr id="9" name="Rounded Rectangle 8"/>
+          <p:cNvSpPr/>
+          <p:nvPr/>
+        </p:nvSpPr>
+        <p:spPr>
+          <a:xfrm>
+            <a:off x="822960" y="2743200"/>
+            <a:ext cx="6492240" cy="777240"/>
+          </a:xfrm>
+          <a:prstGeom prst="roundRect">
+            <a:avLst/>
+          </a:prstGeom>
+          <a:solidFill>
+            <a:srgbClr val="1E1A17"/>
+          </a:solidFill>
+          <a:ln>
+            <a:solidFill>
+              <a:srgbClr val="6B7A8F"/>
+            </a:solidFill>
+          </a:ln>
+        </p:spPr>
+        <p:style>
+          <a:lnRef idx="1">
+            <a:schemeClr val="accent1"/>
+          </a:lnRef>
+          <a:fillRef idx="3">
+            <a:schemeClr val="accent1"/>
+          </a:fillRef>
+          <a:effectRef idx="2">
+            <a:schemeClr val="accent1"/>
+          </a:effectRef>
+          <a:fontRef idx="minor">
+            <a:schemeClr val="lt1"/>
+          </a:fontRef>
+        </p:style>
+        <p:txBody>
+          <a:bodyPr rtlCol="0" anchor="ctr"/>
+          <a:lstStyle/>
+          <a:p>
+            <a:pPr algn="ctr"/>
+          </a:p>
+        </p:txBody>
+      </p:sp>
+      <p:sp>
+        <p:nvSpPr>
+          <p:cNvPr id="10" name="TextBox 9"/>
+          <p:cNvSpPr txBox="1"/>
+          <p:nvPr/>
+        </p:nvSpPr>
+        <p:spPr>
+          <a:xfrm>
+            <a:off x="1005840" y="2898648"/>
+            <a:ext cx="914400" cy="274320"/>
+          </a:xfrm>
+          <a:prstGeom prst="rect">
+            <a:avLst/>
+          </a:prstGeom>
+          <a:noFill/>
+        </p:spPr>
+        <p:txBody>
+          <a:bodyPr wrap="none">
+            <a:spAutoFit/>
+          </a:bodyPr>
+          <a:lstStyle/>
+          <a:p>
+            <a:r>
+              <a:rPr sz="1500" b="1">
+                <a:solidFill>
+                  <a:srgbClr val="C45C2A"/>
+                </a:solidFill>
+                <a:latin typeface="Helvetica Neue"/>
+              </a:rPr>
+              <a:t>Week 2</a:t>
+            </a:r>
+          </a:p>
+        </p:txBody>
+      </p:sp>
+      <p:sp>
+        <p:nvSpPr>
+          <p:cNvPr id="11" name="TextBox 10"/>
+          <p:cNvSpPr txBox="1"/>
+          <p:nvPr/>
+        </p:nvSpPr>
+        <p:spPr>
+          <a:xfrm>
+            <a:off x="1874519" y="2852928"/>
+            <a:ext cx="5120640" cy="438912"/>
+          </a:xfrm>
+          <a:prstGeom prst="rect">
+            <a:avLst/>
+          </a:prstGeom>
+          <a:noFill/>
+        </p:spPr>
+        <p:txBody>
+          <a:bodyPr wrap="none">
+            <a:spAutoFit/>
+          </a:bodyPr>
+          <a:lstStyle/>
+          <a:p>
+            <a:r>
+              <a:rPr sz="1400">
+                <a:solidFill>
+                  <a:srgbClr val="E6DFD6"/>
+                </a:solidFill>
+                <a:latin typeface="Helvetica Neue"/>
+              </a:rPr>
+              <a:t>Ship a mammoth vertical slice: dossier, mixer layer, A-Frame scene, and film-track kickoff.</a:t>
+            </a:r>
+          </a:p>
+        </p:txBody>
+      </p:sp>
+      <p:sp>
+        <p:nvSpPr>
+          <p:cNvPr id="12" name="Rounded Rectangle 11"/>
+          <p:cNvSpPr/>
+          <p:nvPr/>
+        </p:nvSpPr>
+        <p:spPr>
+          <a:xfrm>
+            <a:off x="822960" y="3657600"/>
+            <a:ext cx="6492240" cy="777240"/>
+          </a:xfrm>
+          <a:prstGeom prst="roundRect">
+            <a:avLst/>
+          </a:prstGeom>
+          <a:solidFill>
+            <a:srgbClr val="1E1A17"/>
+          </a:solidFill>
+          <a:ln>
+            <a:solidFill>
+              <a:srgbClr val="6B7A8F"/>
+            </a:solidFill>
+          </a:ln>
+        </p:spPr>
+        <p:style>
+          <a:lnRef idx="1">
+            <a:schemeClr val="accent1"/>
+          </a:lnRef>
+          <a:fillRef idx="3">
+            <a:schemeClr val="accent1"/>
+          </a:fillRef>
+          <a:effectRef idx="2">
+            <a:schemeClr val="accent1"/>
+          </a:effectRef>
+          <a:fontRef idx="minor">
+            <a:schemeClr val="lt1"/>
+          </a:fontRef>
+        </p:style>
+        <p:txBody>
+          <a:bodyPr rtlCol="0" anchor="ctr"/>
+          <a:lstStyle/>
+          <a:p>
+            <a:pPr algn="ctr"/>
+          </a:p>
+        </p:txBody>
+      </p:sp>
+      <p:sp>
+        <p:nvSpPr>
+          <p:cNvPr id="13" name="TextBox 12"/>
+          <p:cNvSpPr txBox="1"/>
+          <p:nvPr/>
+        </p:nvSpPr>
+        <p:spPr>
+          <a:xfrm>
+            <a:off x="1005840" y="3813048"/>
+            <a:ext cx="914400" cy="274320"/>
+          </a:xfrm>
+          <a:prstGeom prst="rect">
+            <a:avLst/>
+          </a:prstGeom>
+          <a:noFill/>
+        </p:spPr>
+        <p:txBody>
+          <a:bodyPr wrap="none">
+            <a:spAutoFit/>
+          </a:bodyPr>
+          <a:lstStyle/>
+          <a:p>
+            <a:r>
+              <a:rPr sz="1500" b="1">
+                <a:solidFill>
+                  <a:srgbClr val="C45C2A"/>
+                </a:solidFill>
+                <a:latin typeface="Helvetica Neue"/>
+              </a:rPr>
+              <a:t>Week 3</a:t>
+            </a:r>
+          </a:p>
+        </p:txBody>
+      </p:sp>
+      <p:sp>
+        <p:nvSpPr>
+          <p:cNvPr id="14" name="TextBox 13"/>
+          <p:cNvSpPr txBox="1"/>
+          <p:nvPr/>
+        </p:nvSpPr>
+        <p:spPr>
+          <a:xfrm>
+            <a:off x="1874519" y="3767328"/>
+            <a:ext cx="5120640" cy="438912"/>
+          </a:xfrm>
+          <a:prstGeom prst="rect">
+            <a:avLst/>
+          </a:prstGeom>
+          <a:noFill/>
+        </p:spPr>
+        <p:txBody>
+          <a:bodyPr wrap="none">
+            <a:spAutoFit/>
+          </a:bodyPr>
+          <a:lstStyle/>
+          <a:p>
+            <a:r>
+              <a:rPr sz="1400">
+                <a:solidFill>
+                  <a:srgbClr val="E6DFD6"/>
+                </a:solidFill>
+                <a:latin typeface="Helvetica Neue"/>
+              </a:rPr>
+              <a:t>Integrate thylacine dossier, Indigenous context UI, ethics fork (Sherkow &amp; Greely), reflection log, WebXR polish.</a:t>
+            </a:r>
+          </a:p>
+        </p:txBody>
+      </p:sp>
+      <p:sp>
+        <p:nvSpPr>
+          <p:cNvPr id="15" name="Rounded Rectangle 14"/>
+          <p:cNvSpPr/>
+          <p:nvPr/>
+        </p:nvSpPr>
+        <p:spPr>
+          <a:xfrm>
+            <a:off x="822960" y="4572000"/>
+            <a:ext cx="6492240" cy="777240"/>
+          </a:xfrm>
+          <a:prstGeom prst="roundRect">
+            <a:avLst/>
+          </a:prstGeom>
+          <a:solidFill>
+            <a:srgbClr val="1E1A17"/>
+          </a:solidFill>
+          <a:ln>
+            <a:solidFill>
+              <a:srgbClr val="6B7A8F"/>
+            </a:solidFill>
+          </a:ln>
+        </p:spPr>
+        <p:style>
+          <a:lnRef idx="1">
+            <a:schemeClr val="accent1"/>
+          </a:lnRef>
+          <a:fillRef idx="3">
+            <a:schemeClr val="accent1"/>
+          </a:fillRef>
+          <a:effectRef idx="2">
+            <a:schemeClr val="accent1"/>
+          </a:effectRef>
+          <a:fontRef idx="minor">
+            <a:schemeClr val="lt1"/>
+          </a:fontRef>
+        </p:style>
+        <p:txBody>
+          <a:bodyPr rtlCol="0" anchor="ctr"/>
+          <a:lstStyle/>
+          <a:p>
+            <a:pPr algn="ctr"/>
+          </a:p>
+        </p:txBody>
+      </p:sp>
+      <p:sp>
+        <p:nvSpPr>
+          <p:cNvPr id="16" name="TextBox 15"/>
+          <p:cNvSpPr txBox="1"/>
+          <p:nvPr/>
+        </p:nvSpPr>
+        <p:spPr>
+          <a:xfrm>
+            <a:off x="1005840" y="4727448"/>
+            <a:ext cx="914400" cy="274320"/>
+          </a:xfrm>
+          <a:prstGeom prst="rect">
+            <a:avLst/>
+          </a:prstGeom>
+          <a:noFill/>
+        </p:spPr>
+        <p:txBody>
+          <a:bodyPr wrap="none">
+            <a:spAutoFit/>
+          </a:bodyPr>
+          <a:lstStyle/>
+          <a:p>
+            <a:r>
+              <a:rPr sz="1500" b="1">
+                <a:solidFill>
+                  <a:srgbClr val="C45C2A"/>
+                </a:solidFill>
+                <a:latin typeface="Helvetica Neue"/>
+              </a:rPr>
+              <a:t>Week 4</a:t>
+            </a:r>
+          </a:p>
+        </p:txBody>
+      </p:sp>
+      <p:sp>
+        <p:nvSpPr>
+          <p:cNvPr id="17" name="TextBox 16"/>
+          <p:cNvSpPr txBox="1"/>
+          <p:nvPr/>
+        </p:nvSpPr>
+        <p:spPr>
+          <a:xfrm>
+            <a:off x="1874519" y="4681728"/>
+            <a:ext cx="5120640" cy="438912"/>
+          </a:xfrm>
+          <a:prstGeom prst="rect">
+            <a:avLst/>
+          </a:prstGeom>
+          <a:noFill/>
+        </p:spPr>
+        <p:txBody>
+          <a:bodyPr wrap="none">
+            <a:spAutoFit/>
+          </a:bodyPr>
+          <a:lstStyle/>
+          <a:p>
+            <a:r>
+              <a:rPr sz="1400">
+                <a:solidFill>
+                  <a:srgbClr val="E6DFD6"/>
+                </a:solidFill>
+                <a:latin typeface="Helvetica Neue"/>
+              </a:rPr>
+              <a:t>Polish, rehearse, finish trailer, finalize appendix citations, and harden demo fallback.</a:t>
+            </a:r>
+          </a:p>
+        </p:txBody>
+      </p:sp>
+      <p:sp>
+        <p:nvSpPr>
+          <p:cNvPr id="18" name="Rounded Rectangle 17"/>
+          <p:cNvSpPr/>
+          <p:nvPr/>
+        </p:nvSpPr>
+        <p:spPr>
+          <a:xfrm>
+            <a:off x="7726679" y="1554480"/>
+            <a:ext cx="3200400" cy="3291840"/>
+          </a:xfrm>
+          <a:prstGeom prst="roundRect">
+            <a:avLst/>
+          </a:prstGeom>
+          <a:solidFill>
+            <a:srgbClr val="1E1A17"/>
+          </a:solidFill>
+          <a:ln>
+            <a:solidFill>
+              <a:srgbClr val="6B7A8F"/>
+            </a:solidFill>
+          </a:ln>
+        </p:spPr>
+        <p:style>
+          <a:lnRef idx="1">
+            <a:schemeClr val="accent1"/>
+          </a:lnRef>
+          <a:fillRef idx="3">
+            <a:schemeClr val="accent1"/>
+          </a:fillRef>
+          <a:effectRef idx="2">
+            <a:schemeClr val="accent1"/>
+          </a:effectRef>
+          <a:fontRef idx="minor">
+            <a:schemeClr val="lt1"/>
+          </a:fontRef>
+        </p:style>
+        <p:txBody>
+          <a:bodyPr rtlCol="0" anchor="ctr"/>
+          <a:lstStyle/>
+          <a:p>
+            <a:pPr algn="ctr"/>
+          </a:p>
+        </p:txBody>
+      </p:sp>
+      <p:sp>
+        <p:nvSpPr>
+          <p:cNvPr id="19" name="TextBox 18"/>
+          <p:cNvSpPr txBox="1"/>
+          <p:nvPr/>
+        </p:nvSpPr>
+        <p:spPr>
+          <a:xfrm>
+            <a:off x="8001000" y="1828800"/>
+            <a:ext cx="2560320" cy="365760"/>
+          </a:xfrm>
+          <a:prstGeom prst="rect">
+            <a:avLst/>
+          </a:prstGeom>
+          <a:noFill/>
+        </p:spPr>
+        <p:txBody>
+          <a:bodyPr wrap="none">
+            <a:spAutoFit/>
+          </a:bodyPr>
+          <a:lstStyle/>
+          <a:p>
+            <a:r>
+              <a:rPr sz="1200" b="1">
+                <a:solidFill>
+                  <a:srgbClr val="5CB89A"/>
+                </a:solidFill>
+                <a:latin typeface="Helvetica Neue"/>
+              </a:rPr>
+              <a:t>PARALLEL RULE</a:t>
+            </a:r>
+          </a:p>
+        </p:txBody>
+      </p:sp>
+      <p:sp>
+        <p:nvSpPr>
+          <p:cNvPr id="20" name="TextBox 19"/>
+          <p:cNvSpPr txBox="1"/>
+          <p:nvPr/>
+        </p:nvSpPr>
+        <p:spPr>
+          <a:xfrm>
+            <a:off x="8001000" y="2240280"/>
+            <a:ext cx="2560320" cy="2194560"/>
+          </a:xfrm>
+          <a:prstGeom prst="rect">
+            <a:avLst/>
+          </a:prstGeom>
+          <a:noFill/>
+        </p:spPr>
+        <p:txBody>
+          <a:bodyPr wrap="none">
+            <a:spAutoFit/>
+          </a:bodyPr>
+          <a:lstStyle/>
+          <a:p>
+            <a:r>
+              <a:rPr sz="1600">
+                <a:solidFill>
+                  <a:srgbClr val="E6DFD6"/>
+                </a:solidFill>
+                <a:latin typeface="Helvetica Neue"/>
+              </a:rPr>
+              <a:t>The film track starts after Week 2 and must not block the core interaction milestone.</a:t>
+            </a:r>
+          </a:p>
+        </p:txBody>
+      </p:sp>
+      <p:sp>
+        <p:nvSpPr>
+          <p:cNvPr id="21" name="TextBox 20"/>
+          <p:cNvSpPr txBox="1"/>
+          <p:nvPr/>
+        </p:nvSpPr>
+        <p:spPr>
+          <a:xfrm>
+            <a:off x="548640" y="6263640"/>
+            <a:ext cx="10881360" cy="320040"/>
+          </a:xfrm>
+          <a:prstGeom prst="rect">
+            <a:avLst/>
+          </a:prstGeom>
+          <a:noFill/>
+        </p:spPr>
+        <p:txBody>
+          <a:bodyPr wrap="none">
+            <a:spAutoFit/>
+          </a:bodyPr>
+          <a:lstStyle/>
+          <a:p>
+            <a:pPr algn="l"/>
+            <a:r>
+              <a:rPr sz="900">
+                <a:solidFill>
+                  <a:srgbClr val="9A8F84"/>
+                </a:solidFill>
+                <a:latin typeface="Helvetica Neue"/>
+              </a:rPr>
+              <a:t>Extinction Archive · Biodigital chronobiology · BDC 2026  11 / 12</a:t>
             </a:r>
           </a:p>
         </p:txBody>
@@ -3345,6 +4727,14 @@
 <file path=ppt/slides/slide12.xml><?xml version="1.0" encoding="utf-8"?>
 <p:sld xmlns:a="http://schemas.openxmlformats.org/drawingml/2006/main" xmlns:p="http://schemas.openxmlformats.org/presentationml/2006/main" xmlns:r="http://schemas.openxmlformats.org/officeDocument/2006/relationships">
   <p:cSld>
+    <p:bg>
+      <p:bgPr>
+        <a:solidFill>
+          <a:srgbClr val="141210"/>
+        </a:solidFill>
+        <a:effectLst/>
+      </p:bgPr>
+    </p:bg>
     <p:spTree>
       <p:nvGrpSpPr>
         <p:cNvPr id="1" name=""/>
@@ -3354,69 +4744,389 @@
       <p:grpSpPr/>
       <p:sp>
         <p:nvSpPr>
-          <p:cNvPr id="2" name="Title 1"/>
-          <p:cNvSpPr>
-            <a:spLocks noGrp="1"/>
-          </p:cNvSpPr>
-          <p:nvPr>
-            <p:ph type="title"/>
-          </p:nvPr>
-        </p:nvSpPr>
-        <p:spPr/>
-        <p:txBody>
-          <a:bodyPr/>
-          <a:lstStyle/>
-          <a:p>
-            <a:r>
-              <a:t>Ethics, colonial violence &amp; ecological memory</a:t>
-            </a:r>
-          </a:p>
-        </p:txBody>
-      </p:sp>
-      <p:sp>
-        <p:nvSpPr>
-          <p:cNvPr id="3" name="Content Placeholder 2"/>
-          <p:cNvSpPr>
-            <a:spLocks noGrp="1"/>
-          </p:cNvSpPr>
-          <p:nvPr>
-            <p:ph idx="1"/>
-          </p:nvPr>
-        </p:nvSpPr>
-        <p:spPr/>
-        <p:txBody>
-          <a:bodyPr/>
-          <a:lstStyle/>
-          <a:p>
-            <a:pPr>
-              <a:defRPr sz="1600"/>
-            </a:pPr>
-            <a:r>
-              <a:t>Sherkow &amp; Greely (2013): trade-offs between laboratory de-extinction, in situ conservation, legal novelty, and ecological liability.</a:t>
-            </a:r>
-          </a:p>
-          <a:p>
-            <a:pPr>
-              <a:defRPr sz="1600"/>
-            </a:pPr>
-            <a:r>
-              <a:t>Thylacine loss is entangled with violence against Palawa peoples and Country in lutruwita / Tasmania.</a:t>
-            </a:r>
-          </a:p>
-          <a:p>
-            <a:pPr>
-              <a:defRPr sz="1600"/>
-            </a:pPr>
-            <a:r>
-              <a:t>Interface protocol: Palawa-first voices where possible; author positionality is explicit; no tourism copy as TEK.</a:t>
-            </a:r>
-          </a:p>
-          <a:p>
-            <a:pPr>
-              <a:defRPr sz="1600"/>
-            </a:pPr>
-            <a:r>
-              <a:t>The archive is remembrance and accountability, not resurrection spectacle.</a:t>
+          <p:cNvPr id="2" name="Rectangle 1"/>
+          <p:cNvSpPr/>
+          <p:nvPr/>
+        </p:nvSpPr>
+        <p:spPr>
+          <a:xfrm>
+            <a:off x="0" y="0"/>
+            <a:ext cx="12191695" cy="164592"/>
+          </a:xfrm>
+          <a:prstGeom prst="rect">
+            <a:avLst/>
+          </a:prstGeom>
+          <a:solidFill>
+            <a:srgbClr val="C45C2A"/>
+          </a:solidFill>
+          <a:ln>
+            <a:noFill/>
+          </a:ln>
+        </p:spPr>
+        <p:style>
+          <a:lnRef idx="1">
+            <a:schemeClr val="accent1"/>
+          </a:lnRef>
+          <a:fillRef idx="3">
+            <a:schemeClr val="accent1"/>
+          </a:fillRef>
+          <a:effectRef idx="2">
+            <a:schemeClr val="accent1"/>
+          </a:effectRef>
+          <a:fontRef idx="minor">
+            <a:schemeClr val="lt1"/>
+          </a:fontRef>
+        </p:style>
+        <p:txBody>
+          <a:bodyPr rtlCol="0" anchor="ctr"/>
+          <a:lstStyle/>
+          <a:p>
+            <a:pPr algn="ctr"/>
+          </a:p>
+        </p:txBody>
+      </p:sp>
+      <p:sp>
+        <p:nvSpPr>
+          <p:cNvPr id="3" name="Rectangle 2"/>
+          <p:cNvSpPr/>
+          <p:nvPr/>
+        </p:nvSpPr>
+        <p:spPr>
+          <a:xfrm>
+            <a:off x="9052560" y="164592"/>
+            <a:ext cx="3136392" cy="6693408"/>
+          </a:xfrm>
+          <a:prstGeom prst="rect">
+            <a:avLst/>
+          </a:prstGeom>
+          <a:solidFill>
+            <a:srgbClr val="1E1A17"/>
+          </a:solidFill>
+          <a:ln>
+            <a:noFill/>
+          </a:ln>
+        </p:spPr>
+        <p:style>
+          <a:lnRef idx="1">
+            <a:schemeClr val="accent1"/>
+          </a:lnRef>
+          <a:fillRef idx="3">
+            <a:schemeClr val="accent1"/>
+          </a:fillRef>
+          <a:effectRef idx="2">
+            <a:schemeClr val="accent1"/>
+          </a:effectRef>
+          <a:fontRef idx="minor">
+            <a:schemeClr val="lt1"/>
+          </a:fontRef>
+        </p:style>
+        <p:txBody>
+          <a:bodyPr rtlCol="0" anchor="ctr"/>
+          <a:lstStyle/>
+          <a:p>
+            <a:pPr algn="ctr"/>
+          </a:p>
+        </p:txBody>
+      </p:sp>
+      <p:sp>
+        <p:nvSpPr>
+          <p:cNvPr id="4" name="TextBox 3"/>
+          <p:cNvSpPr txBox="1"/>
+          <p:nvPr/>
+        </p:nvSpPr>
+        <p:spPr>
+          <a:xfrm>
+            <a:off x="640080" y="411480"/>
+            <a:ext cx="4389120" cy="292608"/>
+          </a:xfrm>
+          <a:prstGeom prst="rect">
+            <a:avLst/>
+          </a:prstGeom>
+          <a:noFill/>
+        </p:spPr>
+        <p:txBody>
+          <a:bodyPr wrap="none">
+            <a:spAutoFit/>
+          </a:bodyPr>
+          <a:lstStyle/>
+          <a:p>
+            <a:r>
+              <a:rPr sz="1300" b="1">
+                <a:solidFill>
+                  <a:srgbClr val="C45C2A"/>
+                </a:solidFill>
+                <a:latin typeface="Helvetica Neue"/>
+              </a:rPr>
+              <a:t>DELIVERABLES MAP</a:t>
+            </a:r>
+          </a:p>
+        </p:txBody>
+      </p:sp>
+      <p:sp>
+        <p:nvSpPr>
+          <p:cNvPr id="5" name="TextBox 4"/>
+          <p:cNvSpPr txBox="1"/>
+          <p:nvPr/>
+        </p:nvSpPr>
+        <p:spPr>
+          <a:xfrm>
+            <a:off x="640080" y="777240"/>
+            <a:ext cx="7040880" cy="914400"/>
+          </a:xfrm>
+          <a:prstGeom prst="rect">
+            <a:avLst/>
+          </a:prstGeom>
+          <a:noFill/>
+        </p:spPr>
+        <p:txBody>
+          <a:bodyPr wrap="square">
+            <a:spAutoFit/>
+          </a:bodyPr>
+          <a:lstStyle/>
+          <a:p>
+            <a:r>
+              <a:rPr sz="2800" b="1">
+                <a:solidFill>
+                  <a:srgbClr val="E6DFD6"/>
+                </a:solidFill>
+                <a:latin typeface="Helvetica Neue"/>
+              </a:rPr>
+              <a:t>What the final package includes</a:t>
+            </a:r>
+          </a:p>
+        </p:txBody>
+      </p:sp>
+      <p:sp>
+        <p:nvSpPr>
+          <p:cNvPr id="6" name="TextBox 5"/>
+          <p:cNvSpPr txBox="1"/>
+          <p:nvPr/>
+        </p:nvSpPr>
+        <p:spPr>
+          <a:xfrm>
+            <a:off x="731520" y="1828800"/>
+            <a:ext cx="6400800" cy="3474720"/>
+          </a:xfrm>
+          <a:prstGeom prst="rect">
+            <a:avLst/>
+          </a:prstGeom>
+          <a:noFill/>
+        </p:spPr>
+        <p:txBody>
+          <a:bodyPr wrap="square" lIns="0" rIns="0" tIns="0">
+            <a:spAutoFit/>
+          </a:bodyPr>
+          <a:lstStyle/>
+          <a:p>
+            <a:pPr>
+              <a:spcAft>
+                <a:spcPts val="1000"/>
+              </a:spcAft>
+              <a:defRPr sz="2000">
+                <a:solidFill>
+                  <a:srgbClr val="E6DFD6"/>
+                </a:solidFill>
+                <a:latin typeface="Helvetica Neue"/>
+              </a:defRPr>
+            </a:pPr>
+            <a:r>
+              <a:t>English planning document ready for the repo.</a:t>
+            </a:r>
+          </a:p>
+          <a:p>
+            <a:pPr>
+              <a:spcAft>
+                <a:spcPts val="1000"/>
+              </a:spcAft>
+              <a:defRPr sz="2000">
+                <a:solidFill>
+                  <a:srgbClr val="E6DFD6"/>
+                </a:solidFill>
+                <a:latin typeface="Helvetica Neue"/>
+              </a:defRPr>
+            </a:pPr>
+            <a:r>
+              <a:t>Editable PowerPoint deck in project theme.</a:t>
+            </a:r>
+          </a:p>
+          <a:p>
+            <a:pPr>
+              <a:spcAft>
+                <a:spcPts val="1000"/>
+              </a:spcAft>
+              <a:defRPr sz="2000">
+                <a:solidFill>
+                  <a:srgbClr val="E6DFD6"/>
+                </a:solidFill>
+                <a:latin typeface="Helvetica Neue"/>
+              </a:defRPr>
+            </a:pPr>
+            <a:r>
+              <a:t>GitHub slide README with Office preview link and PDF preview link.</a:t>
+            </a:r>
+          </a:p>
+          <a:p>
+            <a:pPr>
+              <a:spcAft>
+                <a:spcPts val="1000"/>
+              </a:spcAft>
+              <a:defRPr sz="2000">
+                <a:solidFill>
+                  <a:srgbClr val="E6DFD6"/>
+                </a:solidFill>
+                <a:latin typeface="Helvetica Neue"/>
+              </a:defRPr>
+            </a:pPr>
+            <a:r>
+              <a:t>A methods appendix culture: citations and limits developed in parallel, not at the end.</a:t>
+            </a:r>
+          </a:p>
+        </p:txBody>
+      </p:sp>
+      <p:sp>
+        <p:nvSpPr>
+          <p:cNvPr id="7" name="Rounded Rectangle 6"/>
+          <p:cNvSpPr/>
+          <p:nvPr/>
+        </p:nvSpPr>
+        <p:spPr>
+          <a:xfrm>
+            <a:off x="7726679" y="1554480"/>
+            <a:ext cx="3200400" cy="3291840"/>
+          </a:xfrm>
+          <a:prstGeom prst="roundRect">
+            <a:avLst/>
+          </a:prstGeom>
+          <a:solidFill>
+            <a:srgbClr val="1E1A17"/>
+          </a:solidFill>
+          <a:ln>
+            <a:solidFill>
+              <a:srgbClr val="6B7A8F"/>
+            </a:solidFill>
+          </a:ln>
+        </p:spPr>
+        <p:style>
+          <a:lnRef idx="1">
+            <a:schemeClr val="accent1"/>
+          </a:lnRef>
+          <a:fillRef idx="3">
+            <a:schemeClr val="accent1"/>
+          </a:fillRef>
+          <a:effectRef idx="2">
+            <a:schemeClr val="accent1"/>
+          </a:effectRef>
+          <a:fontRef idx="minor">
+            <a:schemeClr val="lt1"/>
+          </a:fontRef>
+        </p:style>
+        <p:txBody>
+          <a:bodyPr rtlCol="0" anchor="ctr"/>
+          <a:lstStyle/>
+          <a:p>
+            <a:pPr algn="ctr"/>
+          </a:p>
+        </p:txBody>
+      </p:sp>
+      <p:sp>
+        <p:nvSpPr>
+          <p:cNvPr id="8" name="TextBox 7"/>
+          <p:cNvSpPr txBox="1"/>
+          <p:nvPr/>
+        </p:nvSpPr>
+        <p:spPr>
+          <a:xfrm>
+            <a:off x="8001000" y="1828800"/>
+            <a:ext cx="2560320" cy="365760"/>
+          </a:xfrm>
+          <a:prstGeom prst="rect">
+            <a:avLst/>
+          </a:prstGeom>
+          <a:noFill/>
+        </p:spPr>
+        <p:txBody>
+          <a:bodyPr wrap="none">
+            <a:spAutoFit/>
+          </a:bodyPr>
+          <a:lstStyle/>
+          <a:p>
+            <a:r>
+              <a:rPr sz="1200" b="1">
+                <a:solidFill>
+                  <a:srgbClr val="5CB89A"/>
+                </a:solidFill>
+                <a:latin typeface="Helvetica Neue"/>
+              </a:rPr>
+              <a:t>CLOSING QUESTION</a:t>
+            </a:r>
+          </a:p>
+        </p:txBody>
+      </p:sp>
+      <p:sp>
+        <p:nvSpPr>
+          <p:cNvPr id="9" name="TextBox 8"/>
+          <p:cNvSpPr txBox="1"/>
+          <p:nvPr/>
+        </p:nvSpPr>
+        <p:spPr>
+          <a:xfrm>
+            <a:off x="8001000" y="2240280"/>
+            <a:ext cx="2560320" cy="2194560"/>
+          </a:xfrm>
+          <a:prstGeom prst="rect">
+            <a:avLst/>
+          </a:prstGeom>
+          <a:noFill/>
+        </p:spPr>
+        <p:txBody>
+          <a:bodyPr wrap="none">
+            <a:spAutoFit/>
+          </a:bodyPr>
+          <a:lstStyle/>
+          <a:p>
+            <a:r>
+              <a:rPr sz="1600">
+                <a:solidFill>
+                  <a:srgbClr val="E6DFD6"/>
+                </a:solidFill>
+                <a:latin typeface="Helvetica Neue"/>
+              </a:rPr>
+              <a:t>What should responsibility sound like after a species has already disappeared?</a:t>
+            </a:r>
+          </a:p>
+        </p:txBody>
+      </p:sp>
+      <p:sp>
+        <p:nvSpPr>
+          <p:cNvPr id="10" name="TextBox 9"/>
+          <p:cNvSpPr txBox="1"/>
+          <p:nvPr/>
+        </p:nvSpPr>
+        <p:spPr>
+          <a:xfrm>
+            <a:off x="548640" y="6263640"/>
+            <a:ext cx="10881360" cy="320040"/>
+          </a:xfrm>
+          <a:prstGeom prst="rect">
+            <a:avLst/>
+          </a:prstGeom>
+          <a:noFill/>
+        </p:spPr>
+        <p:txBody>
+          <a:bodyPr wrap="none">
+            <a:spAutoFit/>
+          </a:bodyPr>
+          <a:lstStyle/>
+          <a:p>
+            <a:pPr algn="l"/>
+            <a:r>
+              <a:rPr sz="900">
+                <a:solidFill>
+                  <a:srgbClr val="9A8F84"/>
+                </a:solidFill>
+                <a:latin typeface="Helvetica Neue"/>
+              </a:rPr>
+              <a:t>Extinction Archive · Biodigital chronobiology · BDC 2026  12 / 12</a:t>
             </a:r>
           </a:p>
         </p:txBody>
@@ -3441,61 +5151,53 @@
       <p:grpSpPr/>
       <p:sp>
         <p:nvSpPr>
-          <p:cNvPr id="2" name="Title 1"/>
-          <p:cNvSpPr>
-            <a:spLocks noGrp="1"/>
-          </p:cNvSpPr>
-          <p:nvPr>
-            <p:ph type="title"/>
-          </p:nvPr>
-        </p:nvSpPr>
-        <p:spPr/>
-        <p:txBody>
-          <a:bodyPr/>
-          <a:lstStyle/>
-          <a:p>
-            <a:r>
-              <a:t>Ideation &amp; design process</a:t>
-            </a:r>
-          </a:p>
-        </p:txBody>
-      </p:sp>
-      <p:sp>
-        <p:nvSpPr>
-          <p:cNvPr id="3" name="Content Placeholder 2"/>
-          <p:cNvSpPr>
-            <a:spLocks noGrp="1"/>
-          </p:cNvSpPr>
-          <p:nvPr>
-            <p:ph idx="1"/>
-          </p:nvPr>
-        </p:nvSpPr>
-        <p:spPr/>
-        <p:txBody>
-          <a:bodyPr/>
-          <a:lstStyle/>
-          <a:p>
-            <a:pPr>
-              <a:defRPr sz="1600"/>
-            </a:pPr>
-            <a:r>
-              <a:t>1 Map skills -&gt; 2 Intersection statements -&gt; 3 Rubric stress-test -&gt; 4 Biology sprint.</a:t>
-            </a:r>
-          </a:p>
-          <a:p>
-            <a:pPr>
-              <a:defRPr sz="1600"/>
-            </a:pPr>
-            <a:r>
-              <a:t>5 Bio / digital split -&gt; 6 Narrative draft -&gt; 7 Prototype + deliverables -&gt; 8 Build / polish / Q&amp;A.</a:t>
-            </a:r>
-          </a:p>
-          <a:p>
-            <a:pPr>
-              <a:defRPr sz="1600"/>
-            </a:pPr>
-            <a:r>
-              <a:t>This process is aligned with the course workbook, biodesign_cursor_agent.md, and BDC judging logic.</a:t>
+          <p:cNvPr id="2" name="TextBox 1"/>
+          <p:cNvSpPr txBox="1"/>
+          <p:nvPr/>
+        </p:nvSpPr>
+        <p:spPr>
+          <a:xfrm>
+            <a:off x="594360" y="594360"/>
+            <a:ext cx="11002975" cy="5669280"/>
+          </a:xfrm>
+          <a:prstGeom prst="rect">
+            <a:avLst/>
+          </a:prstGeom>
+          <a:noFill/>
+        </p:spPr>
+        <p:txBody>
+          <a:bodyPr wrap="square">
+            <a:spAutoFit/>
+          </a:bodyPr>
+          <a:lstStyle/>
+          <a:p>
+            <a:pPr>
+              <a:defRPr sz="3000" b="1"/>
+            </a:pPr>
+            <a:r>
+              <a:t>Part II — Summit appendix (English)</a:t>
+            </a:r>
+          </a:p>
+          <a:p>
+            <a:pPr>
+              <a:spcAft>
+                <a:spcPts val="300"/>
+              </a:spcAft>
+              <a:defRPr sz="1400"/>
+            </a:pPr>
+            <a:r>
+              <a:t>Selected slides from BDC_Summit_Extinction_Archive_2026: citations, scene IDs, rubric, methods.</a:t>
+            </a:r>
+          </a:p>
+          <a:p>
+            <a:pPr>
+              <a:spcAft>
+                <a:spcPts val="300"/>
+              </a:spcAft>
+              <a:defRPr sz="1400"/>
+            </a:pPr>
+            <a:r>
+              <a:t>Part I (previous slides) follows the BDC_Extinction_Archive_EN layout and narrative spine.</a:t>
             </a:r>
           </a:p>
         </p:txBody>
@@ -3520,69 +5222,64 @@
       <p:grpSpPr/>
       <p:sp>
         <p:nvSpPr>
-          <p:cNvPr id="2" name="Title 1"/>
-          <p:cNvSpPr>
-            <a:spLocks noGrp="1"/>
-          </p:cNvSpPr>
-          <p:nvPr>
-            <p:ph type="title"/>
-          </p:nvPr>
-        </p:nvSpPr>
-        <p:spPr/>
-        <p:txBody>
-          <a:bodyPr/>
-          <a:lstStyle/>
-          <a:p>
-            <a:r>
-              <a:t>Production plan (4-week spine)</a:t>
-            </a:r>
-          </a:p>
-        </p:txBody>
-      </p:sp>
-      <p:sp>
-        <p:nvSpPr>
-          <p:cNvPr id="3" name="Content Placeholder 2"/>
-          <p:cNvSpPr>
-            <a:spLocks noGrp="1"/>
-          </p:cNvSpPr>
-          <p:nvPr>
-            <p:ph idx="1"/>
-          </p:nvPr>
-        </p:nvSpPr>
-        <p:spPr/>
-        <p:txBody>
-          <a:bodyPr/>
-          <a:lstStyle/>
-          <a:p>
-            <a:pPr>
-              <a:defRPr sz="1600"/>
-            </a:pPr>
-            <a:r>
-              <a:t>Week 1: literature grid, storyboard, WebXR shell, evidence audit #1.</a:t>
-            </a:r>
-          </a:p>
-          <a:p>
-            <a:pPr>
-              <a:defRPr sz="1600"/>
-            </a:pPr>
-            <a:r>
-              <a:t>Week 2: dossier UI, time scrubber, environment logic, ethics drafts, methods / limitations slide.</a:t>
-            </a:r>
-          </a:p>
-          <a:p>
-            <a:pPr>
-              <a:defRPr sz="1600"/>
-            </a:pPr>
-            <a:r>
-              <a:t>Week 3: integrate thylacine context, reflection panel, sonification, evidence audit #2.</a:t>
-            </a:r>
-          </a:p>
-          <a:p>
-            <a:pPr>
-              <a:defRPr sz="1600"/>
-            </a:pPr>
-            <a:r>
-              <a:t>Week 4: polish, accessibility, P0 bugs only, 10-min talk, 5-min Q&amp;A, trailer export.</a:t>
+          <p:cNvPr id="2" name="TextBox 1"/>
+          <p:cNvSpPr txBox="1"/>
+          <p:nvPr/>
+        </p:nvSpPr>
+        <p:spPr>
+          <a:xfrm>
+            <a:off x="594360" y="594360"/>
+            <a:ext cx="11002975" cy="5669280"/>
+          </a:xfrm>
+          <a:prstGeom prst="rect">
+            <a:avLst/>
+          </a:prstGeom>
+          <a:noFill/>
+        </p:spPr>
+        <p:txBody>
+          <a:bodyPr wrap="square">
+            <a:spAutoFit/>
+          </a:bodyPr>
+          <a:lstStyle/>
+          <a:p>
+            <a:pPr>
+              <a:defRPr sz="3000" b="1"/>
+            </a:pPr>
+            <a:r>
+              <a:t>Extinction Archive: Umwelt Hypothesis Dossiers</a:t>
+            </a:r>
+          </a:p>
+          <a:p>
+            <a:pPr>
+              <a:spcAft>
+                <a:spcPts val="300"/>
+              </a:spcAft>
+              <a:defRPr sz="1400"/>
+            </a:pPr>
+            <a:r>
+              <a:t>AI memorial for lost species · sensory time capsule</a:t>
+            </a:r>
+          </a:p>
+          <a:p>
+            <a:pPr>
+              <a:spcAft>
+                <a:spcPts val="300"/>
+              </a:spcAft>
+              <a:defRPr sz="1400"/>
+            </a:pPr>
+            <a:r>
+              <a:t>Biodesign Challenge 2026 · “Convergent Life”</a:t>
+            </a:r>
+          </a:p>
+          <a:p>
+            <a:pPr>
+              <a:spcAft>
+                <a:spcPts val="300"/>
+              </a:spcAft>
+              <a:defRPr sz="1400"/>
+            </a:pPr>
+            <a:r>
+              <a:t>Macau University</a:t>
             </a:r>
           </a:p>
         </p:txBody>
@@ -3607,69 +5304,86 @@
       <p:grpSpPr/>
       <p:sp>
         <p:nvSpPr>
-          <p:cNvPr id="2" name="Title 1"/>
-          <p:cNvSpPr>
-            <a:spLocks noGrp="1"/>
-          </p:cNvSpPr>
-          <p:nvPr>
-            <p:ph type="title"/>
-          </p:nvPr>
-        </p:nvSpPr>
-        <p:spPr/>
-        <p:txBody>
-          <a:bodyPr/>
-          <a:lstStyle/>
-          <a:p>
-            <a:r>
-              <a:t>Biodesign Challenge fit</a:t>
-            </a:r>
-          </a:p>
-        </p:txBody>
-      </p:sp>
-      <p:sp>
-        <p:nvSpPr>
-          <p:cNvPr id="3" name="Content Placeholder 2"/>
-          <p:cNvSpPr>
-            <a:spLocks noGrp="1"/>
-          </p:cNvSpPr>
-          <p:nvPr>
-            <p:ph idx="1"/>
-          </p:nvPr>
-        </p:nvSpPr>
-        <p:spPr/>
-        <p:txBody>
-          <a:bodyPr/>
-          <a:lstStyle/>
-          <a:p>
-            <a:pPr>
-              <a:defRPr sz="1600"/>
-            </a:pPr>
-            <a:r>
-              <a:t>Narrative: clear emotional and spatial journey supported by live digital demo.</a:t>
-            </a:r>
-          </a:p>
-          <a:p>
-            <a:pPr>
-              <a:defRPr sz="1600"/>
-            </a:pPr>
-            <a:r>
-              <a:t>Concept: temporal niche + Umwelt + evidence literacy creates a distinct biodigital proposition.</a:t>
-            </a:r>
-          </a:p>
-          <a:p>
-            <a:pPr>
-              <a:defRPr sz="1600"/>
-            </a:pPr>
-            <a:r>
-              <a:t>Context: biodiversity loss, de-extinction ethics, misinformation risk, and Indigenous sovereignty.</a:t>
-            </a:r>
-          </a:p>
-          <a:p>
-            <a:pPr>
-              <a:defRPr sz="1600"/>
-            </a:pPr>
-            <a:r>
-              <a:t>Reflection: documented limitations, epistemic layers, prompt / model logging, user reflection.</a:t>
+          <p:cNvPr id="2" name="TextBox 1"/>
+          <p:cNvSpPr txBox="1"/>
+          <p:nvPr/>
+        </p:nvSpPr>
+        <p:spPr>
+          <a:xfrm>
+            <a:off x="594360" y="594360"/>
+            <a:ext cx="11002975" cy="5669280"/>
+          </a:xfrm>
+          <a:prstGeom prst="rect">
+            <a:avLst/>
+          </a:prstGeom>
+          <a:noFill/>
+        </p:spPr>
+        <p:txBody>
+          <a:bodyPr wrap="square">
+            <a:spAutoFit/>
+          </a:bodyPr>
+          <a:lstStyle/>
+          <a:p>
+            <a:pPr>
+              <a:defRPr sz="3000" b="1"/>
+            </a:pPr>
+            <a:r>
+              <a:t>Team &amp; institution</a:t>
+            </a:r>
+          </a:p>
+          <a:p>
+            <a:pPr>
+              <a:spcAft>
+                <a:spcPts val="300"/>
+              </a:spcAft>
+              <a:defRPr sz="1400"/>
+            </a:pPr>
+            <a:r>
+              <a:t>Institution: Macau University</a:t>
+            </a:r>
+          </a:p>
+          <a:p>
+            <a:pPr>
+              <a:spcAft>
+                <a:spcPts val="300"/>
+              </a:spcAft>
+              <a:defRPr sz="1400"/>
+            </a:pPr>
+            <a:r>
+              <a:t>Mentor: Atticus SIMS</a:t>
+            </a:r>
+          </a:p>
+          <a:p>
+            <a:pPr>
+              <a:spcAft>
+                <a:spcPts val="300"/>
+              </a:spcAft>
+              <a:defRPr sz="1400"/>
+            </a:pPr>
+            <a:r>
+              <a:t>Team: GUO XIAO YUE — ID MC569254</a:t>
+            </a:r>
+          </a:p>
+          <a:p>
+            <a:pPr>
+              <a:spcAft>
+                <a:spcPts val="300"/>
+              </a:spcAft>
+              <a:defRPr sz="1400"/>
+            </a:pPr>
+            <a:r>
+              <a:t>Team: LIU JIA QUN — ID MC569293</a:t>
+            </a:r>
+          </a:p>
+          <a:p>
+            <a:pPr>
+              <a:spcAft>
+                <a:spcPts val="300"/>
+              </a:spcAft>
+              <a:defRPr sz="1400"/>
+            </a:pPr>
+            <a:r>
+              <a:t>Program: MDes — Digital Art &amp; AI Technology.</a:t>
             </a:r>
           </a:p>
         </p:txBody>
@@ -3694,69 +5408,64 @@
       <p:grpSpPr/>
       <p:sp>
         <p:nvSpPr>
-          <p:cNvPr id="2" name="Title 1"/>
-          <p:cNvSpPr>
-            <a:spLocks noGrp="1"/>
-          </p:cNvSpPr>
-          <p:nvPr>
-            <p:ph type="title"/>
-          </p:nvPr>
-        </p:nvSpPr>
-        <p:spPr/>
-        <p:txBody>
-          <a:bodyPr/>
-          <a:lstStyle/>
-          <a:p>
-            <a:r>
-              <a:t>Deliverables &amp; summit package</a:t>
-            </a:r>
-          </a:p>
-        </p:txBody>
-      </p:sp>
-      <p:sp>
-        <p:nvSpPr>
-          <p:cNvPr id="3" name="Content Placeholder 2"/>
-          <p:cNvSpPr>
-            <a:spLocks noGrp="1"/>
-          </p:cNvSpPr>
-          <p:nvPr>
-            <p:ph idx="1"/>
-          </p:nvPr>
-        </p:nvSpPr>
-        <p:spPr/>
-        <p:txBody>
-          <a:bodyPr/>
-          <a:lstStyle/>
-          <a:p>
-            <a:pPr>
-              <a:defRPr sz="1600"/>
-            </a:pPr>
-            <a:r>
-              <a:t>10-minute oral presentation + 5-minute Q&amp;A.</a:t>
-            </a:r>
-          </a:p>
-          <a:p>
-            <a:pPr>
-              <a:defRPr sz="1600"/>
-            </a:pPr>
-            <a:r>
-              <a:t>Visual renderings, WebXR experience, and citation-aware UI captures.</a:t>
-            </a:r>
-          </a:p>
-          <a:p>
-            <a:pPr>
-              <a:defRPr sz="1600"/>
-            </a:pPr>
-            <a:r>
-              <a:t>Minimal physical anchor + QR for reliable access in gallery or talk format.</a:t>
-            </a:r>
-          </a:p>
-          <a:p>
-            <a:pPr>
-              <a:defRPr sz="1600"/>
-            </a:pPr>
-            <a:r>
-              <a:t>1-5 minute creative trailer, PPT deck, methods appendix, and citations / limits in parallel.</a:t>
+          <p:cNvPr id="2" name="TextBox 1"/>
+          <p:cNvSpPr txBox="1"/>
+          <p:nvPr/>
+        </p:nvSpPr>
+        <p:spPr>
+          <a:xfrm>
+            <a:off x="594360" y="594360"/>
+            <a:ext cx="11002975" cy="5669280"/>
+          </a:xfrm>
+          <a:prstGeom prst="rect">
+            <a:avLst/>
+          </a:prstGeom>
+          <a:noFill/>
+        </p:spPr>
+        <p:txBody>
+          <a:bodyPr wrap="square">
+            <a:spAutoFit/>
+          </a:bodyPr>
+          <a:lstStyle/>
+          <a:p>
+            <a:pPr>
+              <a:defRPr sz="3000" b="1"/>
+            </a:pPr>
+            <a:r>
+              <a:t>Why this title?</a:t>
+            </a:r>
+          </a:p>
+          <a:p>
+            <a:pPr>
+              <a:spcAft>
+                <a:spcPts val="300"/>
+              </a:spcAft>
+              <a:defRPr sz="1400"/>
+            </a:pPr>
+            <a:r>
+              <a:t>“Umwelt Hypothesis Dossiers” = each species as a **folder of testable claims** (genes, orbits, climate), not a fantasy safari.</a:t>
+            </a:r>
+          </a:p>
+          <a:p>
+            <a:pPr>
+              <a:spcAft>
+                <a:spcPts val="300"/>
+              </a:spcAft>
+              <a:defRPr sz="1400"/>
+            </a:pPr>
+            <a:r>
+              <a:t>“AI memorial” = generative media **constrained** by literature — grief and wonder without faking science.</a:t>
+            </a:r>
+          </a:p>
+          <a:p>
+            <a:pPr>
+              <a:spcAft>
+                <a:spcPts val="300"/>
+              </a:spcAft>
+              <a:defRPr sz="1400"/>
+            </a:pPr>
+            <a:r>
+              <a:t>“Sensory time capsule” = we reconstruct **when** they lived (phase, season), not only **what** they looked like.</a:t>
             </a:r>
           </a:p>
         </p:txBody>
@@ -3781,77 +5490,64 @@
       <p:grpSpPr/>
       <p:sp>
         <p:nvSpPr>
-          <p:cNvPr id="2" name="Title 1"/>
-          <p:cNvSpPr>
-            <a:spLocks noGrp="1"/>
-          </p:cNvSpPr>
-          <p:nvPr>
-            <p:ph type="title"/>
-          </p:nvPr>
-        </p:nvSpPr>
-        <p:spPr/>
-        <p:txBody>
-          <a:bodyPr/>
-          <a:lstStyle/>
-          <a:p>
-            <a:r>
-              <a:t>Key literature - mammoth dossier</a:t>
-            </a:r>
-          </a:p>
-        </p:txBody>
-      </p:sp>
-      <p:sp>
-        <p:nvSpPr>
-          <p:cNvPr id="3" name="Content Placeholder 2"/>
-          <p:cNvSpPr>
-            <a:spLocks noGrp="1"/>
-          </p:cNvSpPr>
-          <p:nvPr>
-            <p:ph idx="1"/>
-          </p:nvPr>
-        </p:nvSpPr>
-        <p:spPr/>
-        <p:txBody>
-          <a:bodyPr/>
-          <a:lstStyle/>
-          <a:p>
-            <a:pPr>
-              <a:defRPr sz="1600"/>
-            </a:pPr>
-            <a:r>
-              <a:t>Lynch et al. 2015. Cell Reports. Elephantid genomes and Arctic adaptation. DOI 10.1016/j.celrep.2015.06.027</a:t>
-            </a:r>
-          </a:p>
-          <a:p>
-            <a:pPr>
-              <a:defRPr sz="1600"/>
-            </a:pPr>
-            <a:r>
-              <a:t>Lu et al. 2010. Current Biology. Reindeer circadian attenuation. DOI 10.1016/j.cub.2010.01.042</a:t>
-            </a:r>
-          </a:p>
-          <a:p>
-            <a:pPr>
-              <a:defRPr sz="1600"/>
-            </a:pPr>
-            <a:r>
-              <a:t>Zimov et al. 2012. Quaternary Science Reviews. Mammoth steppe productivity. DOI 10.1016/j.quascirev.2012.08.004</a:t>
-            </a:r>
-          </a:p>
-          <a:p>
-            <a:pPr>
-              <a:defRPr sz="1600"/>
-            </a:pPr>
-            <a:r>
-              <a:t>Wooller et al. 2021. Science. Lifetime mobility of an Arctic woolly mammoth. DOI 10.1126/science.abg1134</a:t>
-            </a:r>
-          </a:p>
-          <a:p>
-            <a:pPr>
-              <a:defRPr sz="1600"/>
-            </a:pPr>
-            <a:r>
-              <a:t>Nogues-Bravo et al. 2008. PLoS Biology. Climate, humans, and mammoth extinction. DOI 10.1371/journal.pbio.0060079</a:t>
+          <p:cNvPr id="2" name="TextBox 1"/>
+          <p:cNvSpPr txBox="1"/>
+          <p:nvPr/>
+        </p:nvSpPr>
+        <p:spPr>
+          <a:xfrm>
+            <a:off x="594360" y="594360"/>
+            <a:ext cx="11002975" cy="5669280"/>
+          </a:xfrm>
+          <a:prstGeom prst="rect">
+            <a:avLst/>
+          </a:prstGeom>
+          <a:noFill/>
+        </p:spPr>
+        <p:txBody>
+          <a:bodyPr wrap="square">
+            <a:spAutoFit/>
+          </a:bodyPr>
+          <a:lstStyle/>
+          <a:p>
+            <a:pPr>
+              <a:defRPr sz="3000" b="1"/>
+            </a:pPr>
+            <a:r>
+              <a:t>Core design question</a:t>
+            </a:r>
+          </a:p>
+          <a:p>
+            <a:pPr>
+              <a:spcAft>
+                <a:spcPts val="300"/>
+              </a:spcAft>
+              <a:defRPr sz="1400"/>
+            </a:pPr>
+            <a:r>
+              <a:t>“If we use **generative AI + WebXR** to **reconstruct** a **temporal phenotype**, can we repair the human gap in **sensing extinction**?”</a:t>
+            </a:r>
+          </a:p>
+          <a:p>
+            <a:pPr>
+              <a:spcAft>
+                <a:spcPts val="300"/>
+              </a:spcAft>
+              <a:defRPr sz="1400"/>
+            </a:pPr>
+            <a:r>
+              <a:t>Palaeo-chronobiology + morphology (orbit, clock pathways, TRPV3…) = evidence ladder.</a:t>
+            </a:r>
+          </a:p>
+          <a:p>
+            <a:pPr>
+              <a:spcAft>
+                <a:spcPts val="300"/>
+              </a:spcAft>
+              <a:defRPr sz="1400"/>
+            </a:pPr>
+            <a:r>
+              <a:t>Umwelt = sensory world as **hypothesis**, disclosed layer-by-layer.</a:t>
             </a:r>
           </a:p>
         </p:txBody>
@@ -3876,77 +5572,75 @@
       <p:grpSpPr/>
       <p:sp>
         <p:nvSpPr>
-          <p:cNvPr id="2" name="Title 1"/>
-          <p:cNvSpPr>
-            <a:spLocks noGrp="1"/>
-          </p:cNvSpPr>
-          <p:nvPr>
-            <p:ph type="title"/>
-          </p:nvPr>
-        </p:nvSpPr>
-        <p:spPr/>
-        <p:txBody>
-          <a:bodyPr/>
-          <a:lstStyle/>
-          <a:p>
-            <a:r>
-              <a:t>Key literature - thylacine dossier &amp; sovereignty</a:t>
-            </a:r>
-          </a:p>
-        </p:txBody>
-      </p:sp>
-      <p:sp>
-        <p:nvSpPr>
-          <p:cNvPr id="3" name="Content Placeholder 2"/>
-          <p:cNvSpPr>
-            <a:spLocks noGrp="1"/>
-          </p:cNvSpPr>
-          <p:nvPr>
-            <p:ph idx="1"/>
-          </p:nvPr>
-        </p:nvSpPr>
-        <p:spPr/>
-        <p:txBody>
-          <a:bodyPr/>
-          <a:lstStyle/>
-          <a:p>
-            <a:pPr>
-              <a:defRPr sz="1600"/>
-            </a:pPr>
-            <a:r>
-              <a:t>Pozniak et al. 2018. Orbit / skull morphology and diel activity. DOI 10.1002/ar.23910</a:t>
-            </a:r>
-          </a:p>
-          <a:p>
-            <a:pPr>
-              <a:defRPr sz="1600"/>
-            </a:pPr>
-            <a:r>
-              <a:t>Mass &amp; Supin 2020. RGC topography methods. DOI 10.31857/S0002332920060107 [Interpolated in thylacine POV]</a:t>
-            </a:r>
-          </a:p>
-          <a:p>
-            <a:pPr>
-              <a:defRPr sz="1600"/>
-            </a:pPr>
-            <a:r>
-              <a:t>Paddle 2000. The Last Tasmanian Tiger. ISBN 9780521782196</a:t>
-            </a:r>
-          </a:p>
-          <a:p>
-            <a:pPr>
-              <a:defRPr sz="1600"/>
-            </a:pPr>
-            <a:r>
-              <a:t>Sleightholme &amp; Campbell 2016. Human pressures and extinction framing. DOI 10.1080/00222933.2016.1217037</a:t>
-            </a:r>
-          </a:p>
-          <a:p>
-            <a:pPr>
-              <a:defRPr sz="1600"/>
-            </a:pPr>
-            <a:r>
-              <a:t>Clements 2025. DOI 10.1177/13534858251272203 | Rimmer 2020 Artlink | Lehman 2013 Griffith Review | Schlunke 2025 DOI 10.1017/ext.2025.10008</a:t>
+          <p:cNvPr id="2" name="TextBox 1"/>
+          <p:cNvSpPr txBox="1"/>
+          <p:nvPr/>
+        </p:nvSpPr>
+        <p:spPr>
+          <a:xfrm>
+            <a:off x="594360" y="594360"/>
+            <a:ext cx="11002975" cy="5669280"/>
+          </a:xfrm>
+          <a:prstGeom prst="rect">
+            <a:avLst/>
+          </a:prstGeom>
+          <a:noFill/>
+        </p:spPr>
+        <p:txBody>
+          <a:bodyPr wrap="square">
+            <a:spAutoFit/>
+          </a:bodyPr>
+          <a:lstStyle/>
+          <a:p>
+            <a:pPr>
+              <a:defRPr sz="3000" b="1"/>
+            </a:pPr>
+            <a:r>
+              <a:t>Bio × digital quadrants (our mapping)</a:t>
+            </a:r>
+          </a:p>
+          <a:p>
+            <a:pPr>
+              <a:spcAft>
+                <a:spcPts val="300"/>
+              </a:spcAft>
+              <a:defRPr sz="1400"/>
+            </a:pPr>
+            <a:r>
+              <a:t>**SENSE / VISUALIZE:** photoperiod sliders, orbit-informed POV filters, habitat maps from Zimov et al.</a:t>
+            </a:r>
+          </a:p>
+          <a:p>
+            <a:pPr>
+              <a:spcAft>
+                <a:spcPts val="300"/>
+              </a:spcAft>
+              <a:defRPr sz="1400"/>
+            </a:pPr>
+            <a:r>
+              <a:t>**OPTIMIZE:** prompt + data rules so generative landscapes respect paleo proxies.</a:t>
+            </a:r>
+          </a:p>
+          <a:p>
+            <a:pPr>
+              <a:spcAft>
+                <a:spcPts val="300"/>
+              </a:spcAft>
+              <a:defRPr sz="1400"/>
+            </a:pPr>
+            <a:r>
+              <a:t>**SIMULATE:** phase / sonification of “a species day” — rhythmic, not decorative.</a:t>
+            </a:r>
+          </a:p>
+          <a:p>
+            <a:pPr>
+              <a:spcAft>
+                <a:spcPts val="300"/>
+              </a:spcAft>
+              <a:defRPr sz="1400"/>
+            </a:pPr>
+            <a:r>
+              <a:t>Red-flag: if biology OR code is removed and the piece still “works,” we failed the biodigital brief.</a:t>
             </a:r>
           </a:p>
         </p:txBody>
@@ -3971,69 +5665,64 @@
       <p:grpSpPr/>
       <p:sp>
         <p:nvSpPr>
-          <p:cNvPr id="2" name="Title 1"/>
-          <p:cNvSpPr>
-            <a:spLocks noGrp="1"/>
-          </p:cNvSpPr>
-          <p:nvPr>
-            <p:ph type="title"/>
-          </p:nvPr>
-        </p:nvSpPr>
-        <p:spPr/>
-        <p:txBody>
-          <a:bodyPr/>
-          <a:lstStyle/>
-          <a:p>
-            <a:r>
-              <a:t>Limitations &amp; honest reflection</a:t>
-            </a:r>
-          </a:p>
-        </p:txBody>
-      </p:sp>
-      <p:sp>
-        <p:nvSpPr>
-          <p:cNvPr id="3" name="Content Placeholder 2"/>
-          <p:cNvSpPr>
-            <a:spLocks noGrp="1"/>
-          </p:cNvSpPr>
-          <p:nvPr>
-            <p:ph idx="1"/>
-          </p:nvPr>
-        </p:nvSpPr>
-        <p:spPr/>
-        <p:txBody>
-          <a:bodyPr/>
-          <a:lstStyle/>
-          <a:p>
-            <a:pPr>
-              <a:defRPr sz="1600"/>
-            </a:pPr>
-            <a:r>
-              <a:t>No living mammoth or thylacine: all sensory reconstruction is partial, bounded, and explicitly tiered.</a:t>
-            </a:r>
-          </a:p>
-          <a:p>
-            <a:pPr>
-              <a:defRPr sz="1600"/>
-            </a:pPr>
-            <a:r>
-              <a:t>Generative media can feel real, so the deck and UI design against deceptive realism.</a:t>
-            </a:r>
-          </a:p>
-          <a:p>
-            <a:pPr>
-              <a:defRPr sz="1600"/>
-            </a:pPr>
-            <a:r>
-              <a:t>Two people / short sprint means narrow but deep: one strong integrated experience beats many weak scenes.</a:t>
-            </a:r>
-          </a:p>
-          <a:p>
-            <a:pPr>
-              <a:defRPr sz="1600"/>
-            </a:pPr>
-            <a:r>
-              <a:t>Desktop WebXR path is canonical; any AR or mobile path is supportive rather than mission-critical.</a:t>
+          <p:cNvPr id="2" name="TextBox 1"/>
+          <p:cNvSpPr txBox="1"/>
+          <p:nvPr/>
+        </p:nvSpPr>
+        <p:spPr>
+          <a:xfrm>
+            <a:off x="594360" y="594360"/>
+            <a:ext cx="11002975" cy="5669280"/>
+          </a:xfrm>
+          <a:prstGeom prst="rect">
+            <a:avLst/>
+          </a:prstGeom>
+          <a:noFill/>
+        </p:spPr>
+        <p:txBody>
+          <a:bodyPr wrap="square">
+            <a:spAutoFit/>
+          </a:bodyPr>
+          <a:lstStyle/>
+          <a:p>
+            <a:pPr>
+              <a:defRPr sz="3000" b="1"/>
+            </a:pPr>
+            <a:r>
+              <a:t>Creative concept — two dossiers only</a:t>
+            </a:r>
+          </a:p>
+          <a:p>
+            <a:pPr>
+              <a:spcAft>
+                <a:spcPts val="300"/>
+              </a:spcAft>
+              <a:defRPr sz="1400"/>
+            </a:pPr>
+            <a:r>
+              <a:t>**Woolly mammoth:** Arctic circadian genomics (Lynch 2015), reindeer analogy (Lu 2010), mammoth steppe (Zimov 2012), TRPV3 cold (Lynch; Kim preprint optional).</a:t>
+            </a:r>
+          </a:p>
+          <a:p>
+            <a:pPr>
+              <a:spcAft>
+                <a:spcPts val="300"/>
+              </a:spcAft>
+              <a:defRPr sz="1400"/>
+            </a:pPr>
+            <a:r>
+              <a:t>**Thylacine:** skull / diel activity (Pozniak 2018), RGC metaphor (Mass &amp; Supin 2020), history (Paddle; Sleightholme), sovereignty (Clements + Palawa-led Rimmer, Lehman; Schlunke).</a:t>
+            </a:r>
+          </a:p>
+          <a:p>
+            <a:pPr>
+              <a:spcAft>
+                <a:spcPts val="300"/>
+              </a:spcAft>
+              <a:defRPr sz="1400"/>
+            </a:pPr>
+            <a:r>
+              <a:t>Journey: discover rhythm → epistemic layers → ethics sliders → reflection log (HTML template in repo).</a:t>
             </a:r>
           </a:p>
         </p:txBody>
@@ -4049,6 +5738,14 @@
 <file path=ppt/slides/slide2.xml><?xml version="1.0" encoding="utf-8"?>
 <p:sld xmlns:a="http://schemas.openxmlformats.org/drawingml/2006/main" xmlns:p="http://schemas.openxmlformats.org/presentationml/2006/main" xmlns:r="http://schemas.openxmlformats.org/officeDocument/2006/relationships">
   <p:cSld>
+    <p:bg>
+      <p:bgPr>
+        <a:solidFill>
+          <a:srgbClr val="141210"/>
+        </a:solidFill>
+        <a:effectLst/>
+      </p:bgPr>
+    </p:bg>
     <p:spTree>
       <p:nvGrpSpPr>
         <p:cNvPr id="1" name=""/>
@@ -4058,77 +5755,373 @@
       <p:grpSpPr/>
       <p:sp>
         <p:nvSpPr>
-          <p:cNvPr id="2" name="Title 1"/>
-          <p:cNvSpPr>
-            <a:spLocks noGrp="1"/>
-          </p:cNvSpPr>
-          <p:nvPr>
-            <p:ph type="title"/>
-          </p:nvPr>
-        </p:nvSpPr>
-        <p:spPr/>
-        <p:txBody>
-          <a:bodyPr/>
-          <a:lstStyle/>
-          <a:p>
-            <a:r>
-              <a:t>Team &amp; institution</a:t>
-            </a:r>
-          </a:p>
-        </p:txBody>
-      </p:sp>
-      <p:sp>
-        <p:nvSpPr>
-          <p:cNvPr id="3" name="Content Placeholder 2"/>
-          <p:cNvSpPr>
-            <a:spLocks noGrp="1"/>
-          </p:cNvSpPr>
-          <p:nvPr>
-            <p:ph idx="1"/>
-          </p:nvPr>
-        </p:nvSpPr>
-        <p:spPr/>
-        <p:txBody>
-          <a:bodyPr/>
-          <a:lstStyle/>
-          <a:p>
-            <a:pPr>
-              <a:defRPr sz="1600"/>
-            </a:pPr>
-            <a:r>
-              <a:t>Institution: Macau University</a:t>
-            </a:r>
-          </a:p>
-          <a:p>
-            <a:pPr>
-              <a:defRPr sz="1600"/>
-            </a:pPr>
-            <a:r>
-              <a:t>Mentor: Atticus SIMS</a:t>
-            </a:r>
-          </a:p>
-          <a:p>
-            <a:pPr>
-              <a:defRPr sz="1600"/>
-            </a:pPr>
-            <a:r>
-              <a:t>GUO XIAO YUE - MC569254</a:t>
-            </a:r>
-          </a:p>
-          <a:p>
-            <a:pPr>
-              <a:defRPr sz="1600"/>
-            </a:pPr>
-            <a:r>
-              <a:t>LIU JIA QUN - MC569293</a:t>
-            </a:r>
-          </a:p>
-          <a:p>
-            <a:pPr>
-              <a:defRPr sz="1600"/>
-            </a:pPr>
-            <a:r>
-              <a:t>Program: Digital Art &amp; AI Technology (MDes) | 2-person team</a:t>
+          <p:cNvPr id="2" name="Rectangle 1"/>
+          <p:cNvSpPr/>
+          <p:nvPr/>
+        </p:nvSpPr>
+        <p:spPr>
+          <a:xfrm>
+            <a:off x="0" y="0"/>
+            <a:ext cx="12191695" cy="164592"/>
+          </a:xfrm>
+          <a:prstGeom prst="rect">
+            <a:avLst/>
+          </a:prstGeom>
+          <a:solidFill>
+            <a:srgbClr val="C45C2A"/>
+          </a:solidFill>
+          <a:ln>
+            <a:noFill/>
+          </a:ln>
+        </p:spPr>
+        <p:style>
+          <a:lnRef idx="1">
+            <a:schemeClr val="accent1"/>
+          </a:lnRef>
+          <a:fillRef idx="3">
+            <a:schemeClr val="accent1"/>
+          </a:fillRef>
+          <a:effectRef idx="2">
+            <a:schemeClr val="accent1"/>
+          </a:effectRef>
+          <a:fontRef idx="minor">
+            <a:schemeClr val="lt1"/>
+          </a:fontRef>
+        </p:style>
+        <p:txBody>
+          <a:bodyPr rtlCol="0" anchor="ctr"/>
+          <a:lstStyle/>
+          <a:p>
+            <a:pPr algn="ctr"/>
+          </a:p>
+        </p:txBody>
+      </p:sp>
+      <p:sp>
+        <p:nvSpPr>
+          <p:cNvPr id="3" name="Rectangle 2"/>
+          <p:cNvSpPr/>
+          <p:nvPr/>
+        </p:nvSpPr>
+        <p:spPr>
+          <a:xfrm>
+            <a:off x="9052560" y="164592"/>
+            <a:ext cx="3136392" cy="6693408"/>
+          </a:xfrm>
+          <a:prstGeom prst="rect">
+            <a:avLst/>
+          </a:prstGeom>
+          <a:solidFill>
+            <a:srgbClr val="1E1A17"/>
+          </a:solidFill>
+          <a:ln>
+            <a:noFill/>
+          </a:ln>
+        </p:spPr>
+        <p:style>
+          <a:lnRef idx="1">
+            <a:schemeClr val="accent1"/>
+          </a:lnRef>
+          <a:fillRef idx="3">
+            <a:schemeClr val="accent1"/>
+          </a:fillRef>
+          <a:effectRef idx="2">
+            <a:schemeClr val="accent1"/>
+          </a:effectRef>
+          <a:fontRef idx="minor">
+            <a:schemeClr val="lt1"/>
+          </a:fontRef>
+        </p:style>
+        <p:txBody>
+          <a:bodyPr rtlCol="0" anchor="ctr"/>
+          <a:lstStyle/>
+          <a:p>
+            <a:pPr algn="ctr"/>
+          </a:p>
+        </p:txBody>
+      </p:sp>
+      <p:sp>
+        <p:nvSpPr>
+          <p:cNvPr id="4" name="TextBox 3"/>
+          <p:cNvSpPr txBox="1"/>
+          <p:nvPr/>
+        </p:nvSpPr>
+        <p:spPr>
+          <a:xfrm>
+            <a:off x="640080" y="411480"/>
+            <a:ext cx="4389120" cy="292608"/>
+          </a:xfrm>
+          <a:prstGeom prst="rect">
+            <a:avLst/>
+          </a:prstGeom>
+          <a:noFill/>
+        </p:spPr>
+        <p:txBody>
+          <a:bodyPr wrap="none">
+            <a:spAutoFit/>
+          </a:bodyPr>
+          <a:lstStyle/>
+          <a:p>
+            <a:r>
+              <a:rPr sz="1300" b="1">
+                <a:solidFill>
+                  <a:srgbClr val="C45C2A"/>
+                </a:solidFill>
+                <a:latin typeface="Helvetica Neue"/>
+              </a:rPr>
+              <a:t>WHY THIS PROJECT NOW</a:t>
+            </a:r>
+          </a:p>
+        </p:txBody>
+      </p:sp>
+      <p:sp>
+        <p:nvSpPr>
+          <p:cNvPr id="5" name="TextBox 4"/>
+          <p:cNvSpPr txBox="1"/>
+          <p:nvPr/>
+        </p:nvSpPr>
+        <p:spPr>
+          <a:xfrm>
+            <a:off x="640080" y="777240"/>
+            <a:ext cx="7040880" cy="914400"/>
+          </a:xfrm>
+          <a:prstGeom prst="rect">
+            <a:avLst/>
+          </a:prstGeom>
+          <a:noFill/>
+        </p:spPr>
+        <p:txBody>
+          <a:bodyPr wrap="square">
+            <a:spAutoFit/>
+          </a:bodyPr>
+          <a:lstStyle/>
+          <a:p>
+            <a:r>
+              <a:rPr sz="2800" b="1">
+                <a:solidFill>
+                  <a:srgbClr val="E6DFD6"/>
+                </a:solidFill>
+                <a:latin typeface="Helvetica Neue"/>
+              </a:rPr>
+              <a:t>Extinction removes more than bodies.</a:t>
+            </a:r>
+          </a:p>
+        </p:txBody>
+      </p:sp>
+      <p:sp>
+        <p:nvSpPr>
+          <p:cNvPr id="6" name="TextBox 5"/>
+          <p:cNvSpPr txBox="1"/>
+          <p:nvPr/>
+        </p:nvSpPr>
+        <p:spPr>
+          <a:xfrm>
+            <a:off x="731520" y="1828800"/>
+            <a:ext cx="6400800" cy="3474720"/>
+          </a:xfrm>
+          <a:prstGeom prst="rect">
+            <a:avLst/>
+          </a:prstGeom>
+          <a:noFill/>
+        </p:spPr>
+        <p:txBody>
+          <a:bodyPr wrap="square" lIns="0" rIns="0" tIns="0">
+            <a:spAutoFit/>
+          </a:bodyPr>
+          <a:lstStyle/>
+          <a:p>
+            <a:pPr>
+              <a:spcAft>
+                <a:spcPts val="1000"/>
+              </a:spcAft>
+              <a:defRPr sz="2000">
+                <a:solidFill>
+                  <a:srgbClr val="E6DFD6"/>
+                </a:solidFill>
+                <a:latin typeface="Helvetica Neue"/>
+              </a:defRPr>
+            </a:pPr>
+            <a:r>
+              <a:t>It erases migration pulses, social synchrony, and seasonal fit to landscape.</a:t>
+            </a:r>
+          </a:p>
+          <a:p>
+            <a:pPr>
+              <a:spcAft>
+                <a:spcPts val="1000"/>
+              </a:spcAft>
+              <a:defRPr sz="2000">
+                <a:solidFill>
+                  <a:srgbClr val="E6DFD6"/>
+                </a:solidFill>
+                <a:latin typeface="Helvetica Neue"/>
+              </a:defRPr>
+            </a:pPr>
+            <a:r>
+              <a:t>Public memory often normalizes ecological absence after enough time passes.</a:t>
+            </a:r>
+          </a:p>
+          <a:p>
+            <a:pPr>
+              <a:spcAft>
+                <a:spcPts val="1000"/>
+              </a:spcAft>
+              <a:defRPr sz="2000">
+                <a:solidFill>
+                  <a:srgbClr val="E6DFD6"/>
+                </a:solidFill>
+                <a:latin typeface="Helvetica Neue"/>
+              </a:defRPr>
+            </a:pPr>
+            <a:r>
+              <a:t>This project asks how constrained computation can make loss legible without pretending we fully know another species' Umwelt.</a:t>
+            </a:r>
+          </a:p>
+        </p:txBody>
+      </p:sp>
+      <p:sp>
+        <p:nvSpPr>
+          <p:cNvPr id="7" name="Rounded Rectangle 6"/>
+          <p:cNvSpPr/>
+          <p:nvPr/>
+        </p:nvSpPr>
+        <p:spPr>
+          <a:xfrm>
+            <a:off x="7726679" y="1554480"/>
+            <a:ext cx="3200400" cy="3291840"/>
+          </a:xfrm>
+          <a:prstGeom prst="roundRect">
+            <a:avLst/>
+          </a:prstGeom>
+          <a:solidFill>
+            <a:srgbClr val="1E1A17"/>
+          </a:solidFill>
+          <a:ln>
+            <a:solidFill>
+              <a:srgbClr val="6B7A8F"/>
+            </a:solidFill>
+          </a:ln>
+        </p:spPr>
+        <p:style>
+          <a:lnRef idx="1">
+            <a:schemeClr val="accent1"/>
+          </a:lnRef>
+          <a:fillRef idx="3">
+            <a:schemeClr val="accent1"/>
+          </a:fillRef>
+          <a:effectRef idx="2">
+            <a:schemeClr val="accent1"/>
+          </a:effectRef>
+          <a:fontRef idx="minor">
+            <a:schemeClr val="lt1"/>
+          </a:fontRef>
+        </p:style>
+        <p:txBody>
+          <a:bodyPr rtlCol="0" anchor="ctr"/>
+          <a:lstStyle/>
+          <a:p>
+            <a:pPr algn="ctr"/>
+          </a:p>
+        </p:txBody>
+      </p:sp>
+      <p:sp>
+        <p:nvSpPr>
+          <p:cNvPr id="8" name="TextBox 7"/>
+          <p:cNvSpPr txBox="1"/>
+          <p:nvPr/>
+        </p:nvSpPr>
+        <p:spPr>
+          <a:xfrm>
+            <a:off x="8001000" y="1828800"/>
+            <a:ext cx="2560320" cy="365760"/>
+          </a:xfrm>
+          <a:prstGeom prst="rect">
+            <a:avLst/>
+          </a:prstGeom>
+          <a:noFill/>
+        </p:spPr>
+        <p:txBody>
+          <a:bodyPr wrap="none">
+            <a:spAutoFit/>
+          </a:bodyPr>
+          <a:lstStyle/>
+          <a:p>
+            <a:r>
+              <a:rPr sz="1200" b="1">
+                <a:solidFill>
+                  <a:srgbClr val="5CB89A"/>
+                </a:solidFill>
+                <a:latin typeface="Helvetica Neue"/>
+              </a:rPr>
+              <a:t>FRAMING QUESTION</a:t>
+            </a:r>
+          </a:p>
+        </p:txBody>
+      </p:sp>
+      <p:sp>
+        <p:nvSpPr>
+          <p:cNvPr id="9" name="TextBox 8"/>
+          <p:cNvSpPr txBox="1"/>
+          <p:nvPr/>
+        </p:nvSpPr>
+        <p:spPr>
+          <a:xfrm>
+            <a:off x="8001000" y="2240280"/>
+            <a:ext cx="2560320" cy="2194560"/>
+          </a:xfrm>
+          <a:prstGeom prst="rect">
+            <a:avLst/>
+          </a:prstGeom>
+          <a:noFill/>
+        </p:spPr>
+        <p:txBody>
+          <a:bodyPr wrap="none">
+            <a:spAutoFit/>
+          </a:bodyPr>
+          <a:lstStyle/>
+          <a:p>
+            <a:r>
+              <a:rPr sz="1600">
+                <a:solidFill>
+                  <a:srgbClr val="E6DFD6"/>
+                </a:solidFill>
+                <a:latin typeface="Helvetica Neue"/>
+              </a:rPr>
+              <a:t>How can an archive make extinction felt as both biological disappearance and cultural amnesia?</a:t>
+            </a:r>
+          </a:p>
+        </p:txBody>
+      </p:sp>
+      <p:sp>
+        <p:nvSpPr>
+          <p:cNvPr id="10" name="TextBox 9"/>
+          <p:cNvSpPr txBox="1"/>
+          <p:nvPr/>
+        </p:nvSpPr>
+        <p:spPr>
+          <a:xfrm>
+            <a:off x="548640" y="6263640"/>
+            <a:ext cx="10881360" cy="320040"/>
+          </a:xfrm>
+          <a:prstGeom prst="rect">
+            <a:avLst/>
+          </a:prstGeom>
+          <a:noFill/>
+        </p:spPr>
+        <p:txBody>
+          <a:bodyPr wrap="none">
+            <a:spAutoFit/>
+          </a:bodyPr>
+          <a:lstStyle/>
+          <a:p>
+            <a:pPr algn="l"/>
+            <a:r>
+              <a:rPr sz="900">
+                <a:solidFill>
+                  <a:srgbClr val="9A8F84"/>
+                </a:solidFill>
+                <a:latin typeface="Helvetica Neue"/>
+              </a:rPr>
+              <a:t>Extinction Archive · Biodigital chronobiology · BDC 2026  2 / 12</a:t>
             </a:r>
           </a:p>
         </p:txBody>
@@ -4153,69 +6146,141 @@
       <p:grpSpPr/>
       <p:sp>
         <p:nvSpPr>
-          <p:cNvPr id="2" name="Title 1"/>
-          <p:cNvSpPr>
-            <a:spLocks noGrp="1"/>
-          </p:cNvSpPr>
-          <p:nvPr>
-            <p:ph type="title"/>
-          </p:nvPr>
-        </p:nvSpPr>
-        <p:spPr/>
-        <p:txBody>
-          <a:bodyPr/>
-          <a:lstStyle/>
-          <a:p>
-            <a:r>
-              <a:t>Q&amp;A prompts we practice</a:t>
-            </a:r>
-          </a:p>
-        </p:txBody>
-      </p:sp>
-      <p:sp>
-        <p:nvSpPr>
-          <p:cNvPr id="3" name="Content Placeholder 2"/>
-          <p:cNvSpPr>
-            <a:spLocks noGrp="1"/>
-          </p:cNvSpPr>
-          <p:nvPr>
-            <p:ph idx="1"/>
-          </p:nvPr>
-        </p:nvSpPr>
-        <p:spPr/>
-        <p:txBody>
-          <a:bodyPr/>
-          <a:lstStyle/>
-          <a:p>
-            <a:pPr>
-              <a:defRPr sz="1600"/>
-            </a:pPr>
-            <a:r>
-              <a:t>Why these species and not easier icons?</a:t>
-            </a:r>
-          </a:p>
-          <a:p>
-            <a:pPr>
-              <a:defRPr sz="1600"/>
-            </a:pPr>
-            <a:r>
-              <a:t>Where is the living biology if there is no wet-lab organism on stage?</a:t>
-            </a:r>
-          </a:p>
-          <a:p>
-            <a:pPr>
-              <a:defRPr sz="1600"/>
-            </a:pPr>
-            <a:r>
-              <a:t>How do you prevent AI misinformation and overclaiming?</a:t>
-            </a:r>
-          </a:p>
-          <a:p>
-            <a:pPr>
-              <a:defRPr sz="1600"/>
-            </a:pPr>
-            <a:r>
-              <a:t>What would the next four months add: more dossiers, deeper methods, richer physical anchor, or consultant validation?</a:t>
+          <p:cNvPr id="2" name="TextBox 1"/>
+          <p:cNvSpPr txBox="1"/>
+          <p:nvPr/>
+        </p:nvSpPr>
+        <p:spPr>
+          <a:xfrm>
+            <a:off x="594360" y="594360"/>
+            <a:ext cx="11002975" cy="5669280"/>
+          </a:xfrm>
+          <a:prstGeom prst="rect">
+            <a:avLst/>
+          </a:prstGeom>
+          <a:noFill/>
+        </p:spPr>
+        <p:txBody>
+          <a:bodyPr wrap="square">
+            <a:spAutoFit/>
+          </a:bodyPr>
+          <a:lstStyle/>
+          <a:p>
+            <a:pPr>
+              <a:defRPr sz="3000" b="1"/>
+            </a:pPr>
+            <a:r>
+              <a:t>Scene IDs → citations</a:t>
+            </a:r>
+          </a:p>
+          <a:p>
+            <a:pPr>
+              <a:spcAft>
+                <a:spcPts val="300"/>
+              </a:spcAft>
+              <a:defRPr sz="1400"/>
+            </a:pPr>
+            <a:r>
+              <a:t>Mammoth path</a:t>
+            </a:r>
+          </a:p>
+          <a:p>
+            <a:pPr>
+              <a:spcAft>
+                <a:spcPts val="300"/>
+              </a:spcAft>
+              <a:defRPr sz="1400"/>
+            </a:pPr>
+            <a:r>
+              <a:t>Scene_Bio_01 — Lynch (circadian-related genes)</a:t>
+            </a:r>
+          </a:p>
+          <a:p>
+            <a:pPr>
+              <a:spcAft>
+                <a:spcPts val="300"/>
+              </a:spcAft>
+              <a:defRPr sz="1400"/>
+            </a:pPr>
+            <a:r>
+              <a:t>Scene_Environment_02 — Lu [Interpolated]</a:t>
+            </a:r>
+          </a:p>
+          <a:p>
+            <a:pPr>
+              <a:spcAft>
+                <a:spcPts val="300"/>
+              </a:spcAft>
+              <a:defRPr sz="1400"/>
+            </a:pPr>
+            <a:r>
+              <a:t>Scene_Landscape_01 — Zimov</a:t>
+            </a:r>
+          </a:p>
+          <a:p>
+            <a:pPr>
+              <a:spcAft>
+                <a:spcPts val="300"/>
+              </a:spcAft>
+              <a:defRPr sz="1400"/>
+            </a:pPr>
+            <a:r>
+              <a:t>Scene_Sensory_01 — TRPV3 / cold</a:t>
+            </a:r>
+          </a:p>
+          <a:p>
+            <a:pPr>
+              <a:spcAft>
+                <a:spcPts val="300"/>
+              </a:spcAft>
+              <a:defRPr sz="1400"/>
+            </a:pPr>
+            <a:r>
+              <a:t>Thylacine path</a:t>
+            </a:r>
+          </a:p>
+          <a:p>
+            <a:pPr>
+              <a:spcAft>
+                <a:spcPts val="300"/>
+              </a:spcAft>
+              <a:defRPr sz="1400"/>
+            </a:pPr>
+            <a:r>
+              <a:t>Scene_Bio_02 — Pozniak / orbit</a:t>
+            </a:r>
+          </a:p>
+          <a:p>
+            <a:pPr>
+              <a:spcAft>
+                <a:spcPts val="300"/>
+              </a:spcAft>
+              <a:defRPr sz="1400"/>
+            </a:pPr>
+            <a:r>
+              <a:t>Scene_POV_01 — Mass &amp; Supin [Interpolated]</a:t>
+            </a:r>
+          </a:p>
+          <a:p>
+            <a:pPr>
+              <a:spcAft>
+                <a:spcPts val="300"/>
+              </a:spcAft>
+              <a:defRPr sz="1400"/>
+            </a:pPr>
+            <a:r>
+              <a:t>Scene_Context_01 — Paddle + Sleightholme</a:t>
+            </a:r>
+          </a:p>
+          <a:p>
+            <a:pPr>
+              <a:spcAft>
+                <a:spcPts val="300"/>
+              </a:spcAft>
+              <a:defRPr sz="1400"/>
+            </a:pPr>
+            <a:r>
+              <a:t>UI_Indigenous_Context → UI_Ethics_Fork → UI_Reflection_Log</a:t>
             </a:r>
           </a:p>
         </p:txBody>
@@ -4240,47 +6305,863 @@
       <p:grpSpPr/>
       <p:sp>
         <p:nvSpPr>
-          <p:cNvPr id="2" name="Title 1"/>
-          <p:cNvSpPr>
-            <a:spLocks noGrp="1"/>
-          </p:cNvSpPr>
-          <p:nvPr>
-            <p:ph type="ctrTitle"/>
-          </p:nvPr>
-        </p:nvSpPr>
-        <p:spPr/>
-        <p:txBody>
-          <a:bodyPr/>
-          <a:lstStyle/>
-          <a:p>
-            <a:r>
-              <a:t>Thank you</a:t>
-            </a:r>
-          </a:p>
-        </p:txBody>
-      </p:sp>
-      <p:sp>
-        <p:nvSpPr>
-          <p:cNvPr id="3" name="Subtitle 2"/>
-          <p:cNvSpPr>
-            <a:spLocks noGrp="1"/>
-          </p:cNvSpPr>
-          <p:nvPr>
-            <p:ph type="subTitle" idx="1"/>
-          </p:nvPr>
-        </p:nvSpPr>
-        <p:spPr/>
-        <p:txBody>
-          <a:bodyPr/>
-          <a:lstStyle/>
-          <a:p>
-            <a:r>
-              <a:t>Archive of Extinction</a:t>
-            </a:r>
-          </a:p>
-          <a:p>
-            <a:r>
-              <a:t>Questions?</a:t>
+          <p:cNvPr id="2" name="TextBox 1"/>
+          <p:cNvSpPr txBox="1"/>
+          <p:nvPr/>
+        </p:nvSpPr>
+        <p:spPr>
+          <a:xfrm>
+            <a:off x="594360" y="594360"/>
+            <a:ext cx="11002975" cy="5669280"/>
+          </a:xfrm>
+          <a:prstGeom prst="rect">
+            <a:avLst/>
+          </a:prstGeom>
+          <a:noFill/>
+        </p:spPr>
+        <p:txBody>
+          <a:bodyPr wrap="square">
+            <a:spAutoFit/>
+          </a:bodyPr>
+          <a:lstStyle/>
+          <a:p>
+            <a:pPr>
+              <a:defRPr sz="3000" b="1"/>
+            </a:pPr>
+            <a:r>
+              <a:t>Design techniques &amp; stack</a:t>
+            </a:r>
+          </a:p>
+          <a:p>
+            <a:pPr>
+              <a:spcAft>
+                <a:spcPts val="300"/>
+              </a:spcAft>
+              <a:defRPr sz="1400"/>
+            </a:pPr>
+            <a:r>
+              <a:t>**WebXR:** A-Frame / Three.js; browser-based Summit demo.</a:t>
+            </a:r>
+          </a:p>
+          <a:p>
+            <a:pPr>
+              <a:spcAft>
+                <a:spcPts val="300"/>
+              </a:spcAft>
+              <a:defRPr sz="1400"/>
+            </a:pPr>
+            <a:r>
+              <a:t>**Generative AI:** 360° / environment art **bounded** by citation-backed parameters (no silent photoreal “truth”).</a:t>
+            </a:r>
+          </a:p>
+          <a:p>
+            <a:pPr>
+              <a:spcAft>
+                <a:spcPts val="300"/>
+              </a:spcAft>
+              <a:defRPr sz="1400"/>
+            </a:pPr>
+            <a:r>
+              <a:t>**Epistemic UI:** toggles for Cited / Interpolated / Speculative; on-screen (Author, year) tags.</a:t>
+            </a:r>
+          </a:p>
+          <a:p>
+            <a:pPr>
+              <a:spcAft>
+                <a:spcPts val="300"/>
+              </a:spcAft>
+              <a:defRPr sz="1400"/>
+            </a:pPr>
+            <a:r>
+              <a:t>**Sonification (optional):** tie audio to phase / season from literature.</a:t>
+            </a:r>
+          </a:p>
+          <a:p>
+            <a:pPr>
+              <a:spcAft>
+                <a:spcPts val="300"/>
+              </a:spcAft>
+              <a:defRPr sz="1400"/>
+            </a:pPr>
+            <a:r>
+              <a:t>**Reflection:** `templates/reflection-log-webxr.html` — keyword → ethics cards (Sherkow &amp; Greely themes).</a:t>
+            </a:r>
+          </a:p>
+        </p:txBody>
+      </p:sp>
+    </p:spTree>
+  </p:cSld>
+  <p:clrMapOvr>
+    <a:masterClrMapping/>
+  </p:clrMapOvr>
+</p:sld>
+</file>
+
+<file path=ppt/slides/slide22.xml><?xml version="1.0" encoding="utf-8"?>
+<p:sld xmlns:a="http://schemas.openxmlformats.org/drawingml/2006/main" xmlns:p="http://schemas.openxmlformats.org/presentationml/2006/main" xmlns:r="http://schemas.openxmlformats.org/officeDocument/2006/relationships">
+  <p:cSld>
+    <p:spTree>
+      <p:nvGrpSpPr>
+        <p:cNvPr id="1" name=""/>
+        <p:cNvGrpSpPr/>
+        <p:nvPr/>
+      </p:nvGrpSpPr>
+      <p:grpSpPr/>
+      <p:sp>
+        <p:nvSpPr>
+          <p:cNvPr id="2" name="TextBox 1"/>
+          <p:cNvSpPr txBox="1"/>
+          <p:nvPr/>
+        </p:nvSpPr>
+        <p:spPr>
+          <a:xfrm>
+            <a:off x="594360" y="594360"/>
+            <a:ext cx="11002975" cy="5669280"/>
+          </a:xfrm>
+          <a:prstGeom prst="rect">
+            <a:avLst/>
+          </a:prstGeom>
+          <a:noFill/>
+        </p:spPr>
+        <p:txBody>
+          <a:bodyPr wrap="square">
+            <a:spAutoFit/>
+          </a:bodyPr>
+          <a:lstStyle/>
+          <a:p>
+            <a:pPr>
+              <a:defRPr sz="3000" b="1"/>
+            </a:pPr>
+            <a:r>
+              <a:t>Ideation method (8 steps)</a:t>
+            </a:r>
+          </a:p>
+          <a:p>
+            <a:pPr>
+              <a:spcAft>
+                <a:spcPts val="300"/>
+              </a:spcAft>
+              <a:defRPr sz="1400"/>
+            </a:pPr>
+            <a:r>
+              <a:t>1 Map interests &amp; skills · 2 Intersection statements (“code × bio × problem”)</a:t>
+            </a:r>
+          </a:p>
+          <a:p>
+            <a:pPr>
+              <a:spcAft>
+                <a:spcPts val="300"/>
+              </a:spcAft>
+              <a:defRPr sz="1400"/>
+            </a:pPr>
+            <a:r>
+              <a:t>3 Stress-test vs BDC rubric (Narrative, Concept, Context, Reflection)</a:t>
+            </a:r>
+          </a:p>
+          <a:p>
+            <a:pPr>
+              <a:spcAft>
+                <a:spcPts val="300"/>
+              </a:spcAft>
+              <a:defRPr sz="1400"/>
+            </a:pPr>
+            <a:r>
+              <a:t>4 Biology sprint per species (30–45 min lit passes)</a:t>
+            </a:r>
+          </a:p>
+          <a:p>
+            <a:pPr>
+              <a:spcAft>
+                <a:spcPts val="300"/>
+              </a:spcAft>
+              <a:defRPr sz="1400"/>
+            </a:pPr>
+            <a:r>
+              <a:t>5 Bio / digital split + red-flag test</a:t>
+            </a:r>
+          </a:p>
+          <a:p>
+            <a:pPr>
+              <a:spcAft>
+                <a:spcPts val="300"/>
+              </a:spcAft>
+              <a:defRPr sz="1400"/>
+            </a:pPr>
+            <a:r>
+              <a:t>6 200-word narrative (Problem → Insight → Solution → Impact)</a:t>
+            </a:r>
+          </a:p>
+          <a:p>
+            <a:pPr>
+              <a:spcAft>
+                <a:spcPts val="300"/>
+              </a:spcAft>
+              <a:defRPr sz="1400"/>
+            </a:pPr>
+            <a:r>
+              <a:t>7 Prototype + deliverable owners · 8 Build sprint: Discovery → Prototype → Integration → Polish</a:t>
+            </a:r>
+          </a:p>
+          <a:p>
+            <a:pPr>
+              <a:spcAft>
+                <a:spcPts val="300"/>
+              </a:spcAft>
+              <a:defRPr sz="1400"/>
+            </a:pPr>
+            <a:r>
+              <a:t>Guided by `biodesign_cursor_agent.md` + course workbook.</a:t>
+            </a:r>
+          </a:p>
+        </p:txBody>
+      </p:sp>
+    </p:spTree>
+  </p:cSld>
+  <p:clrMapOvr>
+    <a:masterClrMapping/>
+  </p:clrMapOvr>
+</p:sld>
+</file>
+
+<file path=ppt/slides/slide23.xml><?xml version="1.0" encoding="utf-8"?>
+<p:sld xmlns:a="http://schemas.openxmlformats.org/drawingml/2006/main" xmlns:p="http://schemas.openxmlformats.org/presentationml/2006/main" xmlns:r="http://schemas.openxmlformats.org/officeDocument/2006/relationships">
+  <p:cSld>
+    <p:spTree>
+      <p:nvGrpSpPr>
+        <p:cNvPr id="1" name=""/>
+        <p:cNvGrpSpPr/>
+        <p:nvPr/>
+      </p:nvGrpSpPr>
+      <p:grpSpPr/>
+      <p:sp>
+        <p:nvSpPr>
+          <p:cNvPr id="2" name="TextBox 1"/>
+          <p:cNvSpPr txBox="1"/>
+          <p:nvPr/>
+        </p:nvSpPr>
+        <p:spPr>
+          <a:xfrm>
+            <a:off x="594360" y="594360"/>
+            <a:ext cx="11002975" cy="5669280"/>
+          </a:xfrm>
+          <a:prstGeom prst="rect">
+            <a:avLst/>
+          </a:prstGeom>
+          <a:noFill/>
+        </p:spPr>
+        <p:txBody>
+          <a:bodyPr wrap="square">
+            <a:spAutoFit/>
+          </a:bodyPr>
+          <a:lstStyle/>
+          <a:p>
+            <a:pPr>
+              <a:defRPr sz="3000" b="1"/>
+            </a:pPr>
+            <a:r>
+              <a:t>Four-week production spine</a:t>
+            </a:r>
+          </a:p>
+          <a:p>
+            <a:pPr>
+              <a:spcAft>
+                <a:spcPts val="300"/>
+              </a:spcAft>
+              <a:defRPr sz="1400"/>
+            </a:pPr>
+            <a:r>
+              <a:t>W1 Discovery — literature grid, storyboard ↔ DOI table, WebXR shell.</a:t>
+            </a:r>
+          </a:p>
+          <a:p>
+            <a:pPr>
+              <a:spcAft>
+                <a:spcPts val="300"/>
+              </a:spcAft>
+              <a:defRPr sz="1400"/>
+            </a:pPr>
+            <a:r>
+              <a:t>W2 Prototype — time scrubber, generative constraint doc, epistemic toggles.</a:t>
+            </a:r>
+          </a:p>
+          <a:p>
+            <a:pPr>
+              <a:spcAft>
+                <a:spcPts val="300"/>
+              </a:spcAft>
+              <a:defRPr sz="1400"/>
+            </a:pPr>
+            <a:r>
+              <a:t>W3 Integration — sonification, Indigenous + ethics UI, reflection panel.</a:t>
+            </a:r>
+          </a:p>
+          <a:p>
+            <a:pPr>
+              <a:spcAft>
+                <a:spcPts val="300"/>
+              </a:spcAft>
+              <a:defRPr sz="1400"/>
+            </a:pPr>
+            <a:r>
+              <a:t>W4 Polish — 10′ talk, 5′ Q&amp;A drill, 1–5′ video, deploy, judge cheat sheet.</a:t>
+            </a:r>
+          </a:p>
+        </p:txBody>
+      </p:sp>
+    </p:spTree>
+  </p:cSld>
+  <p:clrMapOvr>
+    <a:masterClrMapping/>
+  </p:clrMapOvr>
+</p:sld>
+</file>
+
+<file path=ppt/slides/slide24.xml><?xml version="1.0" encoding="utf-8"?>
+<p:sld xmlns:a="http://schemas.openxmlformats.org/drawingml/2006/main" xmlns:p="http://schemas.openxmlformats.org/presentationml/2006/main" xmlns:r="http://schemas.openxmlformats.org/officeDocument/2006/relationships">
+  <p:cSld>
+    <p:spTree>
+      <p:nvGrpSpPr>
+        <p:cNvPr id="1" name=""/>
+        <p:cNvGrpSpPr/>
+        <p:nvPr/>
+      </p:nvGrpSpPr>
+      <p:grpSpPr/>
+      <p:sp>
+        <p:nvSpPr>
+          <p:cNvPr id="2" name="TextBox 1"/>
+          <p:cNvSpPr txBox="1"/>
+          <p:nvPr/>
+        </p:nvSpPr>
+        <p:spPr>
+          <a:xfrm>
+            <a:off x="594360" y="594360"/>
+            <a:ext cx="11002975" cy="5669280"/>
+          </a:xfrm>
+          <a:prstGeom prst="rect">
+            <a:avLst/>
+          </a:prstGeom>
+          <a:noFill/>
+        </p:spPr>
+        <p:txBody>
+          <a:bodyPr wrap="square">
+            <a:spAutoFit/>
+          </a:bodyPr>
+          <a:lstStyle/>
+          <a:p>
+            <a:pPr>
+              <a:defRPr sz="3000" b="1"/>
+            </a:pPr>
+            <a:r>
+              <a:t>Context — colonial violence &amp; Country</a:t>
+            </a:r>
+          </a:p>
+          <a:p>
+            <a:pPr>
+              <a:spcAft>
+                <a:spcPts val="300"/>
+              </a:spcAft>
+              <a:defRPr sz="1400"/>
+            </a:pPr>
+            <a:r>
+              <a:t>Thylacine loss tied to colonial harm to Palawa peoples and lutruwita (Tasmania).</a:t>
+            </a:r>
+          </a:p>
+          <a:p>
+            <a:pPr>
+              <a:spcAft>
+                <a:spcPts val="300"/>
+              </a:spcAft>
+              <a:defRPr sz="1400"/>
+            </a:pPr>
+            <a:r>
+              <a:t>Sources: Clements (2025); Schlunke (2025) poetry / Palawa names; **Palawa-led** Rimmer (2020), Lehman (2013).</a:t>
+            </a:r>
+          </a:p>
+          <a:p>
+            <a:pPr>
+              <a:spcAft>
+                <a:spcPts val="300"/>
+              </a:spcAft>
+              <a:defRPr sz="1400"/>
+            </a:pPr>
+            <a:r>
+              <a:t>UI protocol: author positionality; no tourism copy as TEK.</a:t>
+            </a:r>
+          </a:p>
+        </p:txBody>
+      </p:sp>
+    </p:spTree>
+  </p:cSld>
+  <p:clrMapOvr>
+    <a:masterClrMapping/>
+  </p:clrMapOvr>
+</p:sld>
+</file>
+
+<file path=ppt/slides/slide25.xml><?xml version="1.0" encoding="utf-8"?>
+<p:sld xmlns:a="http://schemas.openxmlformats.org/drawingml/2006/main" xmlns:p="http://schemas.openxmlformats.org/presentationml/2006/main" xmlns:r="http://schemas.openxmlformats.org/officeDocument/2006/relationships">
+  <p:cSld>
+    <p:spTree>
+      <p:nvGrpSpPr>
+        <p:cNvPr id="1" name=""/>
+        <p:cNvGrpSpPr/>
+        <p:nvPr/>
+      </p:nvGrpSpPr>
+      <p:grpSpPr/>
+      <p:sp>
+        <p:nvSpPr>
+          <p:cNvPr id="2" name="TextBox 1"/>
+          <p:cNvSpPr txBox="1"/>
+          <p:nvPr/>
+        </p:nvSpPr>
+        <p:spPr>
+          <a:xfrm>
+            <a:off x="594360" y="594360"/>
+            <a:ext cx="11002975" cy="5669280"/>
+          </a:xfrm>
+          <a:prstGeom prst="rect">
+            <a:avLst/>
+          </a:prstGeom>
+          <a:noFill/>
+        </p:spPr>
+        <p:txBody>
+          <a:bodyPr wrap="square">
+            <a:spAutoFit/>
+          </a:bodyPr>
+          <a:lstStyle/>
+          <a:p>
+            <a:pPr>
+              <a:defRPr sz="3000" b="1"/>
+            </a:pPr>
+            <a:r>
+              <a:t>Ethics layer — Sherkow &amp; Greely (2013)</a:t>
+            </a:r>
+          </a:p>
+          <a:p>
+            <a:pPr>
+              <a:spcAft>
+                <a:spcPts val="300"/>
+              </a:spcAft>
+              <a:defRPr sz="1400"/>
+            </a:pPr>
+            <a:r>
+              <a:t>Sliders: lab de-extinction vs **in situ** conservation funding.</a:t>
+            </a:r>
+          </a:p>
+          <a:p>
+            <a:pPr>
+              <a:spcAft>
+                <a:spcPts val="300"/>
+              </a:spcAft>
+              <a:defRPr sz="1400"/>
+            </a:pPr>
+            <a:r>
+              <a:t>Legal novelty of revived lineages → liability / ecosystem risk.</a:t>
+            </a:r>
+          </a:p>
+          <a:p>
+            <a:pPr>
+              <a:spcAft>
+                <a:spcPts val="300"/>
+              </a:spcAft>
+              <a:defRPr sz="1400"/>
+            </a:pPr>
+            <a:r>
+              <a:t>Grounded in Science DOI 10.1126/science.1236946 — not generic sci-fi branches.</a:t>
+            </a:r>
+          </a:p>
+        </p:txBody>
+      </p:sp>
+    </p:spTree>
+  </p:cSld>
+  <p:clrMapOvr>
+    <a:masterClrMapping/>
+  </p:clrMapOvr>
+</p:sld>
+</file>
+
+<file path=ppt/slides/slide26.xml><?xml version="1.0" encoding="utf-8"?>
+<p:sld xmlns:a="http://schemas.openxmlformats.org/drawingml/2006/main" xmlns:p="http://schemas.openxmlformats.org/presentationml/2006/main" xmlns:r="http://schemas.openxmlformats.org/officeDocument/2006/relationships">
+  <p:cSld>
+    <p:spTree>
+      <p:nvGrpSpPr>
+        <p:cNvPr id="1" name=""/>
+        <p:cNvGrpSpPr/>
+        <p:nvPr/>
+      </p:nvGrpSpPr>
+      <p:grpSpPr/>
+      <p:sp>
+        <p:nvSpPr>
+          <p:cNvPr id="2" name="TextBox 1"/>
+          <p:cNvSpPr txBox="1"/>
+          <p:nvPr/>
+        </p:nvSpPr>
+        <p:spPr>
+          <a:xfrm>
+            <a:off x="594360" y="594360"/>
+            <a:ext cx="11002975" cy="5669280"/>
+          </a:xfrm>
+          <a:prstGeom prst="rect">
+            <a:avLst/>
+          </a:prstGeom>
+          <a:noFill/>
+        </p:spPr>
+        <p:txBody>
+          <a:bodyPr wrap="square">
+            <a:spAutoFit/>
+          </a:bodyPr>
+          <a:lstStyle/>
+          <a:p>
+            <a:pPr>
+              <a:defRPr sz="3000" b="1"/>
+            </a:pPr>
+            <a:r>
+              <a:t>Key literature — Mammoth (DOIs)</a:t>
+            </a:r>
+          </a:p>
+          <a:p>
+            <a:pPr>
+              <a:spcAft>
+                <a:spcPts val="300"/>
+              </a:spcAft>
+              <a:defRPr sz="1400"/>
+            </a:pPr>
+            <a:r>
+              <a:t>M1 Lynch et al., 2015 — 10.1016/j.celrep.2015.06.027</a:t>
+            </a:r>
+          </a:p>
+          <a:p>
+            <a:pPr>
+              <a:spcAft>
+                <a:spcPts val="300"/>
+              </a:spcAft>
+              <a:defRPr sz="1400"/>
+            </a:pPr>
+            <a:r>
+              <a:t>M2 Lu et al., 2010 — 10.1016/j.cub.2010.01.042</a:t>
+            </a:r>
+          </a:p>
+          <a:p>
+            <a:pPr>
+              <a:spcAft>
+                <a:spcPts val="300"/>
+              </a:spcAft>
+              <a:defRPr sz="1400"/>
+            </a:pPr>
+            <a:r>
+              <a:t>M3 Zimov et al., 2012 — 10.1016/j.quascirev.2012.08.004</a:t>
+            </a:r>
+          </a:p>
+          <a:p>
+            <a:pPr>
+              <a:spcAft>
+                <a:spcPts val="300"/>
+              </a:spcAft>
+              <a:defRPr sz="1400"/>
+            </a:pPr>
+            <a:r>
+              <a:t>M4 Kim bioRxiv — 10.1101/151746 (TRPV3 structure; phenotype cite Lynch 2015)</a:t>
+            </a:r>
+          </a:p>
+          <a:p>
+            <a:pPr>
+              <a:spcAft>
+                <a:spcPts val="300"/>
+              </a:spcAft>
+              <a:defRPr sz="1400"/>
+            </a:pPr>
+            <a:r>
+              <a:t>M5 Sherkow &amp; Greely — 10.1126/science.1236946</a:t>
+            </a:r>
+          </a:p>
+        </p:txBody>
+      </p:sp>
+    </p:spTree>
+  </p:cSld>
+  <p:clrMapOvr>
+    <a:masterClrMapping/>
+  </p:clrMapOvr>
+</p:sld>
+</file>
+
+<file path=ppt/slides/slide27.xml><?xml version="1.0" encoding="utf-8"?>
+<p:sld xmlns:a="http://schemas.openxmlformats.org/drawingml/2006/main" xmlns:p="http://schemas.openxmlformats.org/presentationml/2006/main" xmlns:r="http://schemas.openxmlformats.org/officeDocument/2006/relationships">
+  <p:cSld>
+    <p:spTree>
+      <p:nvGrpSpPr>
+        <p:cNvPr id="1" name=""/>
+        <p:cNvGrpSpPr/>
+        <p:nvPr/>
+      </p:nvGrpSpPr>
+      <p:grpSpPr/>
+      <p:sp>
+        <p:nvSpPr>
+          <p:cNvPr id="2" name="TextBox 1"/>
+          <p:cNvSpPr txBox="1"/>
+          <p:nvPr/>
+        </p:nvSpPr>
+        <p:spPr>
+          <a:xfrm>
+            <a:off x="594360" y="594360"/>
+            <a:ext cx="11002975" cy="5669280"/>
+          </a:xfrm>
+          <a:prstGeom prst="rect">
+            <a:avLst/>
+          </a:prstGeom>
+          <a:noFill/>
+        </p:spPr>
+        <p:txBody>
+          <a:bodyPr wrap="square">
+            <a:spAutoFit/>
+          </a:bodyPr>
+          <a:lstStyle/>
+          <a:p>
+            <a:pPr>
+              <a:defRPr sz="3000" b="1"/>
+            </a:pPr>
+            <a:r>
+              <a:t>Key literature — Thylacine &amp; sovereignty</a:t>
+            </a:r>
+          </a:p>
+          <a:p>
+            <a:pPr>
+              <a:spcAft>
+                <a:spcPts val="300"/>
+              </a:spcAft>
+              <a:defRPr sz="1400"/>
+            </a:pPr>
+            <a:r>
+              <a:t>T1 Pozniak 2018 — 10.1002/ar.23910</a:t>
+            </a:r>
+          </a:p>
+          <a:p>
+            <a:pPr>
+              <a:spcAft>
+                <a:spcPts val="300"/>
+              </a:spcAft>
+              <a:defRPr sz="1400"/>
+            </a:pPr>
+            <a:r>
+              <a:t>T2 Mass &amp; Supin 2020 — 10.31857/S0002332920060107</a:t>
+            </a:r>
+          </a:p>
+          <a:p>
+            <a:pPr>
+              <a:spcAft>
+                <a:spcPts val="300"/>
+              </a:spcAft>
+              <a:defRPr sz="1400"/>
+            </a:pPr>
+            <a:r>
+              <a:t>T3 Paddle 2000 — ISBN 9780521782196</a:t>
+            </a:r>
+          </a:p>
+          <a:p>
+            <a:pPr>
+              <a:spcAft>
+                <a:spcPts val="300"/>
+              </a:spcAft>
+              <a:defRPr sz="1400"/>
+            </a:pPr>
+            <a:r>
+              <a:t>T4 Sleightholme &amp; Campbell 2016 — 10.1080/00222933.2016.1217037</a:t>
+            </a:r>
+          </a:p>
+          <a:p>
+            <a:pPr>
+              <a:spcAft>
+                <a:spcPts val="300"/>
+              </a:spcAft>
+              <a:defRPr sz="1400"/>
+            </a:pPr>
+            <a:r>
+              <a:t>T5 Clements 2025 — 10.1177/13534858251272203</a:t>
+            </a:r>
+          </a:p>
+          <a:p>
+            <a:pPr>
+              <a:spcAft>
+                <a:spcPts val="300"/>
+              </a:spcAft>
+              <a:defRPr sz="1400"/>
+            </a:pPr>
+            <a:r>
+              <a:t>Schlunke 2025 — 10.1017/ext.2025.10008 · Rimmer 2020 Artlink · Lehman 2013 Griffith Review</a:t>
+            </a:r>
+          </a:p>
+        </p:txBody>
+      </p:sp>
+    </p:spTree>
+  </p:cSld>
+  <p:clrMapOvr>
+    <a:masterClrMapping/>
+  </p:clrMapOvr>
+</p:sld>
+</file>
+
+<file path=ppt/slides/slide28.xml><?xml version="1.0" encoding="utf-8"?>
+<p:sld xmlns:a="http://schemas.openxmlformats.org/drawingml/2006/main" xmlns:p="http://schemas.openxmlformats.org/presentationml/2006/main" xmlns:r="http://schemas.openxmlformats.org/officeDocument/2006/relationships">
+  <p:cSld>
+    <p:spTree>
+      <p:nvGrpSpPr>
+        <p:cNvPr id="1" name=""/>
+        <p:cNvGrpSpPr/>
+        <p:nvPr/>
+      </p:nvGrpSpPr>
+      <p:grpSpPr/>
+      <p:sp>
+        <p:nvSpPr>
+          <p:cNvPr id="2" name="TextBox 1"/>
+          <p:cNvSpPr txBox="1"/>
+          <p:nvPr/>
+        </p:nvSpPr>
+        <p:spPr>
+          <a:xfrm>
+            <a:off x="594360" y="594360"/>
+            <a:ext cx="11002975" cy="5669280"/>
+          </a:xfrm>
+          <a:prstGeom prst="rect">
+            <a:avLst/>
+          </a:prstGeom>
+          <a:noFill/>
+        </p:spPr>
+        <p:txBody>
+          <a:bodyPr wrap="square">
+            <a:spAutoFit/>
+          </a:bodyPr>
+          <a:lstStyle/>
+          <a:p>
+            <a:pPr>
+              <a:defRPr sz="3000" b="1"/>
+            </a:pPr>
+            <a:r>
+              <a:t>Rubric self-check</a:t>
+            </a:r>
+          </a:p>
+          <a:p>
+            <a:pPr>
+              <a:spcAft>
+                <a:spcPts val="300"/>
+              </a:spcAft>
+              <a:defRPr sz="1400"/>
+            </a:pPr>
+            <a:r>
+              <a:t>Narrative: rhythm → loss → fork.</a:t>
+            </a:r>
+          </a:p>
+          <a:p>
+            <a:pPr>
+              <a:spcAft>
+                <a:spcPts val="300"/>
+              </a:spcAft>
+              <a:defRPr sz="1400"/>
+            </a:pPr>
+            <a:r>
+              <a:t>Concept: **time** as spine; one proxy per scene.</a:t>
+            </a:r>
+          </a:p>
+          <a:p>
+            <a:pPr>
+              <a:spcAft>
+                <a:spcPts val="300"/>
+              </a:spcAft>
+              <a:defRPr sz="1400"/>
+            </a:pPr>
+            <a:r>
+              <a:t>Context: trade-offs + sovereignty sources.</a:t>
+            </a:r>
+          </a:p>
+          <a:p>
+            <a:pPr>
+              <a:spcAft>
+                <a:spcPts val="300"/>
+              </a:spcAft>
+              <a:defRPr sz="1400"/>
+            </a:pPr>
+            <a:r>
+              <a:t>Reflection: epistemic UI + user reflection + AI limits.</a:t>
+            </a:r>
+          </a:p>
+        </p:txBody>
+      </p:sp>
+    </p:spTree>
+  </p:cSld>
+  <p:clrMapOvr>
+    <a:masterClrMapping/>
+  </p:clrMapOvr>
+</p:sld>
+</file>
+
+<file path=ppt/slides/slide29.xml><?xml version="1.0" encoding="utf-8"?>
+<p:sld xmlns:a="http://schemas.openxmlformats.org/drawingml/2006/main" xmlns:p="http://schemas.openxmlformats.org/presentationml/2006/main" xmlns:r="http://schemas.openxmlformats.org/officeDocument/2006/relationships">
+  <p:cSld>
+    <p:spTree>
+      <p:nvGrpSpPr>
+        <p:cNvPr id="1" name=""/>
+        <p:cNvGrpSpPr/>
+        <p:nvPr/>
+      </p:nvGrpSpPr>
+      <p:grpSpPr/>
+      <p:sp>
+        <p:nvSpPr>
+          <p:cNvPr id="2" name="TextBox 1"/>
+          <p:cNvSpPr txBox="1"/>
+          <p:nvPr/>
+        </p:nvSpPr>
+        <p:spPr>
+          <a:xfrm>
+            <a:off x="594360" y="594360"/>
+            <a:ext cx="11002975" cy="5669280"/>
+          </a:xfrm>
+          <a:prstGeom prst="rect">
+            <a:avLst/>
+          </a:prstGeom>
+          <a:noFill/>
+        </p:spPr>
+        <p:txBody>
+          <a:bodyPr wrap="square">
+            <a:spAutoFit/>
+          </a:bodyPr>
+          <a:lstStyle/>
+          <a:p>
+            <a:pPr>
+              <a:defRPr sz="3000" b="1"/>
+            </a:pPr>
+            <a:r>
+              <a:t>Repository pointers</a:t>
+            </a:r>
+          </a:p>
+          <a:p>
+            <a:pPr>
+              <a:spcAft>
+                <a:spcPts val="300"/>
+              </a:spcAft>
+              <a:defRPr sz="1400"/>
+            </a:pPr>
+            <a:r>
+              <a:t>Canonical plan: BDC_2026_Extinction_Archive_Planning_Document.md</a:t>
+            </a:r>
+          </a:p>
+          <a:p>
+            <a:pPr>
+              <a:spcAft>
+                <a:spcPts val="300"/>
+              </a:spcAft>
+              <a:defRPr sz="1400"/>
+            </a:pPr>
+            <a:r>
+              <a:t>Executive: PROJECT_PLAN.md · Reflection template: templates/reflection-log-webxr.html</a:t>
+            </a:r>
+          </a:p>
+          <a:p>
+            <a:pPr>
+              <a:spcAft>
+                <a:spcPts val="300"/>
+              </a:spcAft>
+              <a:defRPr sz="1400"/>
+            </a:pPr>
+            <a:r>
+              <a:t>GitHub preview this talk: slides/SUMMIT_DECK_GITHUB_PREVIEW.md (this file is auto-generated).</a:t>
             </a:r>
           </a:p>
         </p:txBody>
@@ -4296,6 +7177,14 @@
 <file path=ppt/slides/slide3.xml><?xml version="1.0" encoding="utf-8"?>
 <p:sld xmlns:a="http://schemas.openxmlformats.org/drawingml/2006/main" xmlns:p="http://schemas.openxmlformats.org/presentationml/2006/main" xmlns:r="http://schemas.openxmlformats.org/officeDocument/2006/relationships">
   <p:cSld>
+    <p:bg>
+      <p:bgPr>
+        <a:solidFill>
+          <a:srgbClr val="141210"/>
+        </a:solidFill>
+        <a:effectLst/>
+      </p:bgPr>
+    </p:bg>
     <p:spTree>
       <p:nvGrpSpPr>
         <p:cNvPr id="1" name=""/>
@@ -4305,65 +7194,831 @@
       <p:grpSpPr/>
       <p:sp>
         <p:nvSpPr>
-          <p:cNvPr id="2" name="Title 1"/>
-          <p:cNvSpPr>
-            <a:spLocks noGrp="1"/>
-          </p:cNvSpPr>
-          <p:nvPr>
-            <p:ph type="title"/>
-          </p:nvPr>
-        </p:nvSpPr>
-        <p:spPr/>
-        <p:txBody>
-          <a:bodyPr/>
-          <a:lstStyle/>
-          <a:p>
-            <a:r>
-              <a:t>Why this project now</a:t>
-            </a:r>
-          </a:p>
-        </p:txBody>
-      </p:sp>
-      <p:sp>
-        <p:nvSpPr>
-          <p:cNvPr id="3" name="Content Placeholder 2"/>
-          <p:cNvSpPr>
-            <a:spLocks noGrp="1"/>
-          </p:cNvSpPr>
-          <p:nvPr>
-            <p:ph idx="1"/>
-          </p:nvPr>
-        </p:nvSpPr>
-        <p:spPr/>
-        <p:txBody>
-          <a:bodyPr/>
-          <a:lstStyle/>
-          <a:p>
-            <a:pPr>
-              <a:defRPr sz="1600"/>
-            </a:pPr>
-            <a:r>
-              <a:t>Extinction removes more than bodies: it erases routes, light-dark entrainment, social synchrony, and sensory fit to landscape.</a:t>
-            </a:r>
-          </a:p>
-          <a:p>
-            <a:pPr>
-              <a:defRPr sz="1600"/>
-            </a:pPr>
-            <a:r>
-              <a:t>Public memory normalizes ecological absence into icons; science stays in papers while loss becomes abstract.</a:t>
-            </a:r>
-          </a:p>
-          <a:p>
-            <a:pPr>
-              <a:defRPr sz="1600"/>
-            </a:pPr>
-            <a:r>
-              <a:t>Design question: how do we make rigorous biology feelable without pretending we fully know another species' Umwelt?</a:t>
-            </a:r>
-          </a:p>
-        </p:txBody>
-      </p:sp>
+          <p:cNvPr id="2" name="Rectangle 1"/>
+          <p:cNvSpPr/>
+          <p:nvPr/>
+        </p:nvSpPr>
+        <p:spPr>
+          <a:xfrm>
+            <a:off x="0" y="0"/>
+            <a:ext cx="12191695" cy="164592"/>
+          </a:xfrm>
+          <a:prstGeom prst="rect">
+            <a:avLst/>
+          </a:prstGeom>
+          <a:solidFill>
+            <a:srgbClr val="C45C2A"/>
+          </a:solidFill>
+          <a:ln>
+            <a:noFill/>
+          </a:ln>
+        </p:spPr>
+        <p:style>
+          <a:lnRef idx="1">
+            <a:schemeClr val="accent1"/>
+          </a:lnRef>
+          <a:fillRef idx="3">
+            <a:schemeClr val="accent1"/>
+          </a:fillRef>
+          <a:effectRef idx="2">
+            <a:schemeClr val="accent1"/>
+          </a:effectRef>
+          <a:fontRef idx="minor">
+            <a:schemeClr val="lt1"/>
+          </a:fontRef>
+        </p:style>
+        <p:txBody>
+          <a:bodyPr rtlCol="0" anchor="ctr"/>
+          <a:lstStyle/>
+          <a:p>
+            <a:pPr algn="ctr"/>
+          </a:p>
+        </p:txBody>
+      </p:sp>
+      <p:sp>
+        <p:nvSpPr>
+          <p:cNvPr id="3" name="Rectangle 2"/>
+          <p:cNvSpPr/>
+          <p:nvPr/>
+        </p:nvSpPr>
+        <p:spPr>
+          <a:xfrm>
+            <a:off x="9052560" y="164592"/>
+            <a:ext cx="3136392" cy="6693408"/>
+          </a:xfrm>
+          <a:prstGeom prst="rect">
+            <a:avLst/>
+          </a:prstGeom>
+          <a:solidFill>
+            <a:srgbClr val="1E1A17"/>
+          </a:solidFill>
+          <a:ln>
+            <a:noFill/>
+          </a:ln>
+        </p:spPr>
+        <p:style>
+          <a:lnRef idx="1">
+            <a:schemeClr val="accent1"/>
+          </a:lnRef>
+          <a:fillRef idx="3">
+            <a:schemeClr val="accent1"/>
+          </a:fillRef>
+          <a:effectRef idx="2">
+            <a:schemeClr val="accent1"/>
+          </a:effectRef>
+          <a:fontRef idx="minor">
+            <a:schemeClr val="lt1"/>
+          </a:fontRef>
+        </p:style>
+        <p:txBody>
+          <a:bodyPr rtlCol="0" anchor="ctr"/>
+          <a:lstStyle/>
+          <a:p>
+            <a:pPr algn="ctr"/>
+          </a:p>
+        </p:txBody>
+      </p:sp>
+      <p:sp>
+        <p:nvSpPr>
+          <p:cNvPr id="4" name="TextBox 3"/>
+          <p:cNvSpPr txBox="1"/>
+          <p:nvPr/>
+        </p:nvSpPr>
+        <p:spPr>
+          <a:xfrm>
+            <a:off x="640080" y="411480"/>
+            <a:ext cx="4389120" cy="292608"/>
+          </a:xfrm>
+          <a:prstGeom prst="rect">
+            <a:avLst/>
+          </a:prstGeom>
+          <a:noFill/>
+        </p:spPr>
+        <p:txBody>
+          <a:bodyPr wrap="none">
+            <a:spAutoFit/>
+          </a:bodyPr>
+          <a:lstStyle/>
+          <a:p>
+            <a:r>
+              <a:rPr sz="1300" b="1">
+                <a:solidFill>
+                  <a:srgbClr val="C45C2A"/>
+                </a:solidFill>
+                <a:latin typeface="Helvetica Neue"/>
+              </a:rPr>
+              <a:t>DESIGN PROPOSITION</a:t>
+            </a:r>
+          </a:p>
+        </p:txBody>
+      </p:sp>
+      <p:sp>
+        <p:nvSpPr>
+          <p:cNvPr id="5" name="TextBox 4"/>
+          <p:cNvSpPr txBox="1"/>
+          <p:nvPr/>
+        </p:nvSpPr>
+        <p:spPr>
+          <a:xfrm>
+            <a:off x="640080" y="777240"/>
+            <a:ext cx="7040880" cy="914400"/>
+          </a:xfrm>
+          <a:prstGeom prst="rect">
+            <a:avLst/>
+          </a:prstGeom>
+          <a:noFill/>
+        </p:spPr>
+        <p:txBody>
+          <a:bodyPr wrap="square">
+            <a:spAutoFit/>
+          </a:bodyPr>
+          <a:lstStyle/>
+          <a:p>
+            <a:r>
+              <a:rPr sz="2800" b="1">
+                <a:solidFill>
+                  <a:srgbClr val="E6DFD6"/>
+                </a:solidFill>
+                <a:latin typeface="Helvetica Neue"/>
+              </a:rPr>
+              <a:t>Umwelt as memory technology</a:t>
+            </a:r>
+          </a:p>
+        </p:txBody>
+      </p:sp>
+      <p:sp>
+        <p:nvSpPr>
+          <p:cNvPr id="6" name="TextBox 5"/>
+          <p:cNvSpPr txBox="1"/>
+          <p:nvPr/>
+        </p:nvSpPr>
+        <p:spPr>
+          <a:xfrm>
+            <a:off x="731520" y="1828800"/>
+            <a:ext cx="6400800" cy="3474720"/>
+          </a:xfrm>
+          <a:prstGeom prst="rect">
+            <a:avLst/>
+          </a:prstGeom>
+          <a:noFill/>
+        </p:spPr>
+        <p:txBody>
+          <a:bodyPr wrap="square" lIns="0" rIns="0" tIns="0">
+            <a:spAutoFit/>
+          </a:bodyPr>
+          <a:lstStyle/>
+          <a:p>
+            <a:pPr>
+              <a:spcAft>
+                <a:spcPts val="1000"/>
+              </a:spcAft>
+              <a:defRPr sz="2000">
+                <a:solidFill>
+                  <a:srgbClr val="E6DFD6"/>
+                </a:solidFill>
+                <a:latin typeface="Helvetica Neue"/>
+              </a:defRPr>
+            </a:pPr>
+            <a:r>
+              <a:t>Primary frame: bounded sensory-temporal hypothesis space.</a:t>
+            </a:r>
+          </a:p>
+          <a:p>
+            <a:pPr>
+              <a:spcAft>
+                <a:spcPts val="1000"/>
+              </a:spcAft>
+              <a:defRPr sz="2000">
+                <a:solidFill>
+                  <a:srgbClr val="E6DFD6"/>
+                </a:solidFill>
+                <a:latin typeface="Helvetica Neue"/>
+              </a:defRPr>
+            </a:pPr>
+            <a:r>
+              <a:t>Secondary frame: collective memory fracture and ethical remembrance.</a:t>
+            </a:r>
+          </a:p>
+          <a:p>
+            <a:pPr>
+              <a:spcAft>
+                <a:spcPts val="1000"/>
+              </a:spcAft>
+              <a:defRPr sz="2000">
+                <a:solidFill>
+                  <a:srgbClr val="E6DFD6"/>
+                </a:solidFill>
+                <a:latin typeface="Helvetica Neue"/>
+              </a:defRPr>
+            </a:pPr>
+            <a:r>
+              <a:t>Visitors move through Memory Sites, Species Dossier, Polyphony Mixer, and Ethics Console.</a:t>
+            </a:r>
+          </a:p>
+          <a:p>
+            <a:pPr>
+              <a:spcAft>
+                <a:spcPts val="1000"/>
+              </a:spcAft>
+              <a:defRPr sz="2000">
+                <a:solidFill>
+                  <a:srgbClr val="E6DFD6"/>
+                </a:solidFill>
+                <a:latin typeface="Helvetica Neue"/>
+              </a:defRPr>
+            </a:pPr>
+            <a:r>
+              <a:t>The archive is not resurrection; uncertainty remains visible at every stage.</a:t>
+            </a:r>
+          </a:p>
+        </p:txBody>
+      </p:sp>
+      <p:sp>
+        <p:nvSpPr>
+          <p:cNvPr id="7" name="Rounded Rectangle 6"/>
+          <p:cNvSpPr/>
+          <p:nvPr/>
+        </p:nvSpPr>
+        <p:spPr>
+          <a:xfrm>
+            <a:off x="7726679" y="1554480"/>
+            <a:ext cx="3200400" cy="3291840"/>
+          </a:xfrm>
+          <a:prstGeom prst="roundRect">
+            <a:avLst/>
+          </a:prstGeom>
+          <a:solidFill>
+            <a:srgbClr val="1E1A17"/>
+          </a:solidFill>
+          <a:ln>
+            <a:solidFill>
+              <a:srgbClr val="6B7A8F"/>
+            </a:solidFill>
+          </a:ln>
+        </p:spPr>
+        <p:style>
+          <a:lnRef idx="1">
+            <a:schemeClr val="accent1"/>
+          </a:lnRef>
+          <a:fillRef idx="3">
+            <a:schemeClr val="accent1"/>
+          </a:fillRef>
+          <a:effectRef idx="2">
+            <a:schemeClr val="accent1"/>
+          </a:effectRef>
+          <a:fontRef idx="minor">
+            <a:schemeClr val="lt1"/>
+          </a:fontRef>
+        </p:style>
+        <p:txBody>
+          <a:bodyPr rtlCol="0" anchor="ctr"/>
+          <a:lstStyle/>
+          <a:p>
+            <a:pPr algn="ctr"/>
+          </a:p>
+        </p:txBody>
+      </p:sp>
+      <p:sp>
+        <p:nvSpPr>
+          <p:cNvPr id="8" name="TextBox 7"/>
+          <p:cNvSpPr txBox="1"/>
+          <p:nvPr/>
+        </p:nvSpPr>
+        <p:spPr>
+          <a:xfrm>
+            <a:off x="8001000" y="1828800"/>
+            <a:ext cx="2560320" cy="365760"/>
+          </a:xfrm>
+          <a:prstGeom prst="rect">
+            <a:avLst/>
+          </a:prstGeom>
+          <a:noFill/>
+        </p:spPr>
+        <p:txBody>
+          <a:bodyPr wrap="none">
+            <a:spAutoFit/>
+          </a:bodyPr>
+          <a:lstStyle/>
+          <a:p>
+            <a:r>
+              <a:rPr sz="1200" b="1">
+                <a:solidFill>
+                  <a:srgbClr val="5CB89A"/>
+                </a:solidFill>
+                <a:latin typeface="Helvetica Neue"/>
+              </a:rPr>
+              <a:t>TONE</a:t>
+            </a:r>
+          </a:p>
+        </p:txBody>
+      </p:sp>
+      <p:sp>
+        <p:nvSpPr>
+          <p:cNvPr id="9" name="TextBox 8"/>
+          <p:cNvSpPr txBox="1"/>
+          <p:nvPr/>
+        </p:nvSpPr>
+        <p:spPr>
+          <a:xfrm>
+            <a:off x="8001000" y="2240280"/>
+            <a:ext cx="2560320" cy="2194560"/>
+          </a:xfrm>
+          <a:prstGeom prst="rect">
+            <a:avLst/>
+          </a:prstGeom>
+          <a:noFill/>
+        </p:spPr>
+        <p:txBody>
+          <a:bodyPr wrap="none">
+            <a:spAutoFit/>
+          </a:bodyPr>
+          <a:lstStyle/>
+          <a:p>
+            <a:r>
+              <a:rPr sz="1600">
+                <a:solidFill>
+                  <a:srgbClr val="E6DFD6"/>
+                </a:solidFill>
+                <a:latin typeface="Helvetica Neue"/>
+              </a:rPr>
+              <a:t>Museum sobriety overall. Awe appears briefly, mainly inside the mixer.</a:t>
+            </a:r>
+          </a:p>
+        </p:txBody>
+      </p:sp>
+      <p:sp>
+        <p:nvSpPr>
+          <p:cNvPr id="10" name="TextBox 9"/>
+          <p:cNvSpPr txBox="1"/>
+          <p:nvPr/>
+        </p:nvSpPr>
+        <p:spPr>
+          <a:xfrm>
+            <a:off x="548640" y="6263640"/>
+            <a:ext cx="10881360" cy="320040"/>
+          </a:xfrm>
+          <a:prstGeom prst="rect">
+            <a:avLst/>
+          </a:prstGeom>
+          <a:noFill/>
+        </p:spPr>
+        <p:txBody>
+          <a:bodyPr wrap="none">
+            <a:spAutoFit/>
+          </a:bodyPr>
+          <a:lstStyle/>
+          <a:p>
+            <a:pPr algn="l"/>
+            <a:r>
+              <a:rPr sz="900">
+                <a:solidFill>
+                  <a:srgbClr val="9A8F84"/>
+                </a:solidFill>
+                <a:latin typeface="Helvetica Neue"/>
+              </a:rPr>
+              <a:t>Extinction Archive · Biodigital chronobiology · BDC 2026  3 / 12</a:t>
+            </a:r>
+          </a:p>
+        </p:txBody>
+      </p:sp>
+    </p:spTree>
+  </p:cSld>
+  <p:clrMapOvr>
+    <a:masterClrMapping/>
+  </p:clrMapOvr>
+</p:sld>
+</file>
+
+<file path=ppt/slides/slide30.xml><?xml version="1.0" encoding="utf-8"?>
+<p:sld xmlns:a="http://schemas.openxmlformats.org/drawingml/2006/main" xmlns:p="http://schemas.openxmlformats.org/presentationml/2006/main" xmlns:r="http://schemas.openxmlformats.org/officeDocument/2006/relationships">
+  <p:cSld>
+    <p:spTree>
+      <p:nvGrpSpPr>
+        <p:cNvPr id="1" name=""/>
+        <p:cNvGrpSpPr/>
+        <p:nvPr/>
+      </p:nvGrpSpPr>
+      <p:grpSpPr/>
+      <p:sp>
+        <p:nvSpPr>
+          <p:cNvPr id="2" name="TextBox 1"/>
+          <p:cNvSpPr txBox="1"/>
+          <p:nvPr/>
+        </p:nvSpPr>
+        <p:spPr>
+          <a:xfrm>
+            <a:off x="594360" y="594360"/>
+            <a:ext cx="11002975" cy="5669280"/>
+          </a:xfrm>
+          <a:prstGeom prst="rect">
+            <a:avLst/>
+          </a:prstGeom>
+          <a:noFill/>
+        </p:spPr>
+        <p:txBody>
+          <a:bodyPr wrap="square">
+            <a:spAutoFit/>
+          </a:bodyPr>
+          <a:lstStyle/>
+          <a:p>
+            <a:pPr>
+              <a:defRPr sz="3000" b="1"/>
+            </a:pPr>
+            <a:r>
+              <a:t>Part III — Visual deck (BDC_Deck_EN)</a:t>
+            </a:r>
+          </a:p>
+          <a:p>
+            <a:pPr>
+              <a:spcAft>
+                <a:spcPts val="300"/>
+              </a:spcAft>
+              <a:defRPr sz="1400"/>
+            </a:pPr>
+            <a:r>
+              <a:t>Full-bleed slide graphics from BDC_Deck_EN.pptx (image export pipeline).</a:t>
+            </a:r>
+          </a:p>
+        </p:txBody>
+      </p:sp>
+    </p:spTree>
+  </p:cSld>
+  <p:clrMapOvr>
+    <a:masterClrMapping/>
+  </p:clrMapOvr>
+</p:sld>
+</file>
+
+<file path=ppt/slides/slide31.xml><?xml version="1.0" encoding="utf-8"?>
+<p:sld xmlns:a="http://schemas.openxmlformats.org/drawingml/2006/main" xmlns:p="http://schemas.openxmlformats.org/presentationml/2006/main" xmlns:r="http://schemas.openxmlformats.org/officeDocument/2006/relationships">
+  <p:cSld>
+    <p:spTree>
+      <p:nvGrpSpPr>
+        <p:cNvPr id="1" name=""/>
+        <p:cNvGrpSpPr/>
+        <p:nvPr/>
+      </p:nvGrpSpPr>
+      <p:grpSpPr/>
+      <p:pic>
+        <p:nvPicPr>
+          <p:cNvPr id="2" name="Picture 1" descr="Slide-1-image-1.png"/>
+          <p:cNvPicPr>
+            <a:picLocks noChangeAspect="1"/>
+          </p:cNvPicPr>
+          <p:nvPr/>
+        </p:nvPicPr>
+        <p:blipFill>
+          <a:blip r:embed="rId2"/>
+          <a:stretch>
+            <a:fillRect/>
+          </a:stretch>
+        </p:blipFill>
+        <p:spPr>
+          <a:xfrm>
+            <a:off x="0" y="0"/>
+            <a:ext cx="12191695" cy="6858000"/>
+          </a:xfrm>
+          <a:prstGeom prst="rect">
+            <a:avLst/>
+          </a:prstGeom>
+        </p:spPr>
+      </p:pic>
+    </p:spTree>
+  </p:cSld>
+  <p:clrMapOvr>
+    <a:masterClrMapping/>
+  </p:clrMapOvr>
+</p:sld>
+</file>
+
+<file path=ppt/slides/slide32.xml><?xml version="1.0" encoding="utf-8"?>
+<p:sld xmlns:a="http://schemas.openxmlformats.org/drawingml/2006/main" xmlns:p="http://schemas.openxmlformats.org/presentationml/2006/main" xmlns:r="http://schemas.openxmlformats.org/officeDocument/2006/relationships">
+  <p:cSld>
+    <p:spTree>
+      <p:nvGrpSpPr>
+        <p:cNvPr id="1" name=""/>
+        <p:cNvGrpSpPr/>
+        <p:nvPr/>
+      </p:nvGrpSpPr>
+      <p:grpSpPr/>
+      <p:pic>
+        <p:nvPicPr>
+          <p:cNvPr id="2" name="Picture 1" descr="Slide-2-image-1.png"/>
+          <p:cNvPicPr>
+            <a:picLocks noChangeAspect="1"/>
+          </p:cNvPicPr>
+          <p:nvPr/>
+        </p:nvPicPr>
+        <p:blipFill>
+          <a:blip r:embed="rId2"/>
+          <a:stretch>
+            <a:fillRect/>
+          </a:stretch>
+        </p:blipFill>
+        <p:spPr>
+          <a:xfrm>
+            <a:off x="0" y="0"/>
+            <a:ext cx="12191695" cy="6858000"/>
+          </a:xfrm>
+          <a:prstGeom prst="rect">
+            <a:avLst/>
+          </a:prstGeom>
+        </p:spPr>
+      </p:pic>
+    </p:spTree>
+  </p:cSld>
+  <p:clrMapOvr>
+    <a:masterClrMapping/>
+  </p:clrMapOvr>
+</p:sld>
+</file>
+
+<file path=ppt/slides/slide33.xml><?xml version="1.0" encoding="utf-8"?>
+<p:sld xmlns:a="http://schemas.openxmlformats.org/drawingml/2006/main" xmlns:p="http://schemas.openxmlformats.org/presentationml/2006/main" xmlns:r="http://schemas.openxmlformats.org/officeDocument/2006/relationships">
+  <p:cSld>
+    <p:spTree>
+      <p:nvGrpSpPr>
+        <p:cNvPr id="1" name=""/>
+        <p:cNvGrpSpPr/>
+        <p:nvPr/>
+      </p:nvGrpSpPr>
+      <p:grpSpPr/>
+      <p:pic>
+        <p:nvPicPr>
+          <p:cNvPr id="2" name="Picture 1" descr="Slide-3-image-1.png"/>
+          <p:cNvPicPr>
+            <a:picLocks noChangeAspect="1"/>
+          </p:cNvPicPr>
+          <p:nvPr/>
+        </p:nvPicPr>
+        <p:blipFill>
+          <a:blip r:embed="rId2"/>
+          <a:stretch>
+            <a:fillRect/>
+          </a:stretch>
+        </p:blipFill>
+        <p:spPr>
+          <a:xfrm>
+            <a:off x="0" y="0"/>
+            <a:ext cx="12191695" cy="6858000"/>
+          </a:xfrm>
+          <a:prstGeom prst="rect">
+            <a:avLst/>
+          </a:prstGeom>
+        </p:spPr>
+      </p:pic>
+    </p:spTree>
+  </p:cSld>
+  <p:clrMapOvr>
+    <a:masterClrMapping/>
+  </p:clrMapOvr>
+</p:sld>
+</file>
+
+<file path=ppt/slides/slide34.xml><?xml version="1.0" encoding="utf-8"?>
+<p:sld xmlns:a="http://schemas.openxmlformats.org/drawingml/2006/main" xmlns:p="http://schemas.openxmlformats.org/presentationml/2006/main" xmlns:r="http://schemas.openxmlformats.org/officeDocument/2006/relationships">
+  <p:cSld>
+    <p:spTree>
+      <p:nvGrpSpPr>
+        <p:cNvPr id="1" name=""/>
+        <p:cNvGrpSpPr/>
+        <p:nvPr/>
+      </p:nvGrpSpPr>
+      <p:grpSpPr/>
+      <p:pic>
+        <p:nvPicPr>
+          <p:cNvPr id="2" name="Picture 1" descr="Slide-4-image-1.png"/>
+          <p:cNvPicPr>
+            <a:picLocks noChangeAspect="1"/>
+          </p:cNvPicPr>
+          <p:nvPr/>
+        </p:nvPicPr>
+        <p:blipFill>
+          <a:blip r:embed="rId2"/>
+          <a:stretch>
+            <a:fillRect/>
+          </a:stretch>
+        </p:blipFill>
+        <p:spPr>
+          <a:xfrm>
+            <a:off x="0" y="0"/>
+            <a:ext cx="12191695" cy="6858000"/>
+          </a:xfrm>
+          <a:prstGeom prst="rect">
+            <a:avLst/>
+          </a:prstGeom>
+        </p:spPr>
+      </p:pic>
+    </p:spTree>
+  </p:cSld>
+  <p:clrMapOvr>
+    <a:masterClrMapping/>
+  </p:clrMapOvr>
+</p:sld>
+</file>
+
+<file path=ppt/slides/slide35.xml><?xml version="1.0" encoding="utf-8"?>
+<p:sld xmlns:a="http://schemas.openxmlformats.org/drawingml/2006/main" xmlns:p="http://schemas.openxmlformats.org/presentationml/2006/main" xmlns:r="http://schemas.openxmlformats.org/officeDocument/2006/relationships">
+  <p:cSld>
+    <p:spTree>
+      <p:nvGrpSpPr>
+        <p:cNvPr id="1" name=""/>
+        <p:cNvGrpSpPr/>
+        <p:nvPr/>
+      </p:nvGrpSpPr>
+      <p:grpSpPr/>
+      <p:pic>
+        <p:nvPicPr>
+          <p:cNvPr id="2" name="Picture 1" descr="Slide-5-image-1.png"/>
+          <p:cNvPicPr>
+            <a:picLocks noChangeAspect="1"/>
+          </p:cNvPicPr>
+          <p:nvPr/>
+        </p:nvPicPr>
+        <p:blipFill>
+          <a:blip r:embed="rId2"/>
+          <a:stretch>
+            <a:fillRect/>
+          </a:stretch>
+        </p:blipFill>
+        <p:spPr>
+          <a:xfrm>
+            <a:off x="0" y="0"/>
+            <a:ext cx="12191695" cy="6858000"/>
+          </a:xfrm>
+          <a:prstGeom prst="rect">
+            <a:avLst/>
+          </a:prstGeom>
+        </p:spPr>
+      </p:pic>
+    </p:spTree>
+  </p:cSld>
+  <p:clrMapOvr>
+    <a:masterClrMapping/>
+  </p:clrMapOvr>
+</p:sld>
+</file>
+
+<file path=ppt/slides/slide36.xml><?xml version="1.0" encoding="utf-8"?>
+<p:sld xmlns:a="http://schemas.openxmlformats.org/drawingml/2006/main" xmlns:p="http://schemas.openxmlformats.org/presentationml/2006/main" xmlns:r="http://schemas.openxmlformats.org/officeDocument/2006/relationships">
+  <p:cSld>
+    <p:spTree>
+      <p:nvGrpSpPr>
+        <p:cNvPr id="1" name=""/>
+        <p:cNvGrpSpPr/>
+        <p:nvPr/>
+      </p:nvGrpSpPr>
+      <p:grpSpPr/>
+      <p:pic>
+        <p:nvPicPr>
+          <p:cNvPr id="2" name="Picture 1" descr="Slide-6-image-1.png"/>
+          <p:cNvPicPr>
+            <a:picLocks noChangeAspect="1"/>
+          </p:cNvPicPr>
+          <p:nvPr/>
+        </p:nvPicPr>
+        <p:blipFill>
+          <a:blip r:embed="rId2"/>
+          <a:stretch>
+            <a:fillRect/>
+          </a:stretch>
+        </p:blipFill>
+        <p:spPr>
+          <a:xfrm>
+            <a:off x="0" y="0"/>
+            <a:ext cx="12191695" cy="6858000"/>
+          </a:xfrm>
+          <a:prstGeom prst="rect">
+            <a:avLst/>
+          </a:prstGeom>
+        </p:spPr>
+      </p:pic>
+    </p:spTree>
+  </p:cSld>
+  <p:clrMapOvr>
+    <a:masterClrMapping/>
+  </p:clrMapOvr>
+</p:sld>
+</file>
+
+<file path=ppt/slides/slide37.xml><?xml version="1.0" encoding="utf-8"?>
+<p:sld xmlns:a="http://schemas.openxmlformats.org/drawingml/2006/main" xmlns:p="http://schemas.openxmlformats.org/presentationml/2006/main" xmlns:r="http://schemas.openxmlformats.org/officeDocument/2006/relationships">
+  <p:cSld>
+    <p:spTree>
+      <p:nvGrpSpPr>
+        <p:cNvPr id="1" name=""/>
+        <p:cNvGrpSpPr/>
+        <p:nvPr/>
+      </p:nvGrpSpPr>
+      <p:grpSpPr/>
+      <p:pic>
+        <p:nvPicPr>
+          <p:cNvPr id="2" name="Picture 1" descr="Slide-7-image-1.png"/>
+          <p:cNvPicPr>
+            <a:picLocks noChangeAspect="1"/>
+          </p:cNvPicPr>
+          <p:nvPr/>
+        </p:nvPicPr>
+        <p:blipFill>
+          <a:blip r:embed="rId2"/>
+          <a:stretch>
+            <a:fillRect/>
+          </a:stretch>
+        </p:blipFill>
+        <p:spPr>
+          <a:xfrm>
+            <a:off x="0" y="0"/>
+            <a:ext cx="12191695" cy="6858000"/>
+          </a:xfrm>
+          <a:prstGeom prst="rect">
+            <a:avLst/>
+          </a:prstGeom>
+        </p:spPr>
+      </p:pic>
+    </p:spTree>
+  </p:cSld>
+  <p:clrMapOvr>
+    <a:masterClrMapping/>
+  </p:clrMapOvr>
+</p:sld>
+</file>
+
+<file path=ppt/slides/slide38.xml><?xml version="1.0" encoding="utf-8"?>
+<p:sld xmlns:a="http://schemas.openxmlformats.org/drawingml/2006/main" xmlns:p="http://schemas.openxmlformats.org/presentationml/2006/main" xmlns:r="http://schemas.openxmlformats.org/officeDocument/2006/relationships">
+  <p:cSld>
+    <p:spTree>
+      <p:nvGrpSpPr>
+        <p:cNvPr id="1" name=""/>
+        <p:cNvGrpSpPr/>
+        <p:nvPr/>
+      </p:nvGrpSpPr>
+      <p:grpSpPr/>
+      <p:pic>
+        <p:nvPicPr>
+          <p:cNvPr id="2" name="Picture 1" descr="Slide-8-image-1.png"/>
+          <p:cNvPicPr>
+            <a:picLocks noChangeAspect="1"/>
+          </p:cNvPicPr>
+          <p:nvPr/>
+        </p:nvPicPr>
+        <p:blipFill>
+          <a:blip r:embed="rId2"/>
+          <a:stretch>
+            <a:fillRect/>
+          </a:stretch>
+        </p:blipFill>
+        <p:spPr>
+          <a:xfrm>
+            <a:off x="0" y="0"/>
+            <a:ext cx="12191695" cy="6858000"/>
+          </a:xfrm>
+          <a:prstGeom prst="rect">
+            <a:avLst/>
+          </a:prstGeom>
+        </p:spPr>
+      </p:pic>
+    </p:spTree>
+  </p:cSld>
+  <p:clrMapOvr>
+    <a:masterClrMapping/>
+  </p:clrMapOvr>
+</p:sld>
+</file>
+
+<file path=ppt/slides/slide39.xml><?xml version="1.0" encoding="utf-8"?>
+<p:sld xmlns:a="http://schemas.openxmlformats.org/drawingml/2006/main" xmlns:p="http://schemas.openxmlformats.org/presentationml/2006/main" xmlns:r="http://schemas.openxmlformats.org/officeDocument/2006/relationships">
+  <p:cSld>
+    <p:spTree>
+      <p:nvGrpSpPr>
+        <p:cNvPr id="1" name=""/>
+        <p:cNvGrpSpPr/>
+        <p:nvPr/>
+      </p:nvGrpSpPr>
+      <p:grpSpPr/>
+      <p:pic>
+        <p:nvPicPr>
+          <p:cNvPr id="2" name="Picture 1" descr="Slide-9-image-1.png"/>
+          <p:cNvPicPr>
+            <a:picLocks noChangeAspect="1"/>
+          </p:cNvPicPr>
+          <p:nvPr/>
+        </p:nvPicPr>
+        <p:blipFill>
+          <a:blip r:embed="rId2"/>
+          <a:stretch>
+            <a:fillRect/>
+          </a:stretch>
+        </p:blipFill>
+        <p:spPr>
+          <a:xfrm>
+            <a:off x="0" y="0"/>
+            <a:ext cx="12191695" cy="6858000"/>
+          </a:xfrm>
+          <a:prstGeom prst="rect">
+            <a:avLst/>
+          </a:prstGeom>
+        </p:spPr>
+      </p:pic>
     </p:spTree>
   </p:cSld>
   <p:clrMapOvr>
@@ -4375,6 +8030,14 @@
 <file path=ppt/slides/slide4.xml><?xml version="1.0" encoding="utf-8"?>
 <p:sld xmlns:a="http://schemas.openxmlformats.org/drawingml/2006/main" xmlns:p="http://schemas.openxmlformats.org/presentationml/2006/main" xmlns:r="http://schemas.openxmlformats.org/officeDocument/2006/relationships">
   <p:cSld>
+    <p:bg>
+      <p:bgPr>
+        <a:solidFill>
+          <a:srgbClr val="141210"/>
+        </a:solidFill>
+        <a:effectLst/>
+      </p:bgPr>
+    </p:bg>
     <p:spTree>
       <p:nvGrpSpPr>
         <p:cNvPr id="1" name=""/>
@@ -4384,65 +8047,1159 @@
       <p:grpSpPr/>
       <p:sp>
         <p:nvSpPr>
-          <p:cNvPr id="2" name="Title 1"/>
-          <p:cNvSpPr>
-            <a:spLocks noGrp="1"/>
-          </p:cNvSpPr>
-          <p:nvPr>
-            <p:ph type="title"/>
-          </p:nvPr>
-        </p:nvSpPr>
-        <p:spPr/>
-        <p:txBody>
-          <a:bodyPr/>
-          <a:lstStyle/>
-          <a:p>
-            <a:r>
-              <a:t>Project thesis</a:t>
-            </a:r>
-          </a:p>
-        </p:txBody>
-      </p:sp>
-      <p:sp>
-        <p:nvSpPr>
-          <p:cNvPr id="3" name="Content Placeholder 2"/>
-          <p:cNvSpPr>
-            <a:spLocks noGrp="1"/>
-          </p:cNvSpPr>
-          <p:nvPr>
-            <p:ph idx="1"/>
-          </p:nvPr>
-        </p:nvSpPr>
-        <p:spPr/>
-        <p:txBody>
-          <a:bodyPr/>
-          <a:lstStyle/>
-          <a:p>
-            <a:pPr>
-              <a:defRPr sz="1600"/>
-            </a:pPr>
-            <a:r>
-              <a:t>Archive of Extinction is a browser-first biodesign memorial that reconstructs a bounded sensory-temporal hypothesis space for extinct species.</a:t>
-            </a:r>
-          </a:p>
-          <a:p>
-            <a:pPr>
-              <a:defRPr sz="1600"/>
-            </a:pPr>
-            <a:r>
-              <a:t>It is grounded in citable research, expressed through WebXR, controlled generative passes, and optional Web Audio.</a:t>
-            </a:r>
-          </a:p>
-          <a:p>
-            <a:pPr>
-              <a:defRPr sz="1600"/>
-            </a:pPr>
-            <a:r>
-              <a:t>The experience closes with evidence literacy and branching ethics so digital recall never erases conservation urgency.</a:t>
-            </a:r>
-          </a:p>
-        </p:txBody>
-      </p:sp>
+          <p:cNvPr id="2" name="Rectangle 1"/>
+          <p:cNvSpPr/>
+          <p:nvPr/>
+        </p:nvSpPr>
+        <p:spPr>
+          <a:xfrm>
+            <a:off x="0" y="0"/>
+            <a:ext cx="12191695" cy="164592"/>
+          </a:xfrm>
+          <a:prstGeom prst="rect">
+            <a:avLst/>
+          </a:prstGeom>
+          <a:solidFill>
+            <a:srgbClr val="C45C2A"/>
+          </a:solidFill>
+          <a:ln>
+            <a:noFill/>
+          </a:ln>
+        </p:spPr>
+        <p:style>
+          <a:lnRef idx="1">
+            <a:schemeClr val="accent1"/>
+          </a:lnRef>
+          <a:fillRef idx="3">
+            <a:schemeClr val="accent1"/>
+          </a:fillRef>
+          <a:effectRef idx="2">
+            <a:schemeClr val="accent1"/>
+          </a:effectRef>
+          <a:fontRef idx="minor">
+            <a:schemeClr val="lt1"/>
+          </a:fontRef>
+        </p:style>
+        <p:txBody>
+          <a:bodyPr rtlCol="0" anchor="ctr"/>
+          <a:lstStyle/>
+          <a:p>
+            <a:pPr algn="ctr"/>
+          </a:p>
+        </p:txBody>
+      </p:sp>
+      <p:sp>
+        <p:nvSpPr>
+          <p:cNvPr id="3" name="Rectangle 2"/>
+          <p:cNvSpPr/>
+          <p:nvPr/>
+        </p:nvSpPr>
+        <p:spPr>
+          <a:xfrm>
+            <a:off x="9052560" y="164592"/>
+            <a:ext cx="3136392" cy="6693408"/>
+          </a:xfrm>
+          <a:prstGeom prst="rect">
+            <a:avLst/>
+          </a:prstGeom>
+          <a:solidFill>
+            <a:srgbClr val="1E1A17"/>
+          </a:solidFill>
+          <a:ln>
+            <a:noFill/>
+          </a:ln>
+        </p:spPr>
+        <p:style>
+          <a:lnRef idx="1">
+            <a:schemeClr val="accent1"/>
+          </a:lnRef>
+          <a:fillRef idx="3">
+            <a:schemeClr val="accent1"/>
+          </a:fillRef>
+          <a:effectRef idx="2">
+            <a:schemeClr val="accent1"/>
+          </a:effectRef>
+          <a:fontRef idx="minor">
+            <a:schemeClr val="lt1"/>
+          </a:fontRef>
+        </p:style>
+        <p:txBody>
+          <a:bodyPr rtlCol="0" anchor="ctr"/>
+          <a:lstStyle/>
+          <a:p>
+            <a:pPr algn="ctr"/>
+          </a:p>
+        </p:txBody>
+      </p:sp>
+      <p:sp>
+        <p:nvSpPr>
+          <p:cNvPr id="4" name="TextBox 3"/>
+          <p:cNvSpPr txBox="1"/>
+          <p:nvPr/>
+        </p:nvSpPr>
+        <p:spPr>
+          <a:xfrm>
+            <a:off x="640080" y="411480"/>
+            <a:ext cx="4389120" cy="292608"/>
+          </a:xfrm>
+          <a:prstGeom prst="rect">
+            <a:avLst/>
+          </a:prstGeom>
+          <a:noFill/>
+        </p:spPr>
+        <p:txBody>
+          <a:bodyPr wrap="none">
+            <a:spAutoFit/>
+          </a:bodyPr>
+          <a:lstStyle/>
+          <a:p>
+            <a:r>
+              <a:rPr sz="1300" b="1">
+                <a:solidFill>
+                  <a:srgbClr val="C45C2A"/>
+                </a:solidFill>
+                <a:latin typeface="Helvetica Neue"/>
+              </a:rPr>
+              <a:t>CORE ARCHITECTURE</a:t>
+            </a:r>
+          </a:p>
+        </p:txBody>
+      </p:sp>
+      <p:sp>
+        <p:nvSpPr>
+          <p:cNvPr id="5" name="TextBox 4"/>
+          <p:cNvSpPr txBox="1"/>
+          <p:nvPr/>
+        </p:nvSpPr>
+        <p:spPr>
+          <a:xfrm>
+            <a:off x="640080" y="777240"/>
+            <a:ext cx="9601200" cy="914400"/>
+          </a:xfrm>
+          <a:prstGeom prst="rect">
+            <a:avLst/>
+          </a:prstGeom>
+          <a:noFill/>
+        </p:spPr>
+        <p:txBody>
+          <a:bodyPr wrap="square">
+            <a:spAutoFit/>
+          </a:bodyPr>
+          <a:lstStyle/>
+          <a:p>
+            <a:r>
+              <a:rPr sz="2800" b="1">
+                <a:solidFill>
+                  <a:srgbClr val="E6DFD6"/>
+                </a:solidFill>
+                <a:latin typeface="Helvetica Neue"/>
+              </a:rPr>
+              <a:t>Three load-bearing modules</a:t>
+            </a:r>
+          </a:p>
+        </p:txBody>
+      </p:sp>
+      <p:sp>
+        <p:nvSpPr>
+          <p:cNvPr id="6" name="Rounded Rectangle 5"/>
+          <p:cNvSpPr/>
+          <p:nvPr/>
+        </p:nvSpPr>
+        <p:spPr>
+          <a:xfrm>
+            <a:off x="640080" y="1783080"/>
+            <a:ext cx="3154680" cy="3566160"/>
+          </a:xfrm>
+          <a:prstGeom prst="roundRect">
+            <a:avLst/>
+          </a:prstGeom>
+          <a:solidFill>
+            <a:srgbClr val="1E1A17"/>
+          </a:solidFill>
+          <a:ln>
+            <a:solidFill>
+              <a:srgbClr val="6B7A8F"/>
+            </a:solidFill>
+          </a:ln>
+        </p:spPr>
+        <p:style>
+          <a:lnRef idx="1">
+            <a:schemeClr val="accent1"/>
+          </a:lnRef>
+          <a:fillRef idx="3">
+            <a:schemeClr val="accent1"/>
+          </a:fillRef>
+          <a:effectRef idx="2">
+            <a:schemeClr val="accent1"/>
+          </a:effectRef>
+          <a:fontRef idx="minor">
+            <a:schemeClr val="lt1"/>
+          </a:fontRef>
+        </p:style>
+        <p:txBody>
+          <a:bodyPr rtlCol="0" anchor="ctr"/>
+          <a:lstStyle/>
+          <a:p>
+            <a:pPr algn="ctr"/>
+          </a:p>
+        </p:txBody>
+      </p:sp>
+      <p:sp>
+        <p:nvSpPr>
+          <p:cNvPr id="7" name="TextBox 6"/>
+          <p:cNvSpPr txBox="1"/>
+          <p:nvPr/>
+        </p:nvSpPr>
+        <p:spPr>
+          <a:xfrm>
+            <a:off x="804671" y="1938528"/>
+            <a:ext cx="2825496" cy="411480"/>
+          </a:xfrm>
+          <a:prstGeom prst="rect">
+            <a:avLst/>
+          </a:prstGeom>
+          <a:noFill/>
+        </p:spPr>
+        <p:txBody>
+          <a:bodyPr wrap="none">
+            <a:spAutoFit/>
+          </a:bodyPr>
+          <a:lstStyle/>
+          <a:p>
+            <a:r>
+              <a:rPr sz="1800" b="1">
+                <a:solidFill>
+                  <a:srgbClr val="E6DFD6"/>
+                </a:solidFill>
+                <a:latin typeface="Helvetica Neue"/>
+              </a:rPr>
+              <a:t>Species Dossier</a:t>
+            </a:r>
+          </a:p>
+        </p:txBody>
+      </p:sp>
+      <p:sp>
+        <p:nvSpPr>
+          <p:cNvPr id="8" name="TextBox 7"/>
+          <p:cNvSpPr txBox="1"/>
+          <p:nvPr/>
+        </p:nvSpPr>
+        <p:spPr>
+          <a:xfrm>
+            <a:off x="804671" y="2423160"/>
+            <a:ext cx="2825496" cy="2651760"/>
+          </a:xfrm>
+          <a:prstGeom prst="rect">
+            <a:avLst/>
+          </a:prstGeom>
+          <a:noFill/>
+        </p:spPr>
+        <p:txBody>
+          <a:bodyPr wrap="square" lIns="0" rIns="0" tIns="0">
+            <a:spAutoFit/>
+          </a:bodyPr>
+          <a:lstStyle/>
+          <a:p>
+            <a:pPr>
+              <a:spcAft>
+                <a:spcPts val="1000"/>
+              </a:spcAft>
+              <a:defRPr sz="1400">
+                <a:solidFill>
+                  <a:srgbClr val="E6DFD6"/>
+                </a:solidFill>
+                <a:latin typeface="Helvetica Neue"/>
+              </a:defRPr>
+            </a:pPr>
+            <a:r>
+              <a:t>Evidence cards</a:t>
+            </a:r>
+          </a:p>
+          <a:p>
+            <a:pPr>
+              <a:spcAft>
+                <a:spcPts val="1000"/>
+              </a:spcAft>
+              <a:defRPr sz="1400">
+                <a:solidFill>
+                  <a:srgbClr val="E6DFD6"/>
+                </a:solidFill>
+                <a:latin typeface="Helvetica Neue"/>
+              </a:defRPr>
+            </a:pPr>
+            <a:r>
+              <a:t>Temporal niche</a:t>
+            </a:r>
+          </a:p>
+          <a:p>
+            <a:pPr>
+              <a:spcAft>
+                <a:spcPts val="1000"/>
+              </a:spcAft>
+              <a:defRPr sz="1400">
+                <a:solidFill>
+                  <a:srgbClr val="E6DFD6"/>
+                </a:solidFill>
+                <a:latin typeface="Helvetica Neue"/>
+              </a:defRPr>
+            </a:pPr>
+            <a:r>
+              <a:t>Sensory proxies</a:t>
+            </a:r>
+          </a:p>
+          <a:p>
+            <a:pPr>
+              <a:spcAft>
+                <a:spcPts val="1000"/>
+              </a:spcAft>
+              <a:defRPr sz="1400">
+                <a:solidFill>
+                  <a:srgbClr val="E6DFD6"/>
+                </a:solidFill>
+                <a:latin typeface="Helvetica Neue"/>
+              </a:defRPr>
+            </a:pPr>
+            <a:r>
+              <a:t>Extinction mechanism</a:t>
+            </a:r>
+          </a:p>
+          <a:p>
+            <a:pPr>
+              <a:spcAft>
+                <a:spcPts val="1000"/>
+              </a:spcAft>
+              <a:defRPr sz="1400">
+                <a:solidFill>
+                  <a:srgbClr val="E6DFD6"/>
+                </a:solidFill>
+                <a:latin typeface="Helvetica Neue"/>
+              </a:defRPr>
+            </a:pPr>
+            <a:r>
+              <a:t>360° constrained scene</a:t>
+            </a:r>
+          </a:p>
+        </p:txBody>
+      </p:sp>
+      <p:sp>
+        <p:nvSpPr>
+          <p:cNvPr id="9" name="Rounded Rectangle 8"/>
+          <p:cNvSpPr/>
+          <p:nvPr/>
+        </p:nvSpPr>
+        <p:spPr>
+          <a:xfrm>
+            <a:off x="3886200" y="1783080"/>
+            <a:ext cx="3154680" cy="3566160"/>
+          </a:xfrm>
+          <a:prstGeom prst="roundRect">
+            <a:avLst/>
+          </a:prstGeom>
+          <a:solidFill>
+            <a:srgbClr val="1E1A17"/>
+          </a:solidFill>
+          <a:ln>
+            <a:solidFill>
+              <a:srgbClr val="6B7A8F"/>
+            </a:solidFill>
+          </a:ln>
+        </p:spPr>
+        <p:style>
+          <a:lnRef idx="1">
+            <a:schemeClr val="accent1"/>
+          </a:lnRef>
+          <a:fillRef idx="3">
+            <a:schemeClr val="accent1"/>
+          </a:fillRef>
+          <a:effectRef idx="2">
+            <a:schemeClr val="accent1"/>
+          </a:effectRef>
+          <a:fontRef idx="minor">
+            <a:schemeClr val="lt1"/>
+          </a:fontRef>
+        </p:style>
+        <p:txBody>
+          <a:bodyPr rtlCol="0" anchor="ctr"/>
+          <a:lstStyle/>
+          <a:p>
+            <a:pPr algn="ctr"/>
+          </a:p>
+        </p:txBody>
+      </p:sp>
+      <p:sp>
+        <p:nvSpPr>
+          <p:cNvPr id="10" name="TextBox 9"/>
+          <p:cNvSpPr txBox="1"/>
+          <p:nvPr/>
+        </p:nvSpPr>
+        <p:spPr>
+          <a:xfrm>
+            <a:off x="4050791" y="1938528"/>
+            <a:ext cx="2825496" cy="411480"/>
+          </a:xfrm>
+          <a:prstGeom prst="rect">
+            <a:avLst/>
+          </a:prstGeom>
+          <a:noFill/>
+        </p:spPr>
+        <p:txBody>
+          <a:bodyPr wrap="none">
+            <a:spAutoFit/>
+          </a:bodyPr>
+          <a:lstStyle/>
+          <a:p>
+            <a:r>
+              <a:rPr sz="1800" b="1">
+                <a:solidFill>
+                  <a:srgbClr val="E6DFD6"/>
+                </a:solidFill>
+                <a:latin typeface="Helvetica Neue"/>
+              </a:rPr>
+              <a:t>Polyphony Mixer</a:t>
+            </a:r>
+          </a:p>
+        </p:txBody>
+      </p:sp>
+      <p:sp>
+        <p:nvSpPr>
+          <p:cNvPr id="11" name="TextBox 10"/>
+          <p:cNvSpPr txBox="1"/>
+          <p:nvPr/>
+        </p:nvSpPr>
+        <p:spPr>
+          <a:xfrm>
+            <a:off x="4050791" y="2423160"/>
+            <a:ext cx="2825496" cy="2651760"/>
+          </a:xfrm>
+          <a:prstGeom prst="rect">
+            <a:avLst/>
+          </a:prstGeom>
+          <a:noFill/>
+        </p:spPr>
+        <p:txBody>
+          <a:bodyPr wrap="square" lIns="0" rIns="0" tIns="0">
+            <a:spAutoFit/>
+          </a:bodyPr>
+          <a:lstStyle/>
+          <a:p>
+            <a:pPr>
+              <a:spcAft>
+                <a:spcPts val="1000"/>
+              </a:spcAft>
+              <a:defRPr sz="1400">
+                <a:solidFill>
+                  <a:srgbClr val="E6DFD6"/>
+                </a:solidFill>
+                <a:latin typeface="Helvetica Neue"/>
+              </a:defRPr>
+            </a:pPr>
+            <a:r>
+              <a:t>Seasonal layers</a:t>
+            </a:r>
+          </a:p>
+          <a:p>
+            <a:pPr>
+              <a:spcAft>
+                <a:spcPts val="1000"/>
+              </a:spcAft>
+              <a:defRPr sz="1400">
+                <a:solidFill>
+                  <a:srgbClr val="E6DFD6"/>
+                </a:solidFill>
+                <a:latin typeface="Helvetica Neue"/>
+              </a:defRPr>
+            </a:pPr>
+            <a:r>
+              <a:t>Diel rhythm</a:t>
+            </a:r>
+          </a:p>
+          <a:p>
+            <a:pPr>
+              <a:spcAft>
+                <a:spcPts val="1000"/>
+              </a:spcAft>
+              <a:defRPr sz="1400">
+                <a:solidFill>
+                  <a:srgbClr val="E6DFD6"/>
+                </a:solidFill>
+                <a:latin typeface="Helvetica Neue"/>
+              </a:defRPr>
+            </a:pPr>
+            <a:r>
+              <a:t>Density and synchrony</a:t>
+            </a:r>
+          </a:p>
+          <a:p>
+            <a:pPr>
+              <a:spcAft>
+                <a:spcPts val="1000"/>
+              </a:spcAft>
+              <a:defRPr sz="1400">
+                <a:solidFill>
+                  <a:srgbClr val="E6DFD6"/>
+                </a:solidFill>
+                <a:latin typeface="Helvetica Neue"/>
+              </a:defRPr>
+            </a:pPr>
+            <a:r>
+              <a:t>Audible coexistence</a:t>
+            </a:r>
+          </a:p>
+          <a:p>
+            <a:pPr>
+              <a:spcAft>
+                <a:spcPts val="1000"/>
+              </a:spcAft>
+              <a:defRPr sz="1400">
+                <a:solidFill>
+                  <a:srgbClr val="E6DFD6"/>
+                </a:solidFill>
+                <a:latin typeface="Helvetica Neue"/>
+              </a:defRPr>
+            </a:pPr>
+            <a:r>
+              <a:t>Collapse as retuning</a:t>
+            </a:r>
+          </a:p>
+        </p:txBody>
+      </p:sp>
+      <p:sp>
+        <p:nvSpPr>
+          <p:cNvPr id="12" name="Rounded Rectangle 11"/>
+          <p:cNvSpPr/>
+          <p:nvPr/>
+        </p:nvSpPr>
+        <p:spPr>
+          <a:xfrm>
+            <a:off x="7132320" y="1783080"/>
+            <a:ext cx="3566160" cy="3566160"/>
+          </a:xfrm>
+          <a:prstGeom prst="roundRect">
+            <a:avLst/>
+          </a:prstGeom>
+          <a:solidFill>
+            <a:srgbClr val="1E1A17"/>
+          </a:solidFill>
+          <a:ln>
+            <a:solidFill>
+              <a:srgbClr val="6B7A8F"/>
+            </a:solidFill>
+          </a:ln>
+        </p:spPr>
+        <p:style>
+          <a:lnRef idx="1">
+            <a:schemeClr val="accent1"/>
+          </a:lnRef>
+          <a:fillRef idx="3">
+            <a:schemeClr val="accent1"/>
+          </a:fillRef>
+          <a:effectRef idx="2">
+            <a:schemeClr val="accent1"/>
+          </a:effectRef>
+          <a:fontRef idx="minor">
+            <a:schemeClr val="lt1"/>
+          </a:fontRef>
+        </p:style>
+        <p:txBody>
+          <a:bodyPr rtlCol="0" anchor="ctr"/>
+          <a:lstStyle/>
+          <a:p>
+            <a:pPr algn="ctr"/>
+          </a:p>
+        </p:txBody>
+      </p:sp>
+      <p:sp>
+        <p:nvSpPr>
+          <p:cNvPr id="13" name="TextBox 12"/>
+          <p:cNvSpPr txBox="1"/>
+          <p:nvPr/>
+        </p:nvSpPr>
+        <p:spPr>
+          <a:xfrm>
+            <a:off x="7296912" y="1938528"/>
+            <a:ext cx="3236976" cy="411480"/>
+          </a:xfrm>
+          <a:prstGeom prst="rect">
+            <a:avLst/>
+          </a:prstGeom>
+          <a:noFill/>
+        </p:spPr>
+        <p:txBody>
+          <a:bodyPr wrap="none">
+            <a:spAutoFit/>
+          </a:bodyPr>
+          <a:lstStyle/>
+          <a:p>
+            <a:r>
+              <a:rPr sz="1800" b="1">
+                <a:solidFill>
+                  <a:srgbClr val="E6DFD6"/>
+                </a:solidFill>
+                <a:latin typeface="Helvetica Neue"/>
+              </a:rPr>
+              <a:t>Ethics Console</a:t>
+            </a:r>
+          </a:p>
+        </p:txBody>
+      </p:sp>
+      <p:sp>
+        <p:nvSpPr>
+          <p:cNvPr id="14" name="TextBox 13"/>
+          <p:cNvSpPr txBox="1"/>
+          <p:nvPr/>
+        </p:nvSpPr>
+        <p:spPr>
+          <a:xfrm>
+            <a:off x="7296912" y="2423160"/>
+            <a:ext cx="3236976" cy="2651760"/>
+          </a:xfrm>
+          <a:prstGeom prst="rect">
+            <a:avLst/>
+          </a:prstGeom>
+          <a:noFill/>
+        </p:spPr>
+        <p:txBody>
+          <a:bodyPr wrap="square" lIns="0" rIns="0" tIns="0">
+            <a:spAutoFit/>
+          </a:bodyPr>
+          <a:lstStyle/>
+          <a:p>
+            <a:pPr>
+              <a:spcAft>
+                <a:spcPts val="1000"/>
+              </a:spcAft>
+              <a:defRPr sz="1400">
+                <a:solidFill>
+                  <a:srgbClr val="E6DFD6"/>
+                </a:solidFill>
+                <a:latin typeface="Helvetica Neue"/>
+              </a:defRPr>
+            </a:pPr>
+            <a:r>
+              <a:t>Evidence sorting</a:t>
+            </a:r>
+          </a:p>
+          <a:p>
+            <a:pPr>
+              <a:spcAft>
+                <a:spcPts val="1000"/>
+              </a:spcAft>
+              <a:defRPr sz="1400">
+                <a:solidFill>
+                  <a:srgbClr val="E6DFD6"/>
+                </a:solidFill>
+                <a:latin typeface="Helvetica Neue"/>
+              </a:defRPr>
+            </a:pPr>
+            <a:r>
+              <a:t>Forced tradeoffs</a:t>
+            </a:r>
+          </a:p>
+          <a:p>
+            <a:pPr>
+              <a:spcAft>
+                <a:spcPts val="1000"/>
+              </a:spcAft>
+              <a:defRPr sz="1400">
+                <a:solidFill>
+                  <a:srgbClr val="E6DFD6"/>
+                </a:solidFill>
+                <a:latin typeface="Helvetica Neue"/>
+              </a:defRPr>
+            </a:pPr>
+            <a:r>
+              <a:t>Rule-based outcomes</a:t>
+            </a:r>
+          </a:p>
+          <a:p>
+            <a:pPr>
+              <a:spcAft>
+                <a:spcPts val="1000"/>
+              </a:spcAft>
+              <a:defRPr sz="1400">
+                <a:solidFill>
+                  <a:srgbClr val="E6DFD6"/>
+                </a:solidFill>
+                <a:latin typeface="Helvetica Neue"/>
+              </a:defRPr>
+            </a:pPr>
+            <a:r>
+              <a:t>Sonic finale shifts</a:t>
+            </a:r>
+          </a:p>
+          <a:p>
+            <a:pPr>
+              <a:spcAft>
+                <a:spcPts val="1000"/>
+              </a:spcAft>
+              <a:defRPr sz="1400">
+                <a:solidFill>
+                  <a:srgbClr val="E6DFD6"/>
+                </a:solidFill>
+                <a:latin typeface="Helvetica Neue"/>
+              </a:defRPr>
+            </a:pPr>
+            <a:r>
+              <a:t>Action over nostalgia</a:t>
+            </a:r>
+          </a:p>
+        </p:txBody>
+      </p:sp>
+      <p:sp>
+        <p:nvSpPr>
+          <p:cNvPr id="15" name="TextBox 14"/>
+          <p:cNvSpPr txBox="1"/>
+          <p:nvPr/>
+        </p:nvSpPr>
+        <p:spPr>
+          <a:xfrm>
+            <a:off x="548640" y="6263640"/>
+            <a:ext cx="10881360" cy="320040"/>
+          </a:xfrm>
+          <a:prstGeom prst="rect">
+            <a:avLst/>
+          </a:prstGeom>
+          <a:noFill/>
+        </p:spPr>
+        <p:txBody>
+          <a:bodyPr wrap="none">
+            <a:spAutoFit/>
+          </a:bodyPr>
+          <a:lstStyle/>
+          <a:p>
+            <a:pPr algn="l"/>
+            <a:r>
+              <a:rPr sz="900">
+                <a:solidFill>
+                  <a:srgbClr val="9A8F84"/>
+                </a:solidFill>
+                <a:latin typeface="Helvetica Neue"/>
+              </a:rPr>
+              <a:t>Extinction Archive · Biodigital chronobiology · BDC 2026  4 / 12</a:t>
+            </a:r>
+          </a:p>
+        </p:txBody>
+      </p:sp>
+    </p:spTree>
+  </p:cSld>
+  <p:clrMapOvr>
+    <a:masterClrMapping/>
+  </p:clrMapOvr>
+</p:sld>
+</file>
+
+<file path=ppt/slides/slide40.xml><?xml version="1.0" encoding="utf-8"?>
+<p:sld xmlns:a="http://schemas.openxmlformats.org/drawingml/2006/main" xmlns:p="http://schemas.openxmlformats.org/presentationml/2006/main" xmlns:r="http://schemas.openxmlformats.org/officeDocument/2006/relationships">
+  <p:cSld>
+    <p:spTree>
+      <p:nvGrpSpPr>
+        <p:cNvPr id="1" name=""/>
+        <p:cNvGrpSpPr/>
+        <p:nvPr/>
+      </p:nvGrpSpPr>
+      <p:grpSpPr/>
+      <p:pic>
+        <p:nvPicPr>
+          <p:cNvPr id="2" name="Picture 1" descr="Slide-10-image-1.png"/>
+          <p:cNvPicPr>
+            <a:picLocks noChangeAspect="1"/>
+          </p:cNvPicPr>
+          <p:nvPr/>
+        </p:nvPicPr>
+        <p:blipFill>
+          <a:blip r:embed="rId2"/>
+          <a:stretch>
+            <a:fillRect/>
+          </a:stretch>
+        </p:blipFill>
+        <p:spPr>
+          <a:xfrm>
+            <a:off x="0" y="0"/>
+            <a:ext cx="12191695" cy="6858000"/>
+          </a:xfrm>
+          <a:prstGeom prst="rect">
+            <a:avLst/>
+          </a:prstGeom>
+        </p:spPr>
+      </p:pic>
+    </p:spTree>
+  </p:cSld>
+  <p:clrMapOvr>
+    <a:masterClrMapping/>
+  </p:clrMapOvr>
+</p:sld>
+</file>
+
+<file path=ppt/slides/slide41.xml><?xml version="1.0" encoding="utf-8"?>
+<p:sld xmlns:a="http://schemas.openxmlformats.org/drawingml/2006/main" xmlns:p="http://schemas.openxmlformats.org/presentationml/2006/main" xmlns:r="http://schemas.openxmlformats.org/officeDocument/2006/relationships">
+  <p:cSld>
+    <p:spTree>
+      <p:nvGrpSpPr>
+        <p:cNvPr id="1" name=""/>
+        <p:cNvGrpSpPr/>
+        <p:nvPr/>
+      </p:nvGrpSpPr>
+      <p:grpSpPr/>
+      <p:pic>
+        <p:nvPicPr>
+          <p:cNvPr id="2" name="Picture 1" descr="Slide-11-image-1.png"/>
+          <p:cNvPicPr>
+            <a:picLocks noChangeAspect="1"/>
+          </p:cNvPicPr>
+          <p:nvPr/>
+        </p:nvPicPr>
+        <p:blipFill>
+          <a:blip r:embed="rId2"/>
+          <a:stretch>
+            <a:fillRect/>
+          </a:stretch>
+        </p:blipFill>
+        <p:spPr>
+          <a:xfrm>
+            <a:off x="0" y="0"/>
+            <a:ext cx="12191695" cy="6858000"/>
+          </a:xfrm>
+          <a:prstGeom prst="rect">
+            <a:avLst/>
+          </a:prstGeom>
+        </p:spPr>
+      </p:pic>
+    </p:spTree>
+  </p:cSld>
+  <p:clrMapOvr>
+    <a:masterClrMapping/>
+  </p:clrMapOvr>
+</p:sld>
+</file>
+
+<file path=ppt/slides/slide42.xml><?xml version="1.0" encoding="utf-8"?>
+<p:sld xmlns:a="http://schemas.openxmlformats.org/drawingml/2006/main" xmlns:p="http://schemas.openxmlformats.org/presentationml/2006/main" xmlns:r="http://schemas.openxmlformats.org/officeDocument/2006/relationships">
+  <p:cSld>
+    <p:spTree>
+      <p:nvGrpSpPr>
+        <p:cNvPr id="1" name=""/>
+        <p:cNvGrpSpPr/>
+        <p:nvPr/>
+      </p:nvGrpSpPr>
+      <p:grpSpPr/>
+      <p:pic>
+        <p:nvPicPr>
+          <p:cNvPr id="2" name="Picture 1" descr="Slide-12-image-1.png"/>
+          <p:cNvPicPr>
+            <a:picLocks noChangeAspect="1"/>
+          </p:cNvPicPr>
+          <p:nvPr/>
+        </p:nvPicPr>
+        <p:blipFill>
+          <a:blip r:embed="rId2"/>
+          <a:stretch>
+            <a:fillRect/>
+          </a:stretch>
+        </p:blipFill>
+        <p:spPr>
+          <a:xfrm>
+            <a:off x="0" y="0"/>
+            <a:ext cx="12191695" cy="6858000"/>
+          </a:xfrm>
+          <a:prstGeom prst="rect">
+            <a:avLst/>
+          </a:prstGeom>
+        </p:spPr>
+      </p:pic>
+    </p:spTree>
+  </p:cSld>
+  <p:clrMapOvr>
+    <a:masterClrMapping/>
+  </p:clrMapOvr>
+</p:sld>
+</file>
+
+<file path=ppt/slides/slide43.xml><?xml version="1.0" encoding="utf-8"?>
+<p:sld xmlns:a="http://schemas.openxmlformats.org/drawingml/2006/main" xmlns:p="http://schemas.openxmlformats.org/presentationml/2006/main" xmlns:r="http://schemas.openxmlformats.org/officeDocument/2006/relationships">
+  <p:cSld>
+    <p:spTree>
+      <p:nvGrpSpPr>
+        <p:cNvPr id="1" name=""/>
+        <p:cNvGrpSpPr/>
+        <p:nvPr/>
+      </p:nvGrpSpPr>
+      <p:grpSpPr/>
+      <p:pic>
+        <p:nvPicPr>
+          <p:cNvPr id="2" name="Picture 1" descr="Slide-13-image-1.png"/>
+          <p:cNvPicPr>
+            <a:picLocks noChangeAspect="1"/>
+          </p:cNvPicPr>
+          <p:nvPr/>
+        </p:nvPicPr>
+        <p:blipFill>
+          <a:blip r:embed="rId2"/>
+          <a:stretch>
+            <a:fillRect/>
+          </a:stretch>
+        </p:blipFill>
+        <p:spPr>
+          <a:xfrm>
+            <a:off x="0" y="0"/>
+            <a:ext cx="12191695" cy="6858000"/>
+          </a:xfrm>
+          <a:prstGeom prst="rect">
+            <a:avLst/>
+          </a:prstGeom>
+        </p:spPr>
+      </p:pic>
+    </p:spTree>
+  </p:cSld>
+  <p:clrMapOvr>
+    <a:masterClrMapping/>
+  </p:clrMapOvr>
+</p:sld>
+</file>
+
+<file path=ppt/slides/slide44.xml><?xml version="1.0" encoding="utf-8"?>
+<p:sld xmlns:a="http://schemas.openxmlformats.org/drawingml/2006/main" xmlns:p="http://schemas.openxmlformats.org/presentationml/2006/main" xmlns:r="http://schemas.openxmlformats.org/officeDocument/2006/relationships">
+  <p:cSld>
+    <p:spTree>
+      <p:nvGrpSpPr>
+        <p:cNvPr id="1" name=""/>
+        <p:cNvGrpSpPr/>
+        <p:nvPr/>
+      </p:nvGrpSpPr>
+      <p:grpSpPr/>
+      <p:pic>
+        <p:nvPicPr>
+          <p:cNvPr id="2" name="Picture 1" descr="Slide-14-image-1.png"/>
+          <p:cNvPicPr>
+            <a:picLocks noChangeAspect="1"/>
+          </p:cNvPicPr>
+          <p:nvPr/>
+        </p:nvPicPr>
+        <p:blipFill>
+          <a:blip r:embed="rId2"/>
+          <a:stretch>
+            <a:fillRect/>
+          </a:stretch>
+        </p:blipFill>
+        <p:spPr>
+          <a:xfrm>
+            <a:off x="0" y="0"/>
+            <a:ext cx="12191695" cy="6858000"/>
+          </a:xfrm>
+          <a:prstGeom prst="rect">
+            <a:avLst/>
+          </a:prstGeom>
+        </p:spPr>
+      </p:pic>
+    </p:spTree>
+  </p:cSld>
+  <p:clrMapOvr>
+    <a:masterClrMapping/>
+  </p:clrMapOvr>
+</p:sld>
+</file>
+
+<file path=ppt/slides/slide45.xml><?xml version="1.0" encoding="utf-8"?>
+<p:sld xmlns:a="http://schemas.openxmlformats.org/drawingml/2006/main" xmlns:p="http://schemas.openxmlformats.org/presentationml/2006/main" xmlns:r="http://schemas.openxmlformats.org/officeDocument/2006/relationships">
+  <p:cSld>
+    <p:spTree>
+      <p:nvGrpSpPr>
+        <p:cNvPr id="1" name=""/>
+        <p:cNvGrpSpPr/>
+        <p:nvPr/>
+      </p:nvGrpSpPr>
+      <p:grpSpPr/>
+      <p:pic>
+        <p:nvPicPr>
+          <p:cNvPr id="2" name="Picture 1" descr="Slide-15-image-1.png"/>
+          <p:cNvPicPr>
+            <a:picLocks noChangeAspect="1"/>
+          </p:cNvPicPr>
+          <p:nvPr/>
+        </p:nvPicPr>
+        <p:blipFill>
+          <a:blip r:embed="rId2"/>
+          <a:stretch>
+            <a:fillRect/>
+          </a:stretch>
+        </p:blipFill>
+        <p:spPr>
+          <a:xfrm>
+            <a:off x="0" y="0"/>
+            <a:ext cx="12191695" cy="6858000"/>
+          </a:xfrm>
+          <a:prstGeom prst="rect">
+            <a:avLst/>
+          </a:prstGeom>
+        </p:spPr>
+      </p:pic>
+    </p:spTree>
+  </p:cSld>
+  <p:clrMapOvr>
+    <a:masterClrMapping/>
+  </p:clrMapOvr>
+</p:sld>
+</file>
+
+<file path=ppt/slides/slide46.xml><?xml version="1.0" encoding="utf-8"?>
+<p:sld xmlns:a="http://schemas.openxmlformats.org/drawingml/2006/main" xmlns:p="http://schemas.openxmlformats.org/presentationml/2006/main" xmlns:r="http://schemas.openxmlformats.org/officeDocument/2006/relationships">
+  <p:cSld>
+    <p:spTree>
+      <p:nvGrpSpPr>
+        <p:cNvPr id="1" name=""/>
+        <p:cNvGrpSpPr/>
+        <p:nvPr/>
+      </p:nvGrpSpPr>
+      <p:grpSpPr/>
+      <p:pic>
+        <p:nvPicPr>
+          <p:cNvPr id="2" name="Picture 1" descr="Slide-16-image-1.png"/>
+          <p:cNvPicPr>
+            <a:picLocks noChangeAspect="1"/>
+          </p:cNvPicPr>
+          <p:nvPr/>
+        </p:nvPicPr>
+        <p:blipFill>
+          <a:blip r:embed="rId2"/>
+          <a:stretch>
+            <a:fillRect/>
+          </a:stretch>
+        </p:blipFill>
+        <p:spPr>
+          <a:xfrm>
+            <a:off x="0" y="0"/>
+            <a:ext cx="12191695" cy="6858000"/>
+          </a:xfrm>
+          <a:prstGeom prst="rect">
+            <a:avLst/>
+          </a:prstGeom>
+        </p:spPr>
+      </p:pic>
+    </p:spTree>
+  </p:cSld>
+  <p:clrMapOvr>
+    <a:masterClrMapping/>
+  </p:clrMapOvr>
+</p:sld>
+</file>
+
+<file path=ppt/slides/slide47.xml><?xml version="1.0" encoding="utf-8"?>
+<p:sld xmlns:a="http://schemas.openxmlformats.org/drawingml/2006/main" xmlns:p="http://schemas.openxmlformats.org/presentationml/2006/main" xmlns:r="http://schemas.openxmlformats.org/officeDocument/2006/relationships">
+  <p:cSld>
+    <p:spTree>
+      <p:nvGrpSpPr>
+        <p:cNvPr id="1" name=""/>
+        <p:cNvGrpSpPr/>
+        <p:nvPr/>
+      </p:nvGrpSpPr>
+      <p:grpSpPr/>
+      <p:pic>
+        <p:nvPicPr>
+          <p:cNvPr id="2" name="Picture 1" descr="Slide-17-image-1.png"/>
+          <p:cNvPicPr>
+            <a:picLocks noChangeAspect="1"/>
+          </p:cNvPicPr>
+          <p:nvPr/>
+        </p:nvPicPr>
+        <p:blipFill>
+          <a:blip r:embed="rId2"/>
+          <a:stretch>
+            <a:fillRect/>
+          </a:stretch>
+        </p:blipFill>
+        <p:spPr>
+          <a:xfrm>
+            <a:off x="0" y="0"/>
+            <a:ext cx="12191695" cy="6858000"/>
+          </a:xfrm>
+          <a:prstGeom prst="rect">
+            <a:avLst/>
+          </a:prstGeom>
+        </p:spPr>
+      </p:pic>
+    </p:spTree>
+  </p:cSld>
+  <p:clrMapOvr>
+    <a:masterClrMapping/>
+  </p:clrMapOvr>
+</p:sld>
+</file>
+
+<file path=ppt/slides/slide48.xml><?xml version="1.0" encoding="utf-8"?>
+<p:sld xmlns:a="http://schemas.openxmlformats.org/drawingml/2006/main" xmlns:p="http://schemas.openxmlformats.org/presentationml/2006/main" xmlns:r="http://schemas.openxmlformats.org/officeDocument/2006/relationships">
+  <p:cSld>
+    <p:spTree>
+      <p:nvGrpSpPr>
+        <p:cNvPr id="1" name=""/>
+        <p:cNvGrpSpPr/>
+        <p:nvPr/>
+      </p:nvGrpSpPr>
+      <p:grpSpPr/>
+      <p:pic>
+        <p:nvPicPr>
+          <p:cNvPr id="2" name="Picture 1" descr="Slide-18-image-1.png"/>
+          <p:cNvPicPr>
+            <a:picLocks noChangeAspect="1"/>
+          </p:cNvPicPr>
+          <p:nvPr/>
+        </p:nvPicPr>
+        <p:blipFill>
+          <a:blip r:embed="rId2"/>
+          <a:stretch>
+            <a:fillRect/>
+          </a:stretch>
+        </p:blipFill>
+        <p:spPr>
+          <a:xfrm>
+            <a:off x="0" y="0"/>
+            <a:ext cx="12191695" cy="6858000"/>
+          </a:xfrm>
+          <a:prstGeom prst="rect">
+            <a:avLst/>
+          </a:prstGeom>
+        </p:spPr>
+      </p:pic>
+    </p:spTree>
+  </p:cSld>
+  <p:clrMapOvr>
+    <a:masterClrMapping/>
+  </p:clrMapOvr>
+</p:sld>
+</file>
+
+<file path=ppt/slides/slide49.xml><?xml version="1.0" encoding="utf-8"?>
+<p:sld xmlns:a="http://schemas.openxmlformats.org/drawingml/2006/main" xmlns:p="http://schemas.openxmlformats.org/presentationml/2006/main" xmlns:r="http://schemas.openxmlformats.org/officeDocument/2006/relationships">
+  <p:cSld>
+    <p:spTree>
+      <p:nvGrpSpPr>
+        <p:cNvPr id="1" name=""/>
+        <p:cNvGrpSpPr/>
+        <p:nvPr/>
+      </p:nvGrpSpPr>
+      <p:grpSpPr/>
+      <p:pic>
+        <p:nvPicPr>
+          <p:cNvPr id="2" name="Picture 1" descr="Slide-19-image-1.png"/>
+          <p:cNvPicPr>
+            <a:picLocks noChangeAspect="1"/>
+          </p:cNvPicPr>
+          <p:nvPr/>
+        </p:nvPicPr>
+        <p:blipFill>
+          <a:blip r:embed="rId2"/>
+          <a:stretch>
+            <a:fillRect/>
+          </a:stretch>
+        </p:blipFill>
+        <p:spPr>
+          <a:xfrm>
+            <a:off x="0" y="0"/>
+            <a:ext cx="12191695" cy="6858000"/>
+          </a:xfrm>
+          <a:prstGeom prst="rect">
+            <a:avLst/>
+          </a:prstGeom>
+        </p:spPr>
+      </p:pic>
     </p:spTree>
   </p:cSld>
   <p:clrMapOvr>
@@ -4454,6 +9211,14 @@
 <file path=ppt/slides/slide5.xml><?xml version="1.0" encoding="utf-8"?>
 <p:sld xmlns:a="http://schemas.openxmlformats.org/drawingml/2006/main" xmlns:p="http://schemas.openxmlformats.org/presentationml/2006/main" xmlns:r="http://schemas.openxmlformats.org/officeDocument/2006/relationships">
   <p:cSld>
+    <p:bg>
+      <p:bgPr>
+        <a:solidFill>
+          <a:srgbClr val="141210"/>
+        </a:solidFill>
+        <a:effectLst/>
+      </p:bgPr>
+    </p:bg>
     <p:spTree>
       <p:nvGrpSpPr>
         <p:cNvPr id="1" name=""/>
@@ -4463,69 +9228,885 @@
       <p:grpSpPr/>
       <p:sp>
         <p:nvSpPr>
-          <p:cNvPr id="2" name="Title 1"/>
-          <p:cNvSpPr>
-            <a:spLocks noGrp="1"/>
-          </p:cNvSpPr>
-          <p:nvPr>
-            <p:ph type="title"/>
-          </p:nvPr>
-        </p:nvSpPr>
-        <p:spPr/>
-        <p:txBody>
-          <a:bodyPr/>
-          <a:lstStyle/>
-          <a:p>
-            <a:r>
-              <a:t>Scope &amp; title logic</a:t>
-            </a:r>
-          </a:p>
-        </p:txBody>
-      </p:sp>
-      <p:sp>
-        <p:nvSpPr>
-          <p:cNvPr id="3" name="Content Placeholder 2"/>
-          <p:cNvSpPr>
-            <a:spLocks noGrp="1"/>
-          </p:cNvSpPr>
-          <p:nvPr>
-            <p:ph idx="1"/>
-          </p:nvPr>
-        </p:nvSpPr>
-        <p:spPr/>
-        <p:txBody>
-          <a:bodyPr/>
-          <a:lstStyle/>
-          <a:p>
-            <a:pPr>
-              <a:defRPr sz="1600"/>
-            </a:pPr>
-            <a:r>
-              <a:t>Main title foregrounds extinction and remembrance: this is not de-extinction marketing.</a:t>
-            </a:r>
-          </a:p>
-          <a:p>
-            <a:pPr>
-              <a:defRPr sz="1600"/>
-            </a:pPr>
-            <a:r>
-              <a:t>“Umwelt Hypothesis Dossiers” signals that each species is a folder of testable claims, not a fantasy safari.</a:t>
-            </a:r>
-          </a:p>
-          <a:p>
-            <a:pPr>
-              <a:defRPr sz="1600"/>
-            </a:pPr>
-            <a:r>
-              <a:t>“Sensory Time Capsule” emphasizes temporal niche - how a species lived in day, season, synchrony, and atmosphere.</a:t>
-            </a:r>
-          </a:p>
-          <a:p>
-            <a:pPr>
-              <a:defRPr sz="1600"/>
-            </a:pPr>
-            <a:r>
-              <a:t>Locked scope: two deep dossiers only - woolly mammoth + thylacine.</a:t>
+          <p:cNvPr id="2" name="Rectangle 1"/>
+          <p:cNvSpPr/>
+          <p:nvPr/>
+        </p:nvSpPr>
+        <p:spPr>
+          <a:xfrm>
+            <a:off x="0" y="0"/>
+            <a:ext cx="12191695" cy="164592"/>
+          </a:xfrm>
+          <a:prstGeom prst="rect">
+            <a:avLst/>
+          </a:prstGeom>
+          <a:solidFill>
+            <a:srgbClr val="C45C2A"/>
+          </a:solidFill>
+          <a:ln>
+            <a:noFill/>
+          </a:ln>
+        </p:spPr>
+        <p:style>
+          <a:lnRef idx="1">
+            <a:schemeClr val="accent1"/>
+          </a:lnRef>
+          <a:fillRef idx="3">
+            <a:schemeClr val="accent1"/>
+          </a:fillRef>
+          <a:effectRef idx="2">
+            <a:schemeClr val="accent1"/>
+          </a:effectRef>
+          <a:fontRef idx="minor">
+            <a:schemeClr val="lt1"/>
+          </a:fontRef>
+        </p:style>
+        <p:txBody>
+          <a:bodyPr rtlCol="0" anchor="ctr"/>
+          <a:lstStyle/>
+          <a:p>
+            <a:pPr algn="ctr"/>
+          </a:p>
+        </p:txBody>
+      </p:sp>
+      <p:sp>
+        <p:nvSpPr>
+          <p:cNvPr id="3" name="Rectangle 2"/>
+          <p:cNvSpPr/>
+          <p:nvPr/>
+        </p:nvSpPr>
+        <p:spPr>
+          <a:xfrm>
+            <a:off x="9052560" y="164592"/>
+            <a:ext cx="3136392" cy="6693408"/>
+          </a:xfrm>
+          <a:prstGeom prst="rect">
+            <a:avLst/>
+          </a:prstGeom>
+          <a:solidFill>
+            <a:srgbClr val="1E1A17"/>
+          </a:solidFill>
+          <a:ln>
+            <a:noFill/>
+          </a:ln>
+        </p:spPr>
+        <p:style>
+          <a:lnRef idx="1">
+            <a:schemeClr val="accent1"/>
+          </a:lnRef>
+          <a:fillRef idx="3">
+            <a:schemeClr val="accent1"/>
+          </a:fillRef>
+          <a:effectRef idx="2">
+            <a:schemeClr val="accent1"/>
+          </a:effectRef>
+          <a:fontRef idx="minor">
+            <a:schemeClr val="lt1"/>
+          </a:fontRef>
+        </p:style>
+        <p:txBody>
+          <a:bodyPr rtlCol="0" anchor="ctr"/>
+          <a:lstStyle/>
+          <a:p>
+            <a:pPr algn="ctr"/>
+          </a:p>
+        </p:txBody>
+      </p:sp>
+      <p:sp>
+        <p:nvSpPr>
+          <p:cNvPr id="4" name="TextBox 3"/>
+          <p:cNvSpPr txBox="1"/>
+          <p:nvPr/>
+        </p:nvSpPr>
+        <p:spPr>
+          <a:xfrm>
+            <a:off x="640080" y="411480"/>
+            <a:ext cx="4389120" cy="292608"/>
+          </a:xfrm>
+          <a:prstGeom prst="rect">
+            <a:avLst/>
+          </a:prstGeom>
+          <a:noFill/>
+        </p:spPr>
+        <p:txBody>
+          <a:bodyPr wrap="none">
+            <a:spAutoFit/>
+          </a:bodyPr>
+          <a:lstStyle/>
+          <a:p>
+            <a:r>
+              <a:rPr sz="1300" b="1">
+                <a:solidFill>
+                  <a:srgbClr val="C45C2A"/>
+                </a:solidFill>
+                <a:latin typeface="Helvetica Neue"/>
+              </a:rPr>
+              <a:t>HERO SPECIES</a:t>
+            </a:r>
+          </a:p>
+        </p:txBody>
+      </p:sp>
+      <p:sp>
+        <p:nvSpPr>
+          <p:cNvPr id="5" name="TextBox 4"/>
+          <p:cNvSpPr txBox="1"/>
+          <p:nvPr/>
+        </p:nvSpPr>
+        <p:spPr>
+          <a:xfrm>
+            <a:off x="640080" y="777240"/>
+            <a:ext cx="9601200" cy="914400"/>
+          </a:xfrm>
+          <a:prstGeom prst="rect">
+            <a:avLst/>
+          </a:prstGeom>
+          <a:noFill/>
+        </p:spPr>
+        <p:txBody>
+          <a:bodyPr wrap="square">
+            <a:spAutoFit/>
+          </a:bodyPr>
+          <a:lstStyle/>
+          <a:p>
+            <a:r>
+              <a:rPr sz="2800" b="1">
+                <a:solidFill>
+                  <a:srgbClr val="E6DFD6"/>
+                </a:solidFill>
+                <a:latin typeface="Helvetica Neue"/>
+              </a:rPr>
+              <a:t>Mammoth + thylacine dossiers (two deep case studies)</a:t>
+            </a:r>
+          </a:p>
+        </p:txBody>
+      </p:sp>
+      <p:sp>
+        <p:nvSpPr>
+          <p:cNvPr id="6" name="Rounded Rectangle 5"/>
+          <p:cNvSpPr/>
+          <p:nvPr/>
+        </p:nvSpPr>
+        <p:spPr>
+          <a:xfrm>
+            <a:off x="640080" y="1783080"/>
+            <a:ext cx="3154680" cy="3566160"/>
+          </a:xfrm>
+          <a:prstGeom prst="roundRect">
+            <a:avLst/>
+          </a:prstGeom>
+          <a:solidFill>
+            <a:srgbClr val="1E1A17"/>
+          </a:solidFill>
+          <a:ln>
+            <a:solidFill>
+              <a:srgbClr val="6B7A8F"/>
+            </a:solidFill>
+          </a:ln>
+        </p:spPr>
+        <p:style>
+          <a:lnRef idx="1">
+            <a:schemeClr val="accent1"/>
+          </a:lnRef>
+          <a:fillRef idx="3">
+            <a:schemeClr val="accent1"/>
+          </a:fillRef>
+          <a:effectRef idx="2">
+            <a:schemeClr val="accent1"/>
+          </a:effectRef>
+          <a:fontRef idx="minor">
+            <a:schemeClr val="lt1"/>
+          </a:fontRef>
+        </p:style>
+        <p:txBody>
+          <a:bodyPr rtlCol="0" anchor="ctr"/>
+          <a:lstStyle/>
+          <a:p>
+            <a:pPr algn="ctr"/>
+          </a:p>
+        </p:txBody>
+      </p:sp>
+      <p:sp>
+        <p:nvSpPr>
+          <p:cNvPr id="7" name="TextBox 6"/>
+          <p:cNvSpPr txBox="1"/>
+          <p:nvPr/>
+        </p:nvSpPr>
+        <p:spPr>
+          <a:xfrm>
+            <a:off x="804671" y="1938528"/>
+            <a:ext cx="2825496" cy="411480"/>
+          </a:xfrm>
+          <a:prstGeom prst="rect">
+            <a:avLst/>
+          </a:prstGeom>
+          <a:noFill/>
+        </p:spPr>
+        <p:txBody>
+          <a:bodyPr wrap="none">
+            <a:spAutoFit/>
+          </a:bodyPr>
+          <a:lstStyle/>
+          <a:p>
+            <a:r>
+              <a:rPr sz="1800" b="1">
+                <a:solidFill>
+                  <a:srgbClr val="E6DFD6"/>
+                </a:solidFill>
+                <a:latin typeface="Helvetica Neue"/>
+              </a:rPr>
+              <a:t>Woolly mammoth</a:t>
+            </a:r>
+          </a:p>
+        </p:txBody>
+      </p:sp>
+      <p:sp>
+        <p:nvSpPr>
+          <p:cNvPr id="8" name="TextBox 7"/>
+          <p:cNvSpPr txBox="1"/>
+          <p:nvPr/>
+        </p:nvSpPr>
+        <p:spPr>
+          <a:xfrm>
+            <a:off x="804671" y="2423160"/>
+            <a:ext cx="2825496" cy="2651760"/>
+          </a:xfrm>
+          <a:prstGeom prst="rect">
+            <a:avLst/>
+          </a:prstGeom>
+          <a:noFill/>
+        </p:spPr>
+        <p:txBody>
+          <a:bodyPr wrap="square" lIns="0" rIns="0" tIns="0">
+            <a:spAutoFit/>
+          </a:bodyPr>
+          <a:lstStyle/>
+          <a:p>
+            <a:pPr>
+              <a:spcAft>
+                <a:spcPts val="1000"/>
+              </a:spcAft>
+              <a:defRPr sz="1400">
+                <a:solidFill>
+                  <a:srgbClr val="E6DFD6"/>
+                </a:solidFill>
+                <a:latin typeface="Helvetica Neue"/>
+              </a:defRPr>
+            </a:pPr>
+            <a:r>
+              <a:t>Tusk isotope trails</a:t>
+            </a:r>
+          </a:p>
+          <a:p>
+            <a:pPr>
+              <a:spcAft>
+                <a:spcPts val="1000"/>
+              </a:spcAft>
+              <a:defRPr sz="1400">
+                <a:solidFill>
+                  <a:srgbClr val="E6DFD6"/>
+                </a:solidFill>
+                <a:latin typeface="Helvetica Neue"/>
+              </a:defRPr>
+            </a:pPr>
+            <a:r>
+              <a:t>Arctic photoperiod</a:t>
+            </a:r>
+          </a:p>
+          <a:p>
+            <a:pPr>
+              <a:spcAft>
+                <a:spcPts val="1000"/>
+              </a:spcAft>
+              <a:defRPr sz="1400">
+                <a:solidFill>
+                  <a:srgbClr val="E6DFD6"/>
+                </a:solidFill>
+                <a:latin typeface="Helvetica Neue"/>
+              </a:defRPr>
+            </a:pPr>
+            <a:r>
+              <a:t>Comparative genomics</a:t>
+            </a:r>
+          </a:p>
+          <a:p>
+            <a:pPr>
+              <a:spcAft>
+                <a:spcPts val="1000"/>
+              </a:spcAft>
+              <a:defRPr sz="1400">
+                <a:solidFill>
+                  <a:srgbClr val="E6DFD6"/>
+                </a:solidFill>
+                <a:latin typeface="Helvetica Neue"/>
+              </a:defRPr>
+            </a:pPr>
+            <a:r>
+              <a:t>Ground-level pacing</a:t>
+            </a:r>
+          </a:p>
+          <a:p>
+            <a:pPr>
+              <a:spcAft>
+                <a:spcPts val="1000"/>
+              </a:spcAft>
+              <a:defRPr sz="1400">
+                <a:solidFill>
+                  <a:srgbClr val="E6DFD6"/>
+                </a:solidFill>
+                <a:latin typeface="Helvetica Neue"/>
+              </a:defRPr>
+            </a:pPr>
+            <a:r>
+              <a:t>Slow seasonal time</a:t>
+            </a:r>
+          </a:p>
+        </p:txBody>
+      </p:sp>
+      <p:sp>
+        <p:nvSpPr>
+          <p:cNvPr id="9" name="Rounded Rectangle 8"/>
+          <p:cNvSpPr/>
+          <p:nvPr/>
+        </p:nvSpPr>
+        <p:spPr>
+          <a:xfrm>
+            <a:off x="3886200" y="1783080"/>
+            <a:ext cx="3154680" cy="3566160"/>
+          </a:xfrm>
+          <a:prstGeom prst="roundRect">
+            <a:avLst/>
+          </a:prstGeom>
+          <a:solidFill>
+            <a:srgbClr val="1E1A17"/>
+          </a:solidFill>
+          <a:ln>
+            <a:solidFill>
+              <a:srgbClr val="6B7A8F"/>
+            </a:solidFill>
+          </a:ln>
+        </p:spPr>
+        <p:style>
+          <a:lnRef idx="1">
+            <a:schemeClr val="accent1"/>
+          </a:lnRef>
+          <a:fillRef idx="3">
+            <a:schemeClr val="accent1"/>
+          </a:fillRef>
+          <a:effectRef idx="2">
+            <a:schemeClr val="accent1"/>
+          </a:effectRef>
+          <a:fontRef idx="minor">
+            <a:schemeClr val="lt1"/>
+          </a:fontRef>
+        </p:style>
+        <p:txBody>
+          <a:bodyPr rtlCol="0" anchor="ctr"/>
+          <a:lstStyle/>
+          <a:p>
+            <a:pPr algn="ctr"/>
+          </a:p>
+        </p:txBody>
+      </p:sp>
+      <p:sp>
+        <p:nvSpPr>
+          <p:cNvPr id="10" name="TextBox 9"/>
+          <p:cNvSpPr txBox="1"/>
+          <p:nvPr/>
+        </p:nvSpPr>
+        <p:spPr>
+          <a:xfrm>
+            <a:off x="4050791" y="1938528"/>
+            <a:ext cx="2825496" cy="411480"/>
+          </a:xfrm>
+          <a:prstGeom prst="rect">
+            <a:avLst/>
+          </a:prstGeom>
+          <a:noFill/>
+        </p:spPr>
+        <p:txBody>
+          <a:bodyPr wrap="none">
+            <a:spAutoFit/>
+          </a:bodyPr>
+          <a:lstStyle/>
+          <a:p>
+            <a:r>
+              <a:rPr sz="1800" b="1">
+                <a:solidFill>
+                  <a:srgbClr val="E6DFD6"/>
+                </a:solidFill>
+                <a:latin typeface="Helvetica Neue"/>
+              </a:rPr>
+              <a:t>Thylacine (Tasmanian tiger)</a:t>
+            </a:r>
+          </a:p>
+        </p:txBody>
+      </p:sp>
+      <p:sp>
+        <p:nvSpPr>
+          <p:cNvPr id="11" name="TextBox 10"/>
+          <p:cNvSpPr txBox="1"/>
+          <p:nvPr/>
+        </p:nvSpPr>
+        <p:spPr>
+          <a:xfrm>
+            <a:off x="4050791" y="2423160"/>
+            <a:ext cx="2825496" cy="2651760"/>
+          </a:xfrm>
+          <a:prstGeom prst="rect">
+            <a:avLst/>
+          </a:prstGeom>
+          <a:noFill/>
+        </p:spPr>
+        <p:txBody>
+          <a:bodyPr wrap="square" lIns="0" rIns="0" tIns="0">
+            <a:spAutoFit/>
+          </a:bodyPr>
+          <a:lstStyle/>
+          <a:p>
+            <a:pPr>
+              <a:spcAft>
+                <a:spcPts val="1000"/>
+              </a:spcAft>
+              <a:defRPr sz="1400">
+                <a:solidFill>
+                  <a:srgbClr val="E6DFD6"/>
+                </a:solidFill>
+                <a:latin typeface="Helvetica Neue"/>
+              </a:defRPr>
+            </a:pPr>
+            <a:r>
+              <a:t>Mass flock synchrony</a:t>
+            </a:r>
+          </a:p>
+          <a:p>
+            <a:pPr>
+              <a:spcAft>
+                <a:spcPts val="1000"/>
+              </a:spcAft>
+              <a:defRPr sz="1400">
+                <a:solidFill>
+                  <a:srgbClr val="E6DFD6"/>
+                </a:solidFill>
+                <a:latin typeface="Helvetica Neue"/>
+              </a:defRPr>
+            </a:pPr>
+            <a:r>
+              <a:t>Density thresholds</a:t>
+            </a:r>
+          </a:p>
+          <a:p>
+            <a:pPr>
+              <a:spcAft>
+                <a:spcPts val="1000"/>
+              </a:spcAft>
+              <a:defRPr sz="1400">
+                <a:solidFill>
+                  <a:srgbClr val="E6DFD6"/>
+                </a:solidFill>
+                <a:latin typeface="Helvetica Neue"/>
+              </a:defRPr>
+            </a:pPr>
+            <a:r>
+              <a:t>Social collapse</a:t>
+            </a:r>
+          </a:p>
+          <a:p>
+            <a:pPr>
+              <a:spcAft>
+                <a:spcPts val="1000"/>
+              </a:spcAft>
+              <a:defRPr sz="1400">
+                <a:solidFill>
+                  <a:srgbClr val="E6DFD6"/>
+                </a:solidFill>
+                <a:latin typeface="Helvetica Neue"/>
+              </a:defRPr>
+            </a:pPr>
+            <a:r>
+              <a:t>Sky-darkening scale</a:t>
+            </a:r>
+          </a:p>
+          <a:p>
+            <a:pPr>
+              <a:spcAft>
+                <a:spcPts val="1000"/>
+              </a:spcAft>
+              <a:defRPr sz="1400">
+                <a:solidFill>
+                  <a:srgbClr val="E6DFD6"/>
+                </a:solidFill>
+                <a:latin typeface="Helvetica Neue"/>
+              </a:defRPr>
+            </a:pPr>
+            <a:r>
+              <a:t>Thinness as silence</a:t>
+            </a:r>
+          </a:p>
+        </p:txBody>
+      </p:sp>
+      <p:sp>
+        <p:nvSpPr>
+          <p:cNvPr id="12" name="Rounded Rectangle 11"/>
+          <p:cNvSpPr/>
+          <p:nvPr/>
+        </p:nvSpPr>
+        <p:spPr>
+          <a:xfrm>
+            <a:off x="7132320" y="1783080"/>
+            <a:ext cx="3566160" cy="3566160"/>
+          </a:xfrm>
+          <a:prstGeom prst="roundRect">
+            <a:avLst/>
+          </a:prstGeom>
+          <a:solidFill>
+            <a:srgbClr val="1E1A17"/>
+          </a:solidFill>
+          <a:ln>
+            <a:solidFill>
+              <a:srgbClr val="6B7A8F"/>
+            </a:solidFill>
+          </a:ln>
+        </p:spPr>
+        <p:style>
+          <a:lnRef idx="1">
+            <a:schemeClr val="accent1"/>
+          </a:lnRef>
+          <a:fillRef idx="3">
+            <a:schemeClr val="accent1"/>
+          </a:fillRef>
+          <a:effectRef idx="2">
+            <a:schemeClr val="accent1"/>
+          </a:effectRef>
+          <a:fontRef idx="minor">
+            <a:schemeClr val="lt1"/>
+          </a:fontRef>
+        </p:style>
+        <p:txBody>
+          <a:bodyPr rtlCol="0" anchor="ctr"/>
+          <a:lstStyle/>
+          <a:p>
+            <a:pPr algn="ctr"/>
+          </a:p>
+        </p:txBody>
+      </p:sp>
+      <p:sp>
+        <p:nvSpPr>
+          <p:cNvPr id="13" name="TextBox 12"/>
+          <p:cNvSpPr txBox="1"/>
+          <p:nvPr/>
+        </p:nvSpPr>
+        <p:spPr>
+          <a:xfrm>
+            <a:off x="7296912" y="1938528"/>
+            <a:ext cx="3236976" cy="411480"/>
+          </a:xfrm>
+          <a:prstGeom prst="rect">
+            <a:avLst/>
+          </a:prstGeom>
+          <a:noFill/>
+        </p:spPr>
+        <p:txBody>
+          <a:bodyPr wrap="none">
+            <a:spAutoFit/>
+          </a:bodyPr>
+          <a:lstStyle/>
+          <a:p>
+            <a:r>
+              <a:rPr sz="1800" b="1">
+                <a:solidFill>
+                  <a:srgbClr val="E6DFD6"/>
+                </a:solidFill>
+                <a:latin typeface="Helvetica Neue"/>
+              </a:rPr>
+              <a:t>Memory sites MVP</a:t>
+            </a:r>
+          </a:p>
+        </p:txBody>
+      </p:sp>
+      <p:sp>
+        <p:nvSpPr>
+          <p:cNvPr id="14" name="TextBox 13"/>
+          <p:cNvSpPr txBox="1"/>
+          <p:nvPr/>
+        </p:nvSpPr>
+        <p:spPr>
+          <a:xfrm>
+            <a:off x="7296912" y="2423160"/>
+            <a:ext cx="3236976" cy="2651760"/>
+          </a:xfrm>
+          <a:prstGeom prst="rect">
+            <a:avLst/>
+          </a:prstGeom>
+          <a:noFill/>
+        </p:spPr>
+        <p:txBody>
+          <a:bodyPr wrap="square" lIns="0" rIns="0" tIns="0">
+            <a:spAutoFit/>
+          </a:bodyPr>
+          <a:lstStyle/>
+          <a:p>
+            <a:pPr>
+              <a:spcAft>
+                <a:spcPts val="1000"/>
+              </a:spcAft>
+              <a:defRPr sz="1400">
+                <a:solidFill>
+                  <a:srgbClr val="E6DFD6"/>
+                </a:solidFill>
+                <a:latin typeface="Helvetica Neue"/>
+              </a:defRPr>
+            </a:pPr>
+            <a:r>
+              <a:t>2-5 curated pins</a:t>
+            </a:r>
+          </a:p>
+          <a:p>
+            <a:pPr>
+              <a:spcAft>
+                <a:spcPts val="1000"/>
+              </a:spcAft>
+              <a:defRPr sz="1400">
+                <a:solidFill>
+                  <a:srgbClr val="E6DFD6"/>
+                </a:solidFill>
+                <a:latin typeface="Helvetica Neue"/>
+              </a:defRPr>
+            </a:pPr>
+            <a:r>
+              <a:t>Last ranges and dates</a:t>
+            </a:r>
+          </a:p>
+          <a:p>
+            <a:pPr>
+              <a:spcAft>
+                <a:spcPts val="1000"/>
+              </a:spcAft>
+              <a:defRPr sz="1400">
+                <a:solidFill>
+                  <a:srgbClr val="E6DFD6"/>
+                </a:solidFill>
+                <a:latin typeface="Helvetica Neue"/>
+              </a:defRPr>
+            </a:pPr>
+            <a:r>
+              <a:t>Single-species deep links</a:t>
+            </a:r>
+          </a:p>
+          <a:p>
+            <a:pPr>
+              <a:spcAft>
+                <a:spcPts val="1000"/>
+              </a:spcAft>
+              <a:defRPr sz="1400">
+                <a:solidFill>
+                  <a:srgbClr val="E6DFD6"/>
+                </a:solidFill>
+                <a:latin typeface="Helvetica Neue"/>
+              </a:defRPr>
+            </a:pPr>
+            <a:r>
+              <a:t>No global atlas in MVP</a:t>
+            </a:r>
+          </a:p>
+        </p:txBody>
+      </p:sp>
+      <p:sp>
+        <p:nvSpPr>
+          <p:cNvPr id="15" name="TextBox 14"/>
+          <p:cNvSpPr txBox="1"/>
+          <p:nvPr/>
+        </p:nvSpPr>
+        <p:spPr>
+          <a:xfrm>
+            <a:off x="548640" y="6263640"/>
+            <a:ext cx="10881360" cy="320040"/>
+          </a:xfrm>
+          <a:prstGeom prst="rect">
+            <a:avLst/>
+          </a:prstGeom>
+          <a:noFill/>
+        </p:spPr>
+        <p:txBody>
+          <a:bodyPr wrap="none">
+            <a:spAutoFit/>
+          </a:bodyPr>
+          <a:lstStyle/>
+          <a:p>
+            <a:pPr algn="l"/>
+            <a:r>
+              <a:rPr sz="900">
+                <a:solidFill>
+                  <a:srgbClr val="9A8F84"/>
+                </a:solidFill>
+                <a:latin typeface="Helvetica Neue"/>
+              </a:rPr>
+              <a:t>Extinction Archive · Biodigital chronobiology · BDC 2026  5 / 12</a:t>
+            </a:r>
+          </a:p>
+        </p:txBody>
+      </p:sp>
+    </p:spTree>
+  </p:cSld>
+  <p:clrMapOvr>
+    <a:masterClrMapping/>
+  </p:clrMapOvr>
+</p:sld>
+</file>
+
+<file path=ppt/slides/slide50.xml><?xml version="1.0" encoding="utf-8"?>
+<p:sld xmlns:a="http://schemas.openxmlformats.org/drawingml/2006/main" xmlns:p="http://schemas.openxmlformats.org/presentationml/2006/main" xmlns:r="http://schemas.openxmlformats.org/officeDocument/2006/relationships">
+  <p:cSld>
+    <p:spTree>
+      <p:nvGrpSpPr>
+        <p:cNvPr id="1" name=""/>
+        <p:cNvGrpSpPr/>
+        <p:nvPr/>
+      </p:nvGrpSpPr>
+      <p:grpSpPr/>
+      <p:pic>
+        <p:nvPicPr>
+          <p:cNvPr id="2" name="Picture 1" descr="Slide-20-image-1.png"/>
+          <p:cNvPicPr>
+            <a:picLocks noChangeAspect="1"/>
+          </p:cNvPicPr>
+          <p:nvPr/>
+        </p:nvPicPr>
+        <p:blipFill>
+          <a:blip r:embed="rId2"/>
+          <a:stretch>
+            <a:fillRect/>
+          </a:stretch>
+        </p:blipFill>
+        <p:spPr>
+          <a:xfrm>
+            <a:off x="0" y="0"/>
+            <a:ext cx="12191695" cy="6858000"/>
+          </a:xfrm>
+          <a:prstGeom prst="rect">
+            <a:avLst/>
+          </a:prstGeom>
+        </p:spPr>
+      </p:pic>
+    </p:spTree>
+  </p:cSld>
+  <p:clrMapOvr>
+    <a:masterClrMapping/>
+  </p:clrMapOvr>
+</p:sld>
+</file>
+
+<file path=ppt/slides/slide51.xml><?xml version="1.0" encoding="utf-8"?>
+<p:sld xmlns:a="http://schemas.openxmlformats.org/drawingml/2006/main" xmlns:p="http://schemas.openxmlformats.org/presentationml/2006/main" xmlns:r="http://schemas.openxmlformats.org/officeDocument/2006/relationships">
+  <p:cSld>
+    <p:spTree>
+      <p:nvGrpSpPr>
+        <p:cNvPr id="1" name=""/>
+        <p:cNvGrpSpPr/>
+        <p:nvPr/>
+      </p:nvGrpSpPr>
+      <p:grpSpPr/>
+      <p:pic>
+        <p:nvPicPr>
+          <p:cNvPr id="2" name="Picture 1" descr="Slide-21-image-1.png"/>
+          <p:cNvPicPr>
+            <a:picLocks noChangeAspect="1"/>
+          </p:cNvPicPr>
+          <p:nvPr/>
+        </p:nvPicPr>
+        <p:blipFill>
+          <a:blip r:embed="rId2"/>
+          <a:stretch>
+            <a:fillRect/>
+          </a:stretch>
+        </p:blipFill>
+        <p:spPr>
+          <a:xfrm>
+            <a:off x="0" y="0"/>
+            <a:ext cx="12191695" cy="6858000"/>
+          </a:xfrm>
+          <a:prstGeom prst="rect">
+            <a:avLst/>
+          </a:prstGeom>
+        </p:spPr>
+      </p:pic>
+    </p:spTree>
+  </p:cSld>
+  <p:clrMapOvr>
+    <a:masterClrMapping/>
+  </p:clrMapOvr>
+</p:sld>
+</file>
+
+<file path=ppt/slides/slide52.xml><?xml version="1.0" encoding="utf-8"?>
+<p:sld xmlns:a="http://schemas.openxmlformats.org/drawingml/2006/main" xmlns:p="http://schemas.openxmlformats.org/presentationml/2006/main" xmlns:r="http://schemas.openxmlformats.org/officeDocument/2006/relationships">
+  <p:cSld>
+    <p:spTree>
+      <p:nvGrpSpPr>
+        <p:cNvPr id="1" name=""/>
+        <p:cNvGrpSpPr/>
+        <p:nvPr/>
+      </p:nvGrpSpPr>
+      <p:grpSpPr/>
+      <p:sp>
+        <p:nvSpPr>
+          <p:cNvPr id="2" name="TextBox 1"/>
+          <p:cNvSpPr txBox="1"/>
+          <p:nvPr/>
+        </p:nvSpPr>
+        <p:spPr>
+          <a:xfrm>
+            <a:off x="594360" y="594360"/>
+            <a:ext cx="11002975" cy="5669280"/>
+          </a:xfrm>
+          <a:prstGeom prst="rect">
+            <a:avLst/>
+          </a:prstGeom>
+          <a:noFill/>
+        </p:spPr>
+        <p:txBody>
+          <a:bodyPr wrap="square">
+            <a:spAutoFit/>
+          </a:bodyPr>
+          <a:lstStyle/>
+          <a:p>
+            <a:pPr>
+              <a:defRPr sz="3000" b="1"/>
+            </a:pPr>
+            <a:r>
+              <a:t>Thank you</a:t>
+            </a:r>
+          </a:p>
+          <a:p>
+            <a:pPr>
+              <a:spcAft>
+                <a:spcPts val="300"/>
+              </a:spcAft>
+              <a:defRPr sz="1400"/>
+            </a:pPr>
+            <a:r>
+              <a:t>Archive of Extinction — Umwelt Hypothesis Dossiers</a:t>
+            </a:r>
+          </a:p>
+          <a:p>
+            <a:pPr>
+              <a:spcAft>
+                <a:spcPts val="300"/>
+              </a:spcAft>
+              <a:defRPr sz="1400"/>
+            </a:pPr>
+            <a:r>
+              <a:t>Macau University · Biodesign Challenge 2026 · Biodigital Excellence</a:t>
+            </a:r>
+          </a:p>
+          <a:p>
+            <a:pPr>
+              <a:spcAft>
+                <a:spcPts val="300"/>
+              </a:spcAft>
+              <a:defRPr sz="1400"/>
+            </a:pPr>
+            <a:r>
+              <a:t>GUO XIAO YUE (MC569254) · LIU JIA QUN (MC569293) · Mentor: Atticus SIMS</a:t>
             </a:r>
           </a:p>
         </p:txBody>
@@ -4541,6 +10122,14 @@
 <file path=ppt/slides/slide6.xml><?xml version="1.0" encoding="utf-8"?>
 <p:sld xmlns:a="http://schemas.openxmlformats.org/drawingml/2006/main" xmlns:p="http://schemas.openxmlformats.org/presentationml/2006/main" xmlns:r="http://schemas.openxmlformats.org/officeDocument/2006/relationships">
   <p:cSld>
+    <p:bg>
+      <p:bgPr>
+        <a:solidFill>
+          <a:srgbClr val="141210"/>
+        </a:solidFill>
+        <a:effectLst/>
+      </p:bgPr>
+    </p:bg>
     <p:spTree>
       <p:nvGrpSpPr>
         <p:cNvPr id="1" name=""/>
@@ -4550,61 +10139,373 @@
       <p:grpSpPr/>
       <p:sp>
         <p:nvSpPr>
-          <p:cNvPr id="2" name="Title 1"/>
-          <p:cNvSpPr>
-            <a:spLocks noGrp="1"/>
-          </p:cNvSpPr>
-          <p:nvPr>
-            <p:ph type="title"/>
-          </p:nvPr>
-        </p:nvSpPr>
-        <p:spPr/>
-        <p:txBody>
-          <a:bodyPr/>
-          <a:lstStyle/>
-          <a:p>
-            <a:r>
-              <a:t>Core architecture</a:t>
-            </a:r>
-          </a:p>
-        </p:txBody>
-      </p:sp>
-      <p:sp>
-        <p:nvSpPr>
-          <p:cNvPr id="3" name="Content Placeholder 2"/>
-          <p:cNvSpPr>
-            <a:spLocks noGrp="1"/>
-          </p:cNvSpPr>
-          <p:nvPr>
-            <p:ph idx="1"/>
-          </p:nvPr>
-        </p:nvSpPr>
-        <p:spPr/>
-        <p:txBody>
-          <a:bodyPr/>
-          <a:lstStyle/>
-          <a:p>
-            <a:pPr>
-              <a:defRPr sz="1600"/>
-            </a:pPr>
-            <a:r>
-              <a:t>Dossier: evidence cards, temporal niche, sensory proxies, extinction mechanism, constrained 360 scene.</a:t>
-            </a:r>
-          </a:p>
-          <a:p>
-            <a:pPr>
-              <a:defRPr sz="1600"/>
-            </a:pPr>
-            <a:r>
-              <a:t>Mixer: seasonal layers, diel rhythm, coexistence density, harmony -&gt; conflict as sonic / temporal retuning.</a:t>
-            </a:r>
-          </a:p>
-          <a:p>
-            <a:pPr>
-              <a:defRPr sz="1600"/>
-            </a:pPr>
-            <a:r>
-              <a:t>Ethics console: evidence gate + branching trade-offs around conservation, law, ecosystem risk, and sovereignty.</a:t>
+          <p:cNvPr id="2" name="Rectangle 1"/>
+          <p:cNvSpPr/>
+          <p:nvPr/>
+        </p:nvSpPr>
+        <p:spPr>
+          <a:xfrm>
+            <a:off x="0" y="0"/>
+            <a:ext cx="12191695" cy="164592"/>
+          </a:xfrm>
+          <a:prstGeom prst="rect">
+            <a:avLst/>
+          </a:prstGeom>
+          <a:solidFill>
+            <a:srgbClr val="C45C2A"/>
+          </a:solidFill>
+          <a:ln>
+            <a:noFill/>
+          </a:ln>
+        </p:spPr>
+        <p:style>
+          <a:lnRef idx="1">
+            <a:schemeClr val="accent1"/>
+          </a:lnRef>
+          <a:fillRef idx="3">
+            <a:schemeClr val="accent1"/>
+          </a:fillRef>
+          <a:effectRef idx="2">
+            <a:schemeClr val="accent1"/>
+          </a:effectRef>
+          <a:fontRef idx="minor">
+            <a:schemeClr val="lt1"/>
+          </a:fontRef>
+        </p:style>
+        <p:txBody>
+          <a:bodyPr rtlCol="0" anchor="ctr"/>
+          <a:lstStyle/>
+          <a:p>
+            <a:pPr algn="ctr"/>
+          </a:p>
+        </p:txBody>
+      </p:sp>
+      <p:sp>
+        <p:nvSpPr>
+          <p:cNvPr id="3" name="Rectangle 2"/>
+          <p:cNvSpPr/>
+          <p:nvPr/>
+        </p:nvSpPr>
+        <p:spPr>
+          <a:xfrm>
+            <a:off x="9052560" y="164592"/>
+            <a:ext cx="3136392" cy="6693408"/>
+          </a:xfrm>
+          <a:prstGeom prst="rect">
+            <a:avLst/>
+          </a:prstGeom>
+          <a:solidFill>
+            <a:srgbClr val="1E1A17"/>
+          </a:solidFill>
+          <a:ln>
+            <a:noFill/>
+          </a:ln>
+        </p:spPr>
+        <p:style>
+          <a:lnRef idx="1">
+            <a:schemeClr val="accent1"/>
+          </a:lnRef>
+          <a:fillRef idx="3">
+            <a:schemeClr val="accent1"/>
+          </a:fillRef>
+          <a:effectRef idx="2">
+            <a:schemeClr val="accent1"/>
+          </a:effectRef>
+          <a:fontRef idx="minor">
+            <a:schemeClr val="lt1"/>
+          </a:fontRef>
+        </p:style>
+        <p:txBody>
+          <a:bodyPr rtlCol="0" anchor="ctr"/>
+          <a:lstStyle/>
+          <a:p>
+            <a:pPr algn="ctr"/>
+          </a:p>
+        </p:txBody>
+      </p:sp>
+      <p:sp>
+        <p:nvSpPr>
+          <p:cNvPr id="4" name="TextBox 3"/>
+          <p:cNvSpPr txBox="1"/>
+          <p:nvPr/>
+        </p:nvSpPr>
+        <p:spPr>
+          <a:xfrm>
+            <a:off x="640080" y="411480"/>
+            <a:ext cx="4389120" cy="292608"/>
+          </a:xfrm>
+          <a:prstGeom prst="rect">
+            <a:avLst/>
+          </a:prstGeom>
+          <a:noFill/>
+        </p:spPr>
+        <p:txBody>
+          <a:bodyPr wrap="none">
+            <a:spAutoFit/>
+          </a:bodyPr>
+          <a:lstStyle/>
+          <a:p>
+            <a:r>
+              <a:rPr sz="1300" b="1">
+                <a:solidFill>
+                  <a:srgbClr val="C45C2A"/>
+                </a:solidFill>
+                <a:latin typeface="Helvetica Neue"/>
+              </a:rPr>
+              <a:t>BIOLOGICAL LAYER</a:t>
+            </a:r>
+          </a:p>
+        </p:txBody>
+      </p:sp>
+      <p:sp>
+        <p:nvSpPr>
+          <p:cNvPr id="5" name="TextBox 4"/>
+          <p:cNvSpPr txBox="1"/>
+          <p:nvPr/>
+        </p:nvSpPr>
+        <p:spPr>
+          <a:xfrm>
+            <a:off x="640080" y="777240"/>
+            <a:ext cx="7040880" cy="914400"/>
+          </a:xfrm>
+          <a:prstGeom prst="rect">
+            <a:avLst/>
+          </a:prstGeom>
+          <a:noFill/>
+        </p:spPr>
+        <p:txBody>
+          <a:bodyPr wrap="square">
+            <a:spAutoFit/>
+          </a:bodyPr>
+          <a:lstStyle/>
+          <a:p>
+            <a:r>
+              <a:rPr sz="2800" b="1">
+                <a:solidFill>
+                  <a:srgbClr val="E6DFD6"/>
+                </a:solidFill>
+                <a:latin typeface="Helvetica Neue"/>
+              </a:rPr>
+              <a:t>Only traceable evidence enters the archive</a:t>
+            </a:r>
+          </a:p>
+        </p:txBody>
+      </p:sp>
+      <p:sp>
+        <p:nvSpPr>
+          <p:cNvPr id="6" name="TextBox 5"/>
+          <p:cNvSpPr txBox="1"/>
+          <p:nvPr/>
+        </p:nvSpPr>
+        <p:spPr>
+          <a:xfrm>
+            <a:off x="731520" y="1828800"/>
+            <a:ext cx="6400800" cy="3474720"/>
+          </a:xfrm>
+          <a:prstGeom prst="rect">
+            <a:avLst/>
+          </a:prstGeom>
+          <a:noFill/>
+        </p:spPr>
+        <p:txBody>
+          <a:bodyPr wrap="square" lIns="0" rIns="0" tIns="0">
+            <a:spAutoFit/>
+          </a:bodyPr>
+          <a:lstStyle/>
+          <a:p>
+            <a:pPr>
+              <a:spcAft>
+                <a:spcPts val="1000"/>
+              </a:spcAft>
+              <a:defRPr sz="2000">
+                <a:solidFill>
+                  <a:srgbClr val="E6DFD6"/>
+                </a:solidFill>
+                <a:latin typeface="Helvetica Neue"/>
+              </a:defRPr>
+            </a:pPr>
+            <a:r>
+              <a:t>Migration isotopes, morphology as sensory proxy, comparative genomics, historical range data, and acoustic ecology of relatives.</a:t>
+            </a:r>
+          </a:p>
+          <a:p>
+            <a:pPr>
+              <a:spcAft>
+                <a:spcPts val="1000"/>
+              </a:spcAft>
+              <a:defRPr sz="2000">
+                <a:solidFill>
+                  <a:srgbClr val="E6DFD6"/>
+                </a:solidFill>
+                <a:latin typeface="Helvetica Neue"/>
+              </a:defRPr>
+            </a:pPr>
+            <a:r>
+              <a:t>Smell cues remain metaphorical or synesthetic only and are always labeled Speculative.</a:t>
+            </a:r>
+          </a:p>
+          <a:p>
+            <a:pPr>
+              <a:spcAft>
+                <a:spcPts val="1000"/>
+              </a:spcAft>
+              <a:defRPr sz="2000">
+                <a:solidFill>
+                  <a:srgbClr val="E6DFD6"/>
+                </a:solidFill>
+                <a:latin typeface="Helvetica Neue"/>
+              </a:defRPr>
+            </a:pPr>
+            <a:r>
+              <a:t>Every strong line in the UI is tagged: Cited, Modeled, or Speculative.</a:t>
+            </a:r>
+          </a:p>
+        </p:txBody>
+      </p:sp>
+      <p:sp>
+        <p:nvSpPr>
+          <p:cNvPr id="7" name="Rounded Rectangle 6"/>
+          <p:cNvSpPr/>
+          <p:nvPr/>
+        </p:nvSpPr>
+        <p:spPr>
+          <a:xfrm>
+            <a:off x="7726679" y="1554480"/>
+            <a:ext cx="3200400" cy="3291840"/>
+          </a:xfrm>
+          <a:prstGeom prst="roundRect">
+            <a:avLst/>
+          </a:prstGeom>
+          <a:solidFill>
+            <a:srgbClr val="1E1A17"/>
+          </a:solidFill>
+          <a:ln>
+            <a:solidFill>
+              <a:srgbClr val="6B7A8F"/>
+            </a:solidFill>
+          </a:ln>
+        </p:spPr>
+        <p:style>
+          <a:lnRef idx="1">
+            <a:schemeClr val="accent1"/>
+          </a:lnRef>
+          <a:fillRef idx="3">
+            <a:schemeClr val="accent1"/>
+          </a:fillRef>
+          <a:effectRef idx="2">
+            <a:schemeClr val="accent1"/>
+          </a:effectRef>
+          <a:fontRef idx="minor">
+            <a:schemeClr val="lt1"/>
+          </a:fontRef>
+        </p:style>
+        <p:txBody>
+          <a:bodyPr rtlCol="0" anchor="ctr"/>
+          <a:lstStyle/>
+          <a:p>
+            <a:pPr algn="ctr"/>
+          </a:p>
+        </p:txBody>
+      </p:sp>
+      <p:sp>
+        <p:nvSpPr>
+          <p:cNvPr id="8" name="TextBox 7"/>
+          <p:cNvSpPr txBox="1"/>
+          <p:nvPr/>
+        </p:nvSpPr>
+        <p:spPr>
+          <a:xfrm>
+            <a:off x="8001000" y="1828800"/>
+            <a:ext cx="2560320" cy="365760"/>
+          </a:xfrm>
+          <a:prstGeom prst="rect">
+            <a:avLst/>
+          </a:prstGeom>
+          <a:noFill/>
+        </p:spPr>
+        <p:txBody>
+          <a:bodyPr wrap="none">
+            <a:spAutoFit/>
+          </a:bodyPr>
+          <a:lstStyle/>
+          <a:p>
+            <a:r>
+              <a:rPr sz="1200" b="1">
+                <a:solidFill>
+                  <a:srgbClr val="5CB89A"/>
+                </a:solidFill>
+                <a:latin typeface="Helvetica Neue"/>
+              </a:rPr>
+              <a:t>RULE</a:t>
+            </a:r>
+          </a:p>
+        </p:txBody>
+      </p:sp>
+      <p:sp>
+        <p:nvSpPr>
+          <p:cNvPr id="9" name="TextBox 8"/>
+          <p:cNvSpPr txBox="1"/>
+          <p:nvPr/>
+        </p:nvSpPr>
+        <p:spPr>
+          <a:xfrm>
+            <a:off x="8001000" y="2240280"/>
+            <a:ext cx="2560320" cy="2194560"/>
+          </a:xfrm>
+          <a:prstGeom prst="rect">
+            <a:avLst/>
+          </a:prstGeom>
+          <a:noFill/>
+        </p:spPr>
+        <p:txBody>
+          <a:bodyPr wrap="none">
+            <a:spAutoFit/>
+          </a:bodyPr>
+          <a:lstStyle/>
+          <a:p>
+            <a:r>
+              <a:rPr sz="1600">
+                <a:solidFill>
+                  <a:srgbClr val="E6DFD6"/>
+                </a:solidFill>
+                <a:latin typeface="Helvetica Neue"/>
+              </a:rPr>
+              <a:t>If the biology can be removed and the piece still works, the project has failed its biodigital test.</a:t>
+            </a:r>
+          </a:p>
+        </p:txBody>
+      </p:sp>
+      <p:sp>
+        <p:nvSpPr>
+          <p:cNvPr id="10" name="TextBox 9"/>
+          <p:cNvSpPr txBox="1"/>
+          <p:nvPr/>
+        </p:nvSpPr>
+        <p:spPr>
+          <a:xfrm>
+            <a:off x="548640" y="6263640"/>
+            <a:ext cx="10881360" cy="320040"/>
+          </a:xfrm>
+          <a:prstGeom prst="rect">
+            <a:avLst/>
+          </a:prstGeom>
+          <a:noFill/>
+        </p:spPr>
+        <p:txBody>
+          <a:bodyPr wrap="none">
+            <a:spAutoFit/>
+          </a:bodyPr>
+          <a:lstStyle/>
+          <a:p>
+            <a:pPr algn="l"/>
+            <a:r>
+              <a:rPr sz="900">
+                <a:solidFill>
+                  <a:srgbClr val="9A8F84"/>
+                </a:solidFill>
+                <a:latin typeface="Helvetica Neue"/>
+              </a:rPr>
+              <a:t>Extinction Archive · Biodigital chronobiology · BDC 2026  6 / 12</a:t>
             </a:r>
           </a:p>
         </p:txBody>
@@ -4620,6 +10521,14 @@
 <file path=ppt/slides/slide7.xml><?xml version="1.0" encoding="utf-8"?>
 <p:sld xmlns:a="http://schemas.openxmlformats.org/drawingml/2006/main" xmlns:p="http://schemas.openxmlformats.org/presentationml/2006/main" xmlns:r="http://schemas.openxmlformats.org/officeDocument/2006/relationships">
   <p:cSld>
+    <p:bg>
+      <p:bgPr>
+        <a:solidFill>
+          <a:srgbClr val="141210"/>
+        </a:solidFill>
+        <a:effectLst/>
+      </p:bgPr>
+    </p:bg>
     <p:spTree>
       <p:nvGrpSpPr>
         <p:cNvPr id="1" name=""/>
@@ -4629,61 +10538,405 @@
       <p:grpSpPr/>
       <p:sp>
         <p:nvSpPr>
-          <p:cNvPr id="2" name="Title 1"/>
-          <p:cNvSpPr>
-            <a:spLocks noGrp="1"/>
-          </p:cNvSpPr>
-          <p:nvPr>
-            <p:ph type="title"/>
-          </p:nvPr>
-        </p:nvSpPr>
-        <p:spPr/>
-        <p:txBody>
-          <a:bodyPr/>
-          <a:lstStyle/>
-          <a:p>
-            <a:r>
-              <a:t>Biological layer</a:t>
-            </a:r>
-          </a:p>
-        </p:txBody>
-      </p:sp>
-      <p:sp>
-        <p:nvSpPr>
-          <p:cNvPr id="3" name="Content Placeholder 2"/>
-          <p:cNvSpPr>
-            <a:spLocks noGrp="1"/>
-          </p:cNvSpPr>
-          <p:nvPr>
-            <p:ph idx="1"/>
-          </p:nvPr>
-        </p:nvSpPr>
-        <p:spPr/>
-        <p:txBody>
-          <a:bodyPr/>
-          <a:lstStyle/>
-          <a:p>
-            <a:pPr>
-              <a:defRPr sz="1600"/>
-            </a:pPr>
-            <a:r>
-              <a:t>Only traceable evidence enters the archive: tusk isotopes, comparative genomics, morphology as sensory proxy, historical ecology, and acoustic relatives.</a:t>
-            </a:r>
-          </a:p>
-          <a:p>
-            <a:pPr>
-              <a:defRPr sz="1600"/>
-            </a:pPr>
-            <a:r>
-              <a:t>Every strong claim is tagged Cited, Interpolated / Modeled, or Speculative.</a:t>
-            </a:r>
-          </a:p>
-          <a:p>
-            <a:pPr>
-              <a:defRPr sz="1600"/>
-            </a:pPr>
-            <a:r>
-              <a:t>Mammoth copy is locked to “circadian-related genes” until full-text PER2 confirmation exists.</a:t>
+          <p:cNvPr id="2" name="Rectangle 1"/>
+          <p:cNvSpPr/>
+          <p:nvPr/>
+        </p:nvSpPr>
+        <p:spPr>
+          <a:xfrm>
+            <a:off x="0" y="0"/>
+            <a:ext cx="12191695" cy="164592"/>
+          </a:xfrm>
+          <a:prstGeom prst="rect">
+            <a:avLst/>
+          </a:prstGeom>
+          <a:solidFill>
+            <a:srgbClr val="C45C2A"/>
+          </a:solidFill>
+          <a:ln>
+            <a:noFill/>
+          </a:ln>
+        </p:spPr>
+        <p:style>
+          <a:lnRef idx="1">
+            <a:schemeClr val="accent1"/>
+          </a:lnRef>
+          <a:fillRef idx="3">
+            <a:schemeClr val="accent1"/>
+          </a:fillRef>
+          <a:effectRef idx="2">
+            <a:schemeClr val="accent1"/>
+          </a:effectRef>
+          <a:fontRef idx="minor">
+            <a:schemeClr val="lt1"/>
+          </a:fontRef>
+        </p:style>
+        <p:txBody>
+          <a:bodyPr rtlCol="0" anchor="ctr"/>
+          <a:lstStyle/>
+          <a:p>
+            <a:pPr algn="ctr"/>
+          </a:p>
+        </p:txBody>
+      </p:sp>
+      <p:sp>
+        <p:nvSpPr>
+          <p:cNvPr id="3" name="Rectangle 2"/>
+          <p:cNvSpPr/>
+          <p:nvPr/>
+        </p:nvSpPr>
+        <p:spPr>
+          <a:xfrm>
+            <a:off x="9052560" y="164592"/>
+            <a:ext cx="3136392" cy="6693408"/>
+          </a:xfrm>
+          <a:prstGeom prst="rect">
+            <a:avLst/>
+          </a:prstGeom>
+          <a:solidFill>
+            <a:srgbClr val="1E1A17"/>
+          </a:solidFill>
+          <a:ln>
+            <a:noFill/>
+          </a:ln>
+        </p:spPr>
+        <p:style>
+          <a:lnRef idx="1">
+            <a:schemeClr val="accent1"/>
+          </a:lnRef>
+          <a:fillRef idx="3">
+            <a:schemeClr val="accent1"/>
+          </a:fillRef>
+          <a:effectRef idx="2">
+            <a:schemeClr val="accent1"/>
+          </a:effectRef>
+          <a:fontRef idx="minor">
+            <a:schemeClr val="lt1"/>
+          </a:fontRef>
+        </p:style>
+        <p:txBody>
+          <a:bodyPr rtlCol="0" anchor="ctr"/>
+          <a:lstStyle/>
+          <a:p>
+            <a:pPr algn="ctr"/>
+          </a:p>
+        </p:txBody>
+      </p:sp>
+      <p:sp>
+        <p:nvSpPr>
+          <p:cNvPr id="4" name="TextBox 3"/>
+          <p:cNvSpPr txBox="1"/>
+          <p:nvPr/>
+        </p:nvSpPr>
+        <p:spPr>
+          <a:xfrm>
+            <a:off x="640080" y="411480"/>
+            <a:ext cx="4389120" cy="292608"/>
+          </a:xfrm>
+          <a:prstGeom prst="rect">
+            <a:avLst/>
+          </a:prstGeom>
+          <a:noFill/>
+        </p:spPr>
+        <p:txBody>
+          <a:bodyPr wrap="none">
+            <a:spAutoFit/>
+          </a:bodyPr>
+          <a:lstStyle/>
+          <a:p>
+            <a:r>
+              <a:rPr sz="1300" b="1">
+                <a:solidFill>
+                  <a:srgbClr val="C45C2A"/>
+                </a:solidFill>
+                <a:latin typeface="Helvetica Neue"/>
+              </a:rPr>
+              <a:t>DIGITAL LAYER</a:t>
+            </a:r>
+          </a:p>
+        </p:txBody>
+      </p:sp>
+      <p:sp>
+        <p:nvSpPr>
+          <p:cNvPr id="5" name="TextBox 4"/>
+          <p:cNvSpPr txBox="1"/>
+          <p:nvPr/>
+        </p:nvSpPr>
+        <p:spPr>
+          <a:xfrm>
+            <a:off x="640080" y="777240"/>
+            <a:ext cx="7040880" cy="914400"/>
+          </a:xfrm>
+          <a:prstGeom prst="rect">
+            <a:avLst/>
+          </a:prstGeom>
+          <a:noFill/>
+        </p:spPr>
+        <p:txBody>
+          <a:bodyPr wrap="square">
+            <a:spAutoFit/>
+          </a:bodyPr>
+          <a:lstStyle/>
+          <a:p>
+            <a:r>
+              <a:rPr sz="2800" b="1">
+                <a:solidFill>
+                  <a:srgbClr val="E6DFD6"/>
+                </a:solidFill>
+                <a:latin typeface="Helvetica Neue"/>
+              </a:rPr>
+              <a:t>Expressive, but never unconstrained</a:t>
+            </a:r>
+          </a:p>
+        </p:txBody>
+      </p:sp>
+      <p:sp>
+        <p:nvSpPr>
+          <p:cNvPr id="6" name="TextBox 5"/>
+          <p:cNvSpPr txBox="1"/>
+          <p:nvPr/>
+        </p:nvSpPr>
+        <p:spPr>
+          <a:xfrm>
+            <a:off x="731520" y="1828800"/>
+            <a:ext cx="6400800" cy="3474720"/>
+          </a:xfrm>
+          <a:prstGeom prst="rect">
+            <a:avLst/>
+          </a:prstGeom>
+          <a:noFill/>
+        </p:spPr>
+        <p:txBody>
+          <a:bodyPr wrap="square" lIns="0" rIns="0" tIns="0">
+            <a:spAutoFit/>
+          </a:bodyPr>
+          <a:lstStyle/>
+          <a:p>
+            <a:pPr>
+              <a:spcAft>
+                <a:spcPts val="1000"/>
+              </a:spcAft>
+              <a:defRPr sz="2000">
+                <a:solidFill>
+                  <a:srgbClr val="E6DFD6"/>
+                </a:solidFill>
+                <a:latin typeface="Helvetica Neue"/>
+              </a:defRPr>
+            </a:pPr>
+            <a:r>
+              <a:t>Primary image strategy: diffusion plus structural conditioning.</a:t>
+            </a:r>
+          </a:p>
+          <a:p>
+            <a:pPr>
+              <a:spcAft>
+                <a:spcPts val="1000"/>
+              </a:spcAft>
+              <a:defRPr sz="2000">
+                <a:solidFill>
+                  <a:srgbClr val="E6DFD6"/>
+                </a:solidFill>
+                <a:latin typeface="Helvetica Neue"/>
+              </a:defRPr>
+            </a:pPr>
+            <a:r>
+              <a:t>Support layer: procedural shaders for light, fog, atmosphere, and temporal credibility.</a:t>
+            </a:r>
+          </a:p>
+          <a:p>
+            <a:pPr>
+              <a:spcAft>
+                <a:spcPts val="1000"/>
+              </a:spcAft>
+              <a:defRPr sz="2000">
+                <a:solidFill>
+                  <a:srgbClr val="E6DFD6"/>
+                </a:solidFill>
+                <a:latin typeface="Helvetica Neue"/>
+              </a:defRPr>
+            </a:pPr>
+            <a:r>
+              <a:t>A-Frame-first WebXR with desktop fallback and mobile WebAR entry points.</a:t>
+            </a:r>
+          </a:p>
+          <a:p>
+            <a:pPr>
+              <a:spcAft>
+                <a:spcPts val="1000"/>
+              </a:spcAft>
+              <a:defRPr sz="2000">
+                <a:solidFill>
+                  <a:srgbClr val="E6DFD6"/>
+                </a:solidFill>
+                <a:latin typeface="Helvetica Neue"/>
+              </a:defRPr>
+            </a:pPr>
+            <a:r>
+              <a:t>Web Audio DSP ties season, density, and time-of-day to the sonic field.</a:t>
+            </a:r>
+          </a:p>
+          <a:p>
+            <a:pPr>
+              <a:spcAft>
+                <a:spcPts val="1000"/>
+              </a:spcAft>
+              <a:defRPr sz="2000">
+                <a:solidFill>
+                  <a:srgbClr val="E6DFD6"/>
+                </a:solidFill>
+                <a:latin typeface="Helvetica Neue"/>
+              </a:defRPr>
+            </a:pPr>
+            <a:r>
+              <a:t>R and ggplot provide auditable scientific visuals for dossiers and appendix slides.</a:t>
+            </a:r>
+          </a:p>
+        </p:txBody>
+      </p:sp>
+      <p:sp>
+        <p:nvSpPr>
+          <p:cNvPr id="7" name="Rounded Rectangle 6"/>
+          <p:cNvSpPr/>
+          <p:nvPr/>
+        </p:nvSpPr>
+        <p:spPr>
+          <a:xfrm>
+            <a:off x="7726679" y="1554480"/>
+            <a:ext cx="3200400" cy="3291840"/>
+          </a:xfrm>
+          <a:prstGeom prst="roundRect">
+            <a:avLst/>
+          </a:prstGeom>
+          <a:solidFill>
+            <a:srgbClr val="1E1A17"/>
+          </a:solidFill>
+          <a:ln>
+            <a:solidFill>
+              <a:srgbClr val="6B7A8F"/>
+            </a:solidFill>
+          </a:ln>
+        </p:spPr>
+        <p:style>
+          <a:lnRef idx="1">
+            <a:schemeClr val="accent1"/>
+          </a:lnRef>
+          <a:fillRef idx="3">
+            <a:schemeClr val="accent1"/>
+          </a:fillRef>
+          <a:effectRef idx="2">
+            <a:schemeClr val="accent1"/>
+          </a:effectRef>
+          <a:fontRef idx="minor">
+            <a:schemeClr val="lt1"/>
+          </a:fontRef>
+        </p:style>
+        <p:txBody>
+          <a:bodyPr rtlCol="0" anchor="ctr"/>
+          <a:lstStyle/>
+          <a:p>
+            <a:pPr algn="ctr"/>
+          </a:p>
+        </p:txBody>
+      </p:sp>
+      <p:sp>
+        <p:nvSpPr>
+          <p:cNvPr id="8" name="TextBox 7"/>
+          <p:cNvSpPr txBox="1"/>
+          <p:nvPr/>
+        </p:nvSpPr>
+        <p:spPr>
+          <a:xfrm>
+            <a:off x="8001000" y="1828800"/>
+            <a:ext cx="2560320" cy="365760"/>
+          </a:xfrm>
+          <a:prstGeom prst="rect">
+            <a:avLst/>
+          </a:prstGeom>
+          <a:noFill/>
+        </p:spPr>
+        <p:txBody>
+          <a:bodyPr wrap="none">
+            <a:spAutoFit/>
+          </a:bodyPr>
+          <a:lstStyle/>
+          <a:p>
+            <a:r>
+              <a:rPr sz="1200" b="1">
+                <a:solidFill>
+                  <a:srgbClr val="5CB89A"/>
+                </a:solidFill>
+                <a:latin typeface="Helvetica Neue"/>
+              </a:rPr>
+              <a:t>TOOLING</a:t>
+            </a:r>
+          </a:p>
+        </p:txBody>
+      </p:sp>
+      <p:sp>
+        <p:nvSpPr>
+          <p:cNvPr id="9" name="TextBox 8"/>
+          <p:cNvSpPr txBox="1"/>
+          <p:nvPr/>
+        </p:nvSpPr>
+        <p:spPr>
+          <a:xfrm>
+            <a:off x="8001000" y="2240280"/>
+            <a:ext cx="2560320" cy="2194560"/>
+          </a:xfrm>
+          <a:prstGeom prst="rect">
+            <a:avLst/>
+          </a:prstGeom>
+          <a:noFill/>
+        </p:spPr>
+        <p:txBody>
+          <a:bodyPr wrap="none">
+            <a:spAutoFit/>
+          </a:bodyPr>
+          <a:lstStyle/>
+          <a:p>
+            <a:r>
+              <a:rPr sz="1600">
+                <a:solidFill>
+                  <a:srgbClr val="E6DFD6"/>
+                </a:solidFill>
+                <a:latin typeface="Helvetica Neue"/>
+              </a:rPr>
+              <a:t>A-Frame first, Three.js as needed inside the same XR ecosystem.</a:t>
+            </a:r>
+          </a:p>
+        </p:txBody>
+      </p:sp>
+      <p:sp>
+        <p:nvSpPr>
+          <p:cNvPr id="10" name="TextBox 9"/>
+          <p:cNvSpPr txBox="1"/>
+          <p:nvPr/>
+        </p:nvSpPr>
+        <p:spPr>
+          <a:xfrm>
+            <a:off x="548640" y="6263640"/>
+            <a:ext cx="10881360" cy="320040"/>
+          </a:xfrm>
+          <a:prstGeom prst="rect">
+            <a:avLst/>
+          </a:prstGeom>
+          <a:noFill/>
+        </p:spPr>
+        <p:txBody>
+          <a:bodyPr wrap="none">
+            <a:spAutoFit/>
+          </a:bodyPr>
+          <a:lstStyle/>
+          <a:p>
+            <a:pPr algn="l"/>
+            <a:r>
+              <a:rPr sz="900">
+                <a:solidFill>
+                  <a:srgbClr val="9A8F84"/>
+                </a:solidFill>
+                <a:latin typeface="Helvetica Neue"/>
+              </a:rPr>
+              <a:t>Extinction Archive · Biodigital chronobiology · BDC 2026  7 / 12</a:t>
             </a:r>
           </a:p>
         </p:txBody>
@@ -4699,6 +10952,14 @@
 <file path=ppt/slides/slide8.xml><?xml version="1.0" encoding="utf-8"?>
 <p:sld xmlns:a="http://schemas.openxmlformats.org/drawingml/2006/main" xmlns:p="http://schemas.openxmlformats.org/presentationml/2006/main" xmlns:r="http://schemas.openxmlformats.org/officeDocument/2006/relationships">
   <p:cSld>
+    <p:bg>
+      <p:bgPr>
+        <a:solidFill>
+          <a:srgbClr val="141210"/>
+        </a:solidFill>
+        <a:effectLst/>
+      </p:bgPr>
+    </p:bg>
     <p:spTree>
       <p:nvGrpSpPr>
         <p:cNvPr id="1" name=""/>
@@ -4708,69 +10969,389 @@
       <p:grpSpPr/>
       <p:sp>
         <p:nvSpPr>
-          <p:cNvPr id="2" name="Title 1"/>
-          <p:cNvSpPr>
-            <a:spLocks noGrp="1"/>
-          </p:cNvSpPr>
-          <p:nvPr>
-            <p:ph type="title"/>
-          </p:nvPr>
-        </p:nvSpPr>
-        <p:spPr/>
-        <p:txBody>
-          <a:bodyPr/>
-          <a:lstStyle/>
-          <a:p>
-            <a:r>
-              <a:t>Digital layer &amp; design techniques</a:t>
-            </a:r>
-          </a:p>
-        </p:txBody>
-      </p:sp>
-      <p:sp>
-        <p:nvSpPr>
-          <p:cNvPr id="3" name="Content Placeholder 2"/>
-          <p:cNvSpPr>
-            <a:spLocks noGrp="1"/>
-          </p:cNvSpPr>
-          <p:nvPr>
-            <p:ph idx="1"/>
-          </p:nvPr>
-        </p:nvSpPr>
-        <p:spPr/>
-        <p:txBody>
-          <a:bodyPr/>
-          <a:lstStyle/>
-          <a:p>
-            <a:pPr>
-              <a:defRPr sz="1600"/>
-            </a:pPr>
-            <a:r>
-              <a:t>WebXR stack: A-Frame / Three.js with desktop fallback; minimal QR-linked physical anchor for summit reliability.</a:t>
-            </a:r>
-          </a:p>
-          <a:p>
-            <a:pPr>
-              <a:defRPr sz="1600"/>
-            </a:pPr>
-            <a:r>
-              <a:t>Generative image strategy: control-first passes, procedural atmosphere, and palette / sun rules bounded by paleo proxies.</a:t>
-            </a:r>
-          </a:p>
-          <a:p>
-            <a:pPr>
-              <a:defRPr sz="1600"/>
-            </a:pPr>
-            <a:r>
-              <a:t>Time scrubber, sonification / Web Audio, and on-screen citation tags turn atmosphere into argument rather than decoration.</a:t>
-            </a:r>
-          </a:p>
-          <a:p>
-            <a:pPr>
-              <a:defRPr sz="1600"/>
-            </a:pPr>
-            <a:r>
-              <a:t>Reflection UI uses auditable heuristics, not opaque LLM outputs, to compare viewer input with ethics themes.</a:t>
+          <p:cNvPr id="2" name="Rectangle 1"/>
+          <p:cNvSpPr/>
+          <p:nvPr/>
+        </p:nvSpPr>
+        <p:spPr>
+          <a:xfrm>
+            <a:off x="0" y="0"/>
+            <a:ext cx="12191695" cy="164592"/>
+          </a:xfrm>
+          <a:prstGeom prst="rect">
+            <a:avLst/>
+          </a:prstGeom>
+          <a:solidFill>
+            <a:srgbClr val="C45C2A"/>
+          </a:solidFill>
+          <a:ln>
+            <a:noFill/>
+          </a:ln>
+        </p:spPr>
+        <p:style>
+          <a:lnRef idx="1">
+            <a:schemeClr val="accent1"/>
+          </a:lnRef>
+          <a:fillRef idx="3">
+            <a:schemeClr val="accent1"/>
+          </a:fillRef>
+          <a:effectRef idx="2">
+            <a:schemeClr val="accent1"/>
+          </a:effectRef>
+          <a:fontRef idx="minor">
+            <a:schemeClr val="lt1"/>
+          </a:fontRef>
+        </p:style>
+        <p:txBody>
+          <a:bodyPr rtlCol="0" anchor="ctr"/>
+          <a:lstStyle/>
+          <a:p>
+            <a:pPr algn="ctr"/>
+          </a:p>
+        </p:txBody>
+      </p:sp>
+      <p:sp>
+        <p:nvSpPr>
+          <p:cNvPr id="3" name="Rectangle 2"/>
+          <p:cNvSpPr/>
+          <p:nvPr/>
+        </p:nvSpPr>
+        <p:spPr>
+          <a:xfrm>
+            <a:off x="9052560" y="164592"/>
+            <a:ext cx="3136392" cy="6693408"/>
+          </a:xfrm>
+          <a:prstGeom prst="rect">
+            <a:avLst/>
+          </a:prstGeom>
+          <a:solidFill>
+            <a:srgbClr val="1E1A17"/>
+          </a:solidFill>
+          <a:ln>
+            <a:noFill/>
+          </a:ln>
+        </p:spPr>
+        <p:style>
+          <a:lnRef idx="1">
+            <a:schemeClr val="accent1"/>
+          </a:lnRef>
+          <a:fillRef idx="3">
+            <a:schemeClr val="accent1"/>
+          </a:fillRef>
+          <a:effectRef idx="2">
+            <a:schemeClr val="accent1"/>
+          </a:effectRef>
+          <a:fontRef idx="minor">
+            <a:schemeClr val="lt1"/>
+          </a:fontRef>
+        </p:style>
+        <p:txBody>
+          <a:bodyPr rtlCol="0" anchor="ctr"/>
+          <a:lstStyle/>
+          <a:p>
+            <a:pPr algn="ctr"/>
+          </a:p>
+        </p:txBody>
+      </p:sp>
+      <p:sp>
+        <p:nvSpPr>
+          <p:cNvPr id="4" name="TextBox 3"/>
+          <p:cNvSpPr txBox="1"/>
+          <p:nvPr/>
+        </p:nvSpPr>
+        <p:spPr>
+          <a:xfrm>
+            <a:off x="640080" y="411480"/>
+            <a:ext cx="4389120" cy="292608"/>
+          </a:xfrm>
+          <a:prstGeom prst="rect">
+            <a:avLst/>
+          </a:prstGeom>
+          <a:noFill/>
+        </p:spPr>
+        <p:txBody>
+          <a:bodyPr wrap="none">
+            <a:spAutoFit/>
+          </a:bodyPr>
+          <a:lstStyle/>
+          <a:p>
+            <a:r>
+              <a:rPr sz="1300" b="1">
+                <a:solidFill>
+                  <a:srgbClr val="C45C2A"/>
+                </a:solidFill>
+                <a:latin typeface="Helvetica Neue"/>
+              </a:rPr>
+              <a:t>PHYSICAL CONTRAST</a:t>
+            </a:r>
+          </a:p>
+        </p:txBody>
+      </p:sp>
+      <p:sp>
+        <p:nvSpPr>
+          <p:cNvPr id="5" name="TextBox 4"/>
+          <p:cNvSpPr txBox="1"/>
+          <p:nvPr/>
+        </p:nvSpPr>
+        <p:spPr>
+          <a:xfrm>
+            <a:off x="640080" y="777240"/>
+            <a:ext cx="7040880" cy="914400"/>
+          </a:xfrm>
+          <a:prstGeom prst="rect">
+            <a:avLst/>
+          </a:prstGeom>
+          <a:noFill/>
+        </p:spPr>
+        <p:txBody>
+          <a:bodyPr wrap="square">
+            <a:spAutoFit/>
+          </a:bodyPr>
+          <a:lstStyle/>
+          <a:p>
+            <a:r>
+              <a:rPr sz="2800" b="1">
+                <a:solidFill>
+                  <a:srgbClr val="E6DFD6"/>
+                </a:solidFill>
+                <a:latin typeface="Helvetica Neue"/>
+              </a:rPr>
+              <a:t>Minimal physical anchor + WebXR entry (Summit build)</a:t>
+            </a:r>
+          </a:p>
+        </p:txBody>
+      </p:sp>
+      <p:sp>
+        <p:nvSpPr>
+          <p:cNvPr id="6" name="TextBox 5"/>
+          <p:cNvSpPr txBox="1"/>
+          <p:nvPr/>
+        </p:nvSpPr>
+        <p:spPr>
+          <a:xfrm>
+            <a:off x="731520" y="1828800"/>
+            <a:ext cx="6400800" cy="3474720"/>
+          </a:xfrm>
+          <a:prstGeom prst="rect">
+            <a:avLst/>
+          </a:prstGeom>
+          <a:noFill/>
+        </p:spPr>
+        <p:txBody>
+          <a:bodyPr wrap="square" lIns="0" rIns="0" tIns="0">
+            <a:spAutoFit/>
+          </a:bodyPr>
+          <a:lstStyle/>
+          <a:p>
+            <a:pPr>
+              <a:spcAft>
+                <a:spcPts val="1000"/>
+              </a:spcAft>
+              <a:defRPr sz="2000">
+                <a:solidFill>
+                  <a:srgbClr val="E6DFD6"/>
+                </a:solidFill>
+                <a:latin typeface="Helvetica Neue"/>
+              </a:defRPr>
+            </a:pPr>
+            <a:r>
+              <a:t>3D-printed focal object anchors the body of the extinct species in gallery space.</a:t>
+            </a:r>
+          </a:p>
+          <a:p>
+            <a:pPr>
+              <a:spcAft>
+                <a:spcPts val="1000"/>
+              </a:spcAft>
+              <a:defRPr sz="2000">
+                <a:solidFill>
+                  <a:srgbClr val="E6DFD6"/>
+                </a:solidFill>
+                <a:latin typeface="Helvetica Neue"/>
+              </a:defRPr>
+            </a:pPr>
+            <a:r>
+              <a:t>Mobile WebAR opens dossier content from the physical object.</a:t>
+            </a:r>
+          </a:p>
+          <a:p>
+            <a:pPr>
+              <a:spcAft>
+                <a:spcPts val="1000"/>
+              </a:spcAft>
+              <a:defRPr sz="2000">
+                <a:solidFill>
+                  <a:srgbClr val="E6DFD6"/>
+                </a:solidFill>
+                <a:latin typeface="Helvetica Neue"/>
+              </a:defRPr>
+            </a:pPr>
+            <a:r>
+              <a:t>Safe tactile materials symbolize tundra and steppe without claiming literal reconstruction.</a:t>
+            </a:r>
+          </a:p>
+          <a:p>
+            <a:pPr>
+              <a:spcAft>
+                <a:spcPts val="1000"/>
+              </a:spcAft>
+              <a:defRPr sz="2000">
+                <a:solidFill>
+                  <a:srgbClr val="E6DFD6"/>
+                </a:solidFill>
+                <a:latin typeface="Helvetica Neue"/>
+              </a:defRPr>
+            </a:pPr>
+            <a:r>
+              <a:t>Plants plus soil moisture, light, and temperature sensors drive one live audio bus.</a:t>
+            </a:r>
+          </a:p>
+        </p:txBody>
+      </p:sp>
+      <p:sp>
+        <p:nvSpPr>
+          <p:cNvPr id="7" name="Rounded Rectangle 6"/>
+          <p:cNvSpPr/>
+          <p:nvPr/>
+        </p:nvSpPr>
+        <p:spPr>
+          <a:xfrm>
+            <a:off x="7726679" y="1554480"/>
+            <a:ext cx="3200400" cy="3291840"/>
+          </a:xfrm>
+          <a:prstGeom prst="roundRect">
+            <a:avLst/>
+          </a:prstGeom>
+          <a:solidFill>
+            <a:srgbClr val="1E1A17"/>
+          </a:solidFill>
+          <a:ln>
+            <a:solidFill>
+              <a:srgbClr val="6B7A8F"/>
+            </a:solidFill>
+          </a:ln>
+        </p:spPr>
+        <p:style>
+          <a:lnRef idx="1">
+            <a:schemeClr val="accent1"/>
+          </a:lnRef>
+          <a:fillRef idx="3">
+            <a:schemeClr val="accent1"/>
+          </a:fillRef>
+          <a:effectRef idx="2">
+            <a:schemeClr val="accent1"/>
+          </a:effectRef>
+          <a:fontRef idx="minor">
+            <a:schemeClr val="lt1"/>
+          </a:fontRef>
+        </p:style>
+        <p:txBody>
+          <a:bodyPr rtlCol="0" anchor="ctr"/>
+          <a:lstStyle/>
+          <a:p>
+            <a:pPr algn="ctr"/>
+          </a:p>
+        </p:txBody>
+      </p:sp>
+      <p:sp>
+        <p:nvSpPr>
+          <p:cNvPr id="8" name="TextBox 7"/>
+          <p:cNvSpPr txBox="1"/>
+          <p:nvPr/>
+        </p:nvSpPr>
+        <p:spPr>
+          <a:xfrm>
+            <a:off x="8001000" y="1828800"/>
+            <a:ext cx="2560320" cy="365760"/>
+          </a:xfrm>
+          <a:prstGeom prst="rect">
+            <a:avLst/>
+          </a:prstGeom>
+          <a:noFill/>
+        </p:spPr>
+        <p:txBody>
+          <a:bodyPr wrap="none">
+            <a:spAutoFit/>
+          </a:bodyPr>
+          <a:lstStyle/>
+          <a:p>
+            <a:r>
+              <a:rPr sz="1200" b="1">
+                <a:solidFill>
+                  <a:srgbClr val="5CB89A"/>
+                </a:solidFill>
+                <a:latin typeface="Helvetica Neue"/>
+              </a:rPr>
+              <a:t>INSTALLATION LABEL</a:t>
+            </a:r>
+          </a:p>
+        </p:txBody>
+      </p:sp>
+      <p:sp>
+        <p:nvSpPr>
+          <p:cNvPr id="9" name="TextBox 8"/>
+          <p:cNvSpPr txBox="1"/>
+          <p:nvPr/>
+        </p:nvSpPr>
+        <p:spPr>
+          <a:xfrm>
+            <a:off x="8001000" y="2240280"/>
+            <a:ext cx="2560320" cy="2194560"/>
+          </a:xfrm>
+          <a:prstGeom prst="rect">
+            <a:avLst/>
+          </a:prstGeom>
+          <a:noFill/>
+        </p:spPr>
+        <p:txBody>
+          <a:bodyPr wrap="none">
+            <a:spAutoFit/>
+          </a:bodyPr>
+          <a:lstStyle/>
+          <a:p>
+            <a:r>
+              <a:rPr sz="1600">
+                <a:solidFill>
+                  <a:srgbClr val="E6DFD6"/>
+                </a:solidFill>
+                <a:latin typeface="Helvetica Neue"/>
+              </a:rPr>
+              <a:t>Not a simulation of extinct habitat — an index of evidence, uncertainty, and responsibility.</a:t>
+            </a:r>
+          </a:p>
+        </p:txBody>
+      </p:sp>
+      <p:sp>
+        <p:nvSpPr>
+          <p:cNvPr id="10" name="TextBox 9"/>
+          <p:cNvSpPr txBox="1"/>
+          <p:nvPr/>
+        </p:nvSpPr>
+        <p:spPr>
+          <a:xfrm>
+            <a:off x="548640" y="6263640"/>
+            <a:ext cx="10881360" cy="320040"/>
+          </a:xfrm>
+          <a:prstGeom prst="rect">
+            <a:avLst/>
+          </a:prstGeom>
+          <a:noFill/>
+        </p:spPr>
+        <p:txBody>
+          <a:bodyPr wrap="none">
+            <a:spAutoFit/>
+          </a:bodyPr>
+          <a:lstStyle/>
+          <a:p>
+            <a:pPr algn="l"/>
+            <a:r>
+              <a:rPr sz="900">
+                <a:solidFill>
+                  <a:srgbClr val="9A8F84"/>
+                </a:solidFill>
+                <a:latin typeface="Helvetica Neue"/>
+              </a:rPr>
+              <a:t>Extinction Archive · Biodigital chronobiology · BDC 2026  8 / 12</a:t>
             </a:r>
           </a:p>
         </p:txBody>
@@ -4786,6 +11367,14 @@
 <file path=ppt/slides/slide9.xml><?xml version="1.0" encoding="utf-8"?>
 <p:sld xmlns:a="http://schemas.openxmlformats.org/drawingml/2006/main" xmlns:p="http://schemas.openxmlformats.org/presentationml/2006/main" xmlns:r="http://schemas.openxmlformats.org/officeDocument/2006/relationships">
   <p:cSld>
+    <p:bg>
+      <p:bgPr>
+        <a:solidFill>
+          <a:srgbClr val="141210"/>
+        </a:solidFill>
+        <a:effectLst/>
+      </p:bgPr>
+    </p:bg>
     <p:spTree>
       <p:nvGrpSpPr>
         <p:cNvPr id="1" name=""/>
@@ -4795,117 +11384,389 @@
       <p:grpSpPr/>
       <p:sp>
         <p:nvSpPr>
-          <p:cNvPr id="2" name="Title 1"/>
-          <p:cNvSpPr>
-            <a:spLocks noGrp="1"/>
-          </p:cNvSpPr>
-          <p:nvPr>
-            <p:ph type="title"/>
-          </p:nvPr>
-        </p:nvSpPr>
-        <p:spPr/>
-        <p:txBody>
-          <a:bodyPr/>
-          <a:lstStyle/>
-          <a:p>
-            <a:r>
-              <a:t>Two species - two dossiers</a:t>
-            </a:r>
-          </a:p>
-        </p:txBody>
-      </p:sp>
-      <p:sp>
-        <p:nvSpPr>
-          <p:cNvPr id="3" name="Content Placeholder 2"/>
-          <p:cNvSpPr>
-            <a:spLocks noGrp="1"/>
-          </p:cNvSpPr>
-          <p:nvPr>
-            <p:ph idx="1" sz="half"/>
-          </p:nvPr>
-        </p:nvSpPr>
-        <p:spPr/>
-        <p:txBody>
-          <a:bodyPr/>
-          <a:lstStyle/>
-          <a:p>
-            <a:pPr>
-              <a:defRPr b="1" sz="1400"/>
-            </a:pPr>
-            <a:r>
-              <a:t>Woolly mammoth</a:t>
-            </a:r>
-          </a:p>
-          <a:p>
-            <a:pPr>
-              <a:defRPr sz="1300"/>
-            </a:pPr>
-            <a:r>
-              <a:t>Hero species for Arctic rhythm, mammoth-steppe atmosphere, and de-extinction pressure.</a:t>
-            </a:r>
-          </a:p>
-          <a:p>
-            <a:pPr>
-              <a:defRPr sz="1300"/>
-            </a:pPr>
-            <a:r>
-              <a:t>Lynch 2015 circadian-related genes; Lu 2010 reindeer analogy [Interpolated]; Zimov 2012 habitat pulse.</a:t>
-            </a:r>
-          </a:p>
-          <a:p>
-            <a:pPr>
-              <a:defRPr sz="1300"/>
-            </a:pPr>
-            <a:r>
-              <a:t>Additional anchors: Wooller 2021 tusk isotope mobility; Nogues-Bravo 2008 climate x human extinction context.</a:t>
-            </a:r>
-          </a:p>
-        </p:txBody>
-      </p:sp>
-      <p:sp>
-        <p:nvSpPr>
-          <p:cNvPr id="4" name="Content Placeholder 3"/>
-          <p:cNvSpPr>
-            <a:spLocks noGrp="1"/>
-          </p:cNvSpPr>
-          <p:nvPr>
-            <p:ph idx="2" sz="half"/>
-          </p:nvPr>
-        </p:nvSpPr>
-        <p:spPr/>
-        <p:txBody>
-          <a:bodyPr/>
-          <a:lstStyle/>
-          <a:p>
-            <a:pPr>
-              <a:defRPr b="1" sz="1400"/>
-            </a:pPr>
-            <a:r>
-              <a:t>Thylacine</a:t>
-            </a:r>
-          </a:p>
-          <a:p>
-            <a:pPr>
-              <a:defRPr sz="1300"/>
-            </a:pPr>
-            <a:r>
-              <a:t>Structural echo for crepuscular vision, colonial memory, and cultural sovereignty.</a:t>
-            </a:r>
-          </a:p>
-          <a:p>
-            <a:pPr>
-              <a:defRPr sz="1300"/>
-            </a:pPr>
-            <a:r>
-              <a:t>Pozniak 2018 orbit / diel activity; Mass &amp; Supin 2020 RGC methods [Interpolated]; Paddle 2000; Sleightholme &amp; Campbell 2016.</a:t>
-            </a:r>
-          </a:p>
-          <a:p>
-            <a:pPr>
-              <a:defRPr sz="1300"/>
-            </a:pPr>
-            <a:r>
-              <a:t>T5 context: Clements 2025 plus Palawa-led / centered Rimmer 2020, Lehman 2013, and Schlunke 2025.</a:t>
+          <p:cNvPr id="2" name="Rectangle 1"/>
+          <p:cNvSpPr/>
+          <p:nvPr/>
+        </p:nvSpPr>
+        <p:spPr>
+          <a:xfrm>
+            <a:off x="0" y="0"/>
+            <a:ext cx="12191695" cy="164592"/>
+          </a:xfrm>
+          <a:prstGeom prst="rect">
+            <a:avLst/>
+          </a:prstGeom>
+          <a:solidFill>
+            <a:srgbClr val="C45C2A"/>
+          </a:solidFill>
+          <a:ln>
+            <a:noFill/>
+          </a:ln>
+        </p:spPr>
+        <p:style>
+          <a:lnRef idx="1">
+            <a:schemeClr val="accent1"/>
+          </a:lnRef>
+          <a:fillRef idx="3">
+            <a:schemeClr val="accent1"/>
+          </a:fillRef>
+          <a:effectRef idx="2">
+            <a:schemeClr val="accent1"/>
+          </a:effectRef>
+          <a:fontRef idx="minor">
+            <a:schemeClr val="lt1"/>
+          </a:fontRef>
+        </p:style>
+        <p:txBody>
+          <a:bodyPr rtlCol="0" anchor="ctr"/>
+          <a:lstStyle/>
+          <a:p>
+            <a:pPr algn="ctr"/>
+          </a:p>
+        </p:txBody>
+      </p:sp>
+      <p:sp>
+        <p:nvSpPr>
+          <p:cNvPr id="3" name="Rectangle 2"/>
+          <p:cNvSpPr/>
+          <p:nvPr/>
+        </p:nvSpPr>
+        <p:spPr>
+          <a:xfrm>
+            <a:off x="9052560" y="164592"/>
+            <a:ext cx="3136392" cy="6693408"/>
+          </a:xfrm>
+          <a:prstGeom prst="rect">
+            <a:avLst/>
+          </a:prstGeom>
+          <a:solidFill>
+            <a:srgbClr val="1E1A17"/>
+          </a:solidFill>
+          <a:ln>
+            <a:noFill/>
+          </a:ln>
+        </p:spPr>
+        <p:style>
+          <a:lnRef idx="1">
+            <a:schemeClr val="accent1"/>
+          </a:lnRef>
+          <a:fillRef idx="3">
+            <a:schemeClr val="accent1"/>
+          </a:fillRef>
+          <a:effectRef idx="2">
+            <a:schemeClr val="accent1"/>
+          </a:effectRef>
+          <a:fontRef idx="minor">
+            <a:schemeClr val="lt1"/>
+          </a:fontRef>
+        </p:style>
+        <p:txBody>
+          <a:bodyPr rtlCol="0" anchor="ctr"/>
+          <a:lstStyle/>
+          <a:p>
+            <a:pPr algn="ctr"/>
+          </a:p>
+        </p:txBody>
+      </p:sp>
+      <p:sp>
+        <p:nvSpPr>
+          <p:cNvPr id="4" name="TextBox 3"/>
+          <p:cNvSpPr txBox="1"/>
+          <p:nvPr/>
+        </p:nvSpPr>
+        <p:spPr>
+          <a:xfrm>
+            <a:off x="640080" y="411480"/>
+            <a:ext cx="4389120" cy="292608"/>
+          </a:xfrm>
+          <a:prstGeom prst="rect">
+            <a:avLst/>
+          </a:prstGeom>
+          <a:noFill/>
+        </p:spPr>
+        <p:txBody>
+          <a:bodyPr wrap="none">
+            <a:spAutoFit/>
+          </a:bodyPr>
+          <a:lstStyle/>
+          <a:p>
+            <a:r>
+              <a:rPr sz="1300" b="1">
+                <a:solidFill>
+                  <a:srgbClr val="C45C2A"/>
+                </a:solidFill>
+                <a:latin typeface="Helvetica Neue"/>
+              </a:rPr>
+              <a:t>ETHICS AND REFLECTION</a:t>
+            </a:r>
+          </a:p>
+        </p:txBody>
+      </p:sp>
+      <p:sp>
+        <p:nvSpPr>
+          <p:cNvPr id="5" name="TextBox 4"/>
+          <p:cNvSpPr txBox="1"/>
+          <p:nvPr/>
+        </p:nvSpPr>
+        <p:spPr>
+          <a:xfrm>
+            <a:off x="640080" y="777240"/>
+            <a:ext cx="7040880" cy="914400"/>
+          </a:xfrm>
+          <a:prstGeom prst="rect">
+            <a:avLst/>
+          </a:prstGeom>
+          <a:noFill/>
+        </p:spPr>
+        <p:txBody>
+          <a:bodyPr wrap="square">
+            <a:spAutoFit/>
+          </a:bodyPr>
+          <a:lstStyle/>
+          <a:p>
+            <a:r>
+              <a:rPr sz="2800" b="1">
+                <a:solidFill>
+                  <a:srgbClr val="E6DFD6"/>
+                </a:solidFill>
+                <a:latin typeface="Helvetica Neue"/>
+              </a:rPr>
+              <a:t>Reflection is part of the interface</a:t>
+            </a:r>
+          </a:p>
+        </p:txBody>
+      </p:sp>
+      <p:sp>
+        <p:nvSpPr>
+          <p:cNvPr id="6" name="TextBox 5"/>
+          <p:cNvSpPr txBox="1"/>
+          <p:nvPr/>
+        </p:nvSpPr>
+        <p:spPr>
+          <a:xfrm>
+            <a:off x="731520" y="1828800"/>
+            <a:ext cx="6400800" cy="3474720"/>
+          </a:xfrm>
+          <a:prstGeom prst="rect">
+            <a:avLst/>
+          </a:prstGeom>
+          <a:noFill/>
+        </p:spPr>
+        <p:txBody>
+          <a:bodyPr wrap="square" lIns="0" rIns="0" tIns="0">
+            <a:spAutoFit/>
+          </a:bodyPr>
+          <a:lstStyle/>
+          <a:p>
+            <a:pPr>
+              <a:spcAft>
+                <a:spcPts val="1000"/>
+              </a:spcAft>
+              <a:defRPr sz="2000">
+                <a:solidFill>
+                  <a:srgbClr val="E6DFD6"/>
+                </a:solidFill>
+                <a:latin typeface="Helvetica Neue"/>
+              </a:defRPr>
+            </a:pPr>
+            <a:r>
+              <a:t>Digital resurrection is kept distinct from laboratory de-extinction discourse.</a:t>
+            </a:r>
+          </a:p>
+          <a:p>
+            <a:pPr>
+              <a:spcAft>
+                <a:spcPts val="1000"/>
+              </a:spcAft>
+              <a:defRPr sz="2000">
+                <a:solidFill>
+                  <a:srgbClr val="E6DFD6"/>
+                </a:solidFill>
+                <a:latin typeface="Helvetica Neue"/>
+              </a:defRPr>
+            </a:pPr>
+            <a:r>
+              <a:t>Visitors face choices around conservation resources, land-use pressure, and moral hazard.</a:t>
+            </a:r>
+          </a:p>
+          <a:p>
+            <a:pPr>
+              <a:spcAft>
+                <a:spcPts val="1000"/>
+              </a:spcAft>
+              <a:defRPr sz="2000">
+                <a:solidFill>
+                  <a:srgbClr val="E6DFD6"/>
+                </a:solidFill>
+                <a:latin typeface="Helvetica Neue"/>
+              </a:defRPr>
+            </a:pPr>
+            <a:r>
+              <a:t>AI-generated confidence is actively countered through tier labels, provenance, and rule-based consequences.</a:t>
+            </a:r>
+          </a:p>
+          <a:p>
+            <a:pPr>
+              <a:spcAft>
+                <a:spcPts val="1000"/>
+              </a:spcAft>
+              <a:defRPr sz="2000">
+                <a:solidFill>
+                  <a:srgbClr val="E6DFD6"/>
+                </a:solidFill>
+                <a:latin typeface="Helvetica Neue"/>
+              </a:defRPr>
+            </a:pPr>
+            <a:r>
+              <a:t>The project avoids speaking for communities it has not collaborated with.</a:t>
+            </a:r>
+          </a:p>
+        </p:txBody>
+      </p:sp>
+      <p:sp>
+        <p:nvSpPr>
+          <p:cNvPr id="7" name="Rounded Rectangle 6"/>
+          <p:cNvSpPr/>
+          <p:nvPr/>
+        </p:nvSpPr>
+        <p:spPr>
+          <a:xfrm>
+            <a:off x="7726679" y="1554480"/>
+            <a:ext cx="3200400" cy="3291840"/>
+          </a:xfrm>
+          <a:prstGeom prst="roundRect">
+            <a:avLst/>
+          </a:prstGeom>
+          <a:solidFill>
+            <a:srgbClr val="1E1A17"/>
+          </a:solidFill>
+          <a:ln>
+            <a:solidFill>
+              <a:srgbClr val="6B7A8F"/>
+            </a:solidFill>
+          </a:ln>
+        </p:spPr>
+        <p:style>
+          <a:lnRef idx="1">
+            <a:schemeClr val="accent1"/>
+          </a:lnRef>
+          <a:fillRef idx="3">
+            <a:schemeClr val="accent1"/>
+          </a:fillRef>
+          <a:effectRef idx="2">
+            <a:schemeClr val="accent1"/>
+          </a:effectRef>
+          <a:fontRef idx="minor">
+            <a:schemeClr val="lt1"/>
+          </a:fontRef>
+        </p:style>
+        <p:txBody>
+          <a:bodyPr rtlCol="0" anchor="ctr"/>
+          <a:lstStyle/>
+          <a:p>
+            <a:pPr algn="ctr"/>
+          </a:p>
+        </p:txBody>
+      </p:sp>
+      <p:sp>
+        <p:nvSpPr>
+          <p:cNvPr id="8" name="TextBox 7"/>
+          <p:cNvSpPr txBox="1"/>
+          <p:nvPr/>
+        </p:nvSpPr>
+        <p:spPr>
+          <a:xfrm>
+            <a:off x="8001000" y="1828800"/>
+            <a:ext cx="2560320" cy="365760"/>
+          </a:xfrm>
+          <a:prstGeom prst="rect">
+            <a:avLst/>
+          </a:prstGeom>
+          <a:noFill/>
+        </p:spPr>
+        <p:txBody>
+          <a:bodyPr wrap="none">
+            <a:spAutoFit/>
+          </a:bodyPr>
+          <a:lstStyle/>
+          <a:p>
+            <a:r>
+              <a:rPr sz="1200" b="1">
+                <a:solidFill>
+                  <a:srgbClr val="5CB89A"/>
+                </a:solidFill>
+                <a:latin typeface="Helvetica Neue"/>
+              </a:rPr>
+              <a:t>DESIRED EFFECT</a:t>
+            </a:r>
+          </a:p>
+        </p:txBody>
+      </p:sp>
+      <p:sp>
+        <p:nvSpPr>
+          <p:cNvPr id="9" name="TextBox 8"/>
+          <p:cNvSpPr txBox="1"/>
+          <p:nvPr/>
+        </p:nvSpPr>
+        <p:spPr>
+          <a:xfrm>
+            <a:off x="8001000" y="2240280"/>
+            <a:ext cx="2560320" cy="2194560"/>
+          </a:xfrm>
+          <a:prstGeom prst="rect">
+            <a:avLst/>
+          </a:prstGeom>
+          <a:noFill/>
+        </p:spPr>
+        <p:txBody>
+          <a:bodyPr wrap="none">
+            <a:spAutoFit/>
+          </a:bodyPr>
+          <a:lstStyle/>
+          <a:p>
+            <a:r>
+              <a:rPr sz="1600">
+                <a:solidFill>
+                  <a:srgbClr val="E6DFD6"/>
+                </a:solidFill>
+                <a:latin typeface="Helvetica Neue"/>
+              </a:rPr>
+              <a:t>Move from grief to responsibility, not from grief to spectacle.</a:t>
+            </a:r>
+          </a:p>
+        </p:txBody>
+      </p:sp>
+      <p:sp>
+        <p:nvSpPr>
+          <p:cNvPr id="10" name="TextBox 9"/>
+          <p:cNvSpPr txBox="1"/>
+          <p:nvPr/>
+        </p:nvSpPr>
+        <p:spPr>
+          <a:xfrm>
+            <a:off x="548640" y="6263640"/>
+            <a:ext cx="10881360" cy="320040"/>
+          </a:xfrm>
+          <a:prstGeom prst="rect">
+            <a:avLst/>
+          </a:prstGeom>
+          <a:noFill/>
+        </p:spPr>
+        <p:txBody>
+          <a:bodyPr wrap="none">
+            <a:spAutoFit/>
+          </a:bodyPr>
+          <a:lstStyle/>
+          <a:p>
+            <a:pPr algn="l"/>
+            <a:r>
+              <a:rPr sz="900">
+                <a:solidFill>
+                  <a:srgbClr val="9A8F84"/>
+                </a:solidFill>
+                <a:latin typeface="Helvetica Neue"/>
+              </a:rPr>
+              <a:t>Extinction Archive · Biodigital chronobiology · BDC 2026  9 / 12</a:t>
             </a:r>
           </a:p>
         </p:txBody>
